--- a/presenations/Bayesian models les3.pptx
+++ b/presenations/Bayesian models les3.pptx
@@ -5,7 +5,7 @@
     <p:sldMasterId id="2147483648" r:id="rId1"/>
   </p:sldMasterIdLst>
   <p:notesMasterIdLst>
-    <p:notesMasterId r:id="rId22"/>
+    <p:notesMasterId r:id="rId23"/>
   </p:notesMasterIdLst>
   <p:sldIdLst>
     <p:sldId id="256" r:id="rId2"/>
@@ -23,11 +23,12 @@
     <p:sldId id="268" r:id="rId14"/>
     <p:sldId id="269" r:id="rId15"/>
     <p:sldId id="270" r:id="rId16"/>
-    <p:sldId id="271" r:id="rId17"/>
-    <p:sldId id="272" r:id="rId18"/>
-    <p:sldId id="273" r:id="rId19"/>
-    <p:sldId id="274" r:id="rId20"/>
-    <p:sldId id="275" r:id="rId21"/>
+    <p:sldId id="276" r:id="rId17"/>
+    <p:sldId id="271" r:id="rId18"/>
+    <p:sldId id="272" r:id="rId19"/>
+    <p:sldId id="273" r:id="rId20"/>
+    <p:sldId id="274" r:id="rId21"/>
+    <p:sldId id="275" r:id="rId22"/>
   </p:sldIdLst>
   <p:sldSz cx="12192000" cy="6858000"/>
   <p:notesSz cx="6858000" cy="9144000"/>
@@ -1849,7 +1850,7 @@
           <a:p>
             <a:fld id="{5BCAD085-E8A6-8845-BD4E-CB4CCA059FC4}" type="datetimeFigureOut">
               <a:rPr lang="en-US" smtClean="0"/>
-              <a:t>10/13/2026</a:t>
+              <a:t>10/21/2026</a:t>
             </a:fld>
             <a:endParaRPr lang="en-US"/>
           </a:p>
@@ -2017,7 +2018,7 @@
           <a:p>
             <a:fld id="{5BCAD085-E8A6-8845-BD4E-CB4CCA059FC4}" type="datetimeFigureOut">
               <a:rPr lang="en-US" smtClean="0"/>
-              <a:t>10/13/2026</a:t>
+              <a:t>10/21/2026</a:t>
             </a:fld>
             <a:endParaRPr lang="en-US"/>
           </a:p>
@@ -2195,7 +2196,7 @@
           <a:p>
             <a:fld id="{5BCAD085-E8A6-8845-BD4E-CB4CCA059FC4}" type="datetimeFigureOut">
               <a:rPr lang="en-US" smtClean="0"/>
-              <a:t>10/13/2026</a:t>
+              <a:t>10/21/2026</a:t>
             </a:fld>
             <a:endParaRPr lang="en-US"/>
           </a:p>
@@ -2363,7 +2364,7 @@
           <a:p>
             <a:fld id="{5BCAD085-E8A6-8845-BD4E-CB4CCA059FC4}" type="datetimeFigureOut">
               <a:rPr lang="en-US" smtClean="0"/>
-              <a:t>10/13/2026</a:t>
+              <a:t>10/21/2026</a:t>
             </a:fld>
             <a:endParaRPr lang="en-US"/>
           </a:p>
@@ -2608,7 +2609,7 @@
           <a:p>
             <a:fld id="{5BCAD085-E8A6-8845-BD4E-CB4CCA059FC4}" type="datetimeFigureOut">
               <a:rPr lang="en-US" smtClean="0"/>
-              <a:t>10/13/2026</a:t>
+              <a:t>10/21/2026</a:t>
             </a:fld>
             <a:endParaRPr lang="en-US"/>
           </a:p>
@@ -2893,7 +2894,7 @@
           <a:p>
             <a:fld id="{5BCAD085-E8A6-8845-BD4E-CB4CCA059FC4}" type="datetimeFigureOut">
               <a:rPr lang="en-US" smtClean="0"/>
-              <a:t>10/13/2026</a:t>
+              <a:t>10/21/2026</a:t>
             </a:fld>
             <a:endParaRPr lang="en-US"/>
           </a:p>
@@ -3312,7 +3313,7 @@
           <a:p>
             <a:fld id="{5BCAD085-E8A6-8845-BD4E-CB4CCA059FC4}" type="datetimeFigureOut">
               <a:rPr lang="en-US" smtClean="0"/>
-              <a:t>10/13/2026</a:t>
+              <a:t>10/21/2026</a:t>
             </a:fld>
             <a:endParaRPr lang="en-US"/>
           </a:p>
@@ -3429,7 +3430,7 @@
           <a:p>
             <a:fld id="{5BCAD085-E8A6-8845-BD4E-CB4CCA059FC4}" type="datetimeFigureOut">
               <a:rPr lang="en-US" smtClean="0"/>
-              <a:t>10/13/2026</a:t>
+              <a:t>10/21/2026</a:t>
             </a:fld>
             <a:endParaRPr lang="en-US"/>
           </a:p>
@@ -3524,7 +3525,7 @@
           <a:p>
             <a:fld id="{5BCAD085-E8A6-8845-BD4E-CB4CCA059FC4}" type="datetimeFigureOut">
               <a:rPr lang="en-US" smtClean="0"/>
-              <a:t>10/13/2026</a:t>
+              <a:t>10/21/2026</a:t>
             </a:fld>
             <a:endParaRPr lang="en-US"/>
           </a:p>
@@ -3799,7 +3800,7 @@
           <a:p>
             <a:fld id="{5BCAD085-E8A6-8845-BD4E-CB4CCA059FC4}" type="datetimeFigureOut">
               <a:rPr lang="en-US" smtClean="0"/>
-              <a:t>10/13/2026</a:t>
+              <a:t>10/21/2026</a:t>
             </a:fld>
             <a:endParaRPr lang="en-US"/>
           </a:p>
@@ -4051,7 +4052,7 @@
           <a:p>
             <a:fld id="{5BCAD085-E8A6-8845-BD4E-CB4CCA059FC4}" type="datetimeFigureOut">
               <a:rPr lang="en-US" smtClean="0"/>
-              <a:t>10/13/2026</a:t>
+              <a:t>10/21/2026</a:t>
             </a:fld>
             <a:endParaRPr lang="en-US"/>
           </a:p>
@@ -4262,7 +4263,7 @@
           <a:p>
             <a:fld id="{5BCAD085-E8A6-8845-BD4E-CB4CCA059FC4}" type="datetimeFigureOut">
               <a:rPr lang="en-US" smtClean="0"/>
-              <a:t>10/13/2026</a:t>
+              <a:t>10/21/2026</a:t>
             </a:fld>
             <a:endParaRPr lang="en-US"/>
           </a:p>
@@ -5074,14 +5075,54 @@
               </a:spcAft>
             </a:pPr>
             <a:r>
-              <a:rPr lang="en-US" sz="1500" b="0" i="0">
+              <a:rPr lang="en-US" sz="1500" b="0" i="0" dirty="0">
                 <a:solidFill>
                   <a:srgbClr val="EDE8F5"/>
                 </a:solidFill>
                 <a:latin typeface="Courier New"/>
                 <a:cs typeface="Courier New"/>
               </a:rPr>
-              <a:t>with pm.Model() as spin_rate_model:</a:t>
+              <a:t>with </a:t>
+            </a:r>
+            <a:r>
+              <a:rPr lang="en-US" sz="1500" b="0" i="0" dirty="0" err="1">
+                <a:solidFill>
+                  <a:srgbClr val="EDE8F5"/>
+                </a:solidFill>
+                <a:latin typeface="Courier New"/>
+                <a:cs typeface="Courier New"/>
+              </a:rPr>
+              <a:t>pm.Model</a:t>
+            </a:r>
+            <a:r>
+              <a:rPr lang="en-US" sz="1500" b="0" i="0" dirty="0">
+                <a:solidFill>
+                  <a:srgbClr val="EDE8F5"/>
+                </a:solidFill>
+                <a:latin typeface="Courier New"/>
+                <a:cs typeface="Courier New"/>
+              </a:rPr>
+              <a:t>() as </a:t>
+            </a:r>
+            <a:r>
+              <a:rPr lang="en-US" sz="1500" b="0" i="0" dirty="0" err="1">
+                <a:solidFill>
+                  <a:srgbClr val="EDE8F5"/>
+                </a:solidFill>
+                <a:latin typeface="Courier New"/>
+                <a:cs typeface="Courier New"/>
+              </a:rPr>
+              <a:t>spin_rate_model</a:t>
+            </a:r>
+            <a:r>
+              <a:rPr lang="en-US" sz="1500" b="0" i="0" dirty="0">
+                <a:solidFill>
+                  <a:srgbClr val="EDE8F5"/>
+                </a:solidFill>
+                <a:latin typeface="Courier New"/>
+                <a:cs typeface="Courier New"/>
+              </a:rPr>
+              <a:t>:</a:t>
             </a:r>
           </a:p>
           <a:p>
@@ -5091,7 +5132,7 @@
               </a:spcAft>
             </a:pPr>
             <a:r>
-              <a:rPr lang="en-US" sz="1500" b="0" i="0">
+              <a:rPr lang="en-US" sz="1500" b="0" i="0" dirty="0">
                 <a:solidFill>
                   <a:srgbClr val="EDE8F5"/>
                 </a:solidFill>
@@ -5108,14 +5149,34 @@
               </a:spcAft>
             </a:pPr>
             <a:r>
-              <a:rPr lang="en-US" sz="1500" b="0" i="0">
+              <a:rPr lang="en-US" sz="1500" b="0" i="0" dirty="0">
                 <a:solidFill>
                   <a:srgbClr val="EDE8F5"/>
                 </a:solidFill>
                 <a:latin typeface="Courier New"/>
                 <a:cs typeface="Courier New"/>
               </a:rPr>
-              <a:t>    mu = pm.Normal('mu', mu=2500, sigma=100,</a:t>
+              <a:t>    mu = </a:t>
+            </a:r>
+            <a:r>
+              <a:rPr lang="en-US" sz="1500" b="0" i="0" dirty="0" err="1">
+                <a:solidFill>
+                  <a:srgbClr val="EDE8F5"/>
+                </a:solidFill>
+                <a:latin typeface="Courier New"/>
+                <a:cs typeface="Courier New"/>
+              </a:rPr>
+              <a:t>pm.Normal</a:t>
+            </a:r>
+            <a:r>
+              <a:rPr lang="en-US" sz="1500" b="0" i="0" dirty="0">
+                <a:solidFill>
+                  <a:srgbClr val="EDE8F5"/>
+                </a:solidFill>
+                <a:latin typeface="Courier New"/>
+                <a:cs typeface="Courier New"/>
+              </a:rPr>
+              <a:t>('mu', mu=2500, sigma=100,</a:t>
             </a:r>
           </a:p>
           <a:p>
@@ -5125,7 +5186,7 @@
               </a:spcAft>
             </a:pPr>
             <a:r>
-              <a:rPr lang="en-US" sz="1500" b="0" i="0">
+              <a:rPr lang="en-US" sz="1500" b="0" i="0" dirty="0">
                 <a:solidFill>
                   <a:srgbClr val="EDE8F5"/>
                 </a:solidFill>
@@ -5142,14 +5203,54 @@
               </a:spcAft>
             </a:pPr>
             <a:r>
-              <a:rPr lang="en-US" sz="1500" b="0" i="0">
+              <a:rPr lang="en-US" sz="1500" b="0" i="0" dirty="0">
                 <a:solidFill>
                   <a:srgbClr val="EDE8F5"/>
                 </a:solidFill>
                 <a:latin typeface="Courier New"/>
                 <a:cs typeface="Courier New"/>
               </a:rPr>
-              <a:t>    tau = pm.Uniform('tau', lower=day_ind.min(),</a:t>
+              <a:t>    tau = </a:t>
+            </a:r>
+            <a:r>
+              <a:rPr lang="en-US" sz="1500" b="0" i="0" dirty="0" err="1">
+                <a:solidFill>
+                  <a:srgbClr val="EDE8F5"/>
+                </a:solidFill>
+                <a:latin typeface="Courier New"/>
+                <a:cs typeface="Courier New"/>
+              </a:rPr>
+              <a:t>pm.Uniform</a:t>
+            </a:r>
+            <a:r>
+              <a:rPr lang="en-US" sz="1500" b="0" i="0" dirty="0">
+                <a:solidFill>
+                  <a:srgbClr val="EDE8F5"/>
+                </a:solidFill>
+                <a:latin typeface="Courier New"/>
+                <a:cs typeface="Courier New"/>
+              </a:rPr>
+              <a:t>('tau', lower=</a:t>
+            </a:r>
+            <a:r>
+              <a:rPr lang="en-US" sz="1500" b="0" i="0" dirty="0" err="1">
+                <a:solidFill>
+                  <a:srgbClr val="EDE8F5"/>
+                </a:solidFill>
+                <a:latin typeface="Courier New"/>
+                <a:cs typeface="Courier New"/>
+              </a:rPr>
+              <a:t>day_ind.min</a:t>
+            </a:r>
+            <a:r>
+              <a:rPr lang="en-US" sz="1500" b="0" i="0" dirty="0">
+                <a:solidFill>
+                  <a:srgbClr val="EDE8F5"/>
+                </a:solidFill>
+                <a:latin typeface="Courier New"/>
+                <a:cs typeface="Courier New"/>
+              </a:rPr>
+              <a:t>(),</a:t>
             </a:r>
           </a:p>
           <a:p>
@@ -5159,14 +5260,34 @@
               </a:spcAft>
             </a:pPr>
             <a:r>
-              <a:rPr lang="en-US" sz="1500" b="0" i="0">
+              <a:rPr lang="en-US" sz="1500" b="0" i="0" dirty="0">
                 <a:solidFill>
                   <a:srgbClr val="EDE8F5"/>
                 </a:solidFill>
                 <a:latin typeface="Courier New"/>
                 <a:cs typeface="Courier New"/>
               </a:rPr>
-              <a:t>                     upper=day_ind.max())</a:t>
+              <a:t>                     upper=</a:t>
+            </a:r>
+            <a:r>
+              <a:rPr lang="en-US" sz="1500" b="0" i="0" dirty="0" err="1">
+                <a:solidFill>
+                  <a:srgbClr val="EDE8F5"/>
+                </a:solidFill>
+                <a:latin typeface="Courier New"/>
+                <a:cs typeface="Courier New"/>
+              </a:rPr>
+              <a:t>day_ind.max</a:t>
+            </a:r>
+            <a:r>
+              <a:rPr lang="en-US" sz="1500" b="0" i="0" dirty="0">
+                <a:solidFill>
+                  <a:srgbClr val="EDE8F5"/>
+                </a:solidFill>
+                <a:latin typeface="Courier New"/>
+                <a:cs typeface="Courier New"/>
+              </a:rPr>
+              <a:t>())</a:t>
             </a:r>
           </a:p>
         </p:txBody>
@@ -5339,7 +5460,7 @@
               </a:spcAft>
             </a:pPr>
             <a:r>
-              <a:rPr lang="he-IL" sz="1500" b="0" i="0">
+              <a:rPr lang="he-IL" sz="1500" b="0" i="0" dirty="0">
                 <a:solidFill>
                   <a:srgbClr val="6B6478"/>
                 </a:solidFill>
@@ -5768,7 +5889,7 @@
 </file>
 
 <file path=ppt/slides/slide11.xml><?xml version="1.0" encoding="utf-8"?>
-<p:sld xmlns:a="http://schemas.openxmlformats.org/drawingml/2006/main" xmlns:r="http://schemas.openxmlformats.org/officeDocument/2006/relationships" xmlns:p="http://schemas.openxmlformats.org/presentationml/2006/main">
+<p:sld xmlns:a="http://schemas.openxmlformats.org/drawingml/2006/main" xmlns:r="http://schemas.openxmlformats.org/officeDocument/2006/relationships" xmlns:p="http://schemas.openxmlformats.org/presentationml/2006/main" show="0">
   <p:cSld>
     <p:bg>
       <p:bgPr>
@@ -6881,14 +7002,34 @@
               </a:spcAft>
             </a:pPr>
             <a:r>
-              <a:rPr lang="en-US" sz="1500" b="0" i="0">
+              <a:rPr lang="en-US" sz="1500" b="0" i="0" dirty="0">
                 <a:solidFill>
                   <a:srgbClr val="EDE8F5"/>
                 </a:solidFill>
                 <a:latin typeface="Courier New"/>
                 <a:cs typeface="Courier New"/>
               </a:rPr>
-              <a:t>with spin_rate_model:</a:t>
+              <a:t>with </a:t>
+            </a:r>
+            <a:r>
+              <a:rPr lang="en-US" sz="1500" b="0" i="0" dirty="0" err="1">
+                <a:solidFill>
+                  <a:srgbClr val="EDE8F5"/>
+                </a:solidFill>
+                <a:latin typeface="Courier New"/>
+                <a:cs typeface="Courier New"/>
+              </a:rPr>
+              <a:t>spin_rate_model</a:t>
+            </a:r>
+            <a:r>
+              <a:rPr lang="en-US" sz="1500" b="0" i="0" dirty="0">
+                <a:solidFill>
+                  <a:srgbClr val="EDE8F5"/>
+                </a:solidFill>
+                <a:latin typeface="Courier New"/>
+                <a:cs typeface="Courier New"/>
+              </a:rPr>
+              <a:t>:</a:t>
             </a:r>
           </a:p>
           <a:p>
@@ -6898,14 +7039,34 @@
               </a:spcAft>
             </a:pPr>
             <a:r>
-              <a:rPr lang="en-US" sz="1500" b="0" i="0">
+              <a:rPr lang="en-US" sz="1500" b="0" i="0" dirty="0">
                 <a:solidFill>
                   <a:srgbClr val="EDE8F5"/>
                 </a:solidFill>
                 <a:latin typeface="Courier New"/>
                 <a:cs typeface="Courier New"/>
               </a:rPr>
-              <a:t>    sigma = pm.HalfNormal("sigma", 100.)</a:t>
+              <a:t>    sigma = </a:t>
+            </a:r>
+            <a:r>
+              <a:rPr lang="en-US" sz="1500" b="0" i="0" dirty="0" err="1">
+                <a:solidFill>
+                  <a:srgbClr val="EDE8F5"/>
+                </a:solidFill>
+                <a:latin typeface="Courier New"/>
+                <a:cs typeface="Courier New"/>
+              </a:rPr>
+              <a:t>pm.HalfNormal</a:t>
+            </a:r>
+            <a:r>
+              <a:rPr lang="en-US" sz="1500" b="0" i="0" dirty="0">
+                <a:solidFill>
+                  <a:srgbClr val="EDE8F5"/>
+                </a:solidFill>
+                <a:latin typeface="Courier New"/>
+                <a:cs typeface="Courier New"/>
+              </a:rPr>
+              <a:t>("sigma", 100.)</a:t>
             </a:r>
           </a:p>
         </p:txBody>
@@ -6984,15 +7145,32 @@
               </a:spcAft>
             </a:pPr>
             <a:r>
-              <a:rPr lang="en-US" sz="1500" b="0" i="0">
+              <a:rPr lang="en-US" sz="1500" b="0" i="0" dirty="0">
                 <a:solidFill>
                   <a:srgbClr val="EDE8F5"/>
                 </a:solidFill>
                 <a:latin typeface="Courier New"/>
                 <a:cs typeface="Courier New"/>
               </a:rPr>
-              <a:t>&gt;&gt;&gt; spin_rate_model.unobserved_RVs</a:t>
-            </a:r>
+              <a:t>&gt;&gt;&gt; </a:t>
+            </a:r>
+            <a:r>
+              <a:rPr lang="en-US" sz="1500" b="0" i="0" dirty="0" err="1">
+                <a:solidFill>
+                  <a:srgbClr val="EDE8F5"/>
+                </a:solidFill>
+                <a:latin typeface="Courier New"/>
+                <a:cs typeface="Courier New"/>
+              </a:rPr>
+              <a:t>spin_rate_model.unobserved_RVs</a:t>
+            </a:r>
+            <a:endParaRPr lang="en-US" sz="1500" b="0" i="0" dirty="0">
+              <a:solidFill>
+                <a:srgbClr val="EDE8F5"/>
+              </a:solidFill>
+              <a:latin typeface="Courier New"/>
+              <a:cs typeface="Courier New"/>
+            </a:endParaRPr>
           </a:p>
           <a:p>
             <a:pPr algn="l" rtl="0">
@@ -7001,7 +7179,7 @@
               </a:spcAft>
             </a:pPr>
             <a:r>
-              <a:rPr lang="en-US" sz="1500" b="0" i="0">
+              <a:rPr lang="en-US" sz="1500" b="0" i="0" dirty="0">
                 <a:solidFill>
                   <a:srgbClr val="EDE8F5"/>
                 </a:solidFill>
@@ -7106,216 +7284,6 @@
                 <a:cs typeface="Arial"/>
               </a:rPr>
               <a:t> שהוגדרו בו</a:t>
-            </a:r>
-          </a:p>
-        </p:txBody>
-      </p:sp>
-      <p:sp>
-        <p:nvSpPr>
-          <p:cNvPr id="8" name="card"/>
-          <p:cNvSpPr/>
-          <p:nvPr/>
-        </p:nvSpPr>
-        <p:spPr>
-          <a:xfrm>
-            <a:off x="548640" y="4572000"/>
-            <a:ext cx="11091672" cy="1691640"/>
-          </a:xfrm>
-          <a:prstGeom prst="roundRect">
-            <a:avLst>
-              <a:gd name="adj" fmla="val 8000"/>
-            </a:avLst>
-          </a:prstGeom>
-          <a:solidFill>
-            <a:srgbClr val="E6E2EC"/>
-          </a:solidFill>
-          <a:ln>
-            <a:noFill/>
-          </a:ln>
-          <a:effectLst/>
-        </p:spPr>
-        <p:style>
-          <a:lnRef idx="1">
-            <a:schemeClr val="accent1"/>
-          </a:lnRef>
-          <a:fillRef idx="3">
-            <a:schemeClr val="accent1"/>
-          </a:fillRef>
-          <a:effectRef idx="2">
-            <a:schemeClr val="accent1"/>
-          </a:effectRef>
-          <a:fontRef idx="minor">
-            <a:schemeClr val="lt1"/>
-          </a:fontRef>
-        </p:style>
-        <p:txBody>
-          <a:bodyPr rtlCol="0" anchor="ctr"/>
-          <a:lstStyle/>
-          <a:p>
-            <a:endParaRPr/>
-          </a:p>
-        </p:txBody>
-      </p:sp>
-      <p:sp>
-        <p:nvSpPr>
-          <p:cNvPr id="9" name="badge σ"/>
-          <p:cNvSpPr/>
-          <p:nvPr/>
-        </p:nvSpPr>
-        <p:spPr>
-          <a:xfrm>
-            <a:off x="10744200" y="4800600"/>
-            <a:ext cx="685800" cy="685800"/>
-          </a:xfrm>
-          <a:prstGeom prst="ellipse">
-            <a:avLst/>
-          </a:prstGeom>
-          <a:solidFill>
-            <a:srgbClr val="E4572E"/>
-          </a:solidFill>
-          <a:ln>
-            <a:noFill/>
-          </a:ln>
-          <a:effectLst/>
-        </p:spPr>
-        <p:style>
-          <a:lnRef idx="1">
-            <a:schemeClr val="accent1"/>
-          </a:lnRef>
-          <a:fillRef idx="3">
-            <a:schemeClr val="accent1"/>
-          </a:fillRef>
-          <a:effectRef idx="2">
-            <a:schemeClr val="accent1"/>
-          </a:effectRef>
-          <a:fontRef idx="minor">
-            <a:schemeClr val="lt1"/>
-          </a:fontRef>
-        </p:style>
-        <p:txBody>
-          <a:bodyPr wrap="square" lIns="0" tIns="0" rIns="0" bIns="0" rtlCol="0" anchor="ctr"/>
-          <a:lstStyle/>
-          <a:p>
-            <a:pPr algn="ctr"/>
-            <a:r>
-              <a:rPr sz="2200" b="1">
-                <a:solidFill>
-                  <a:srgbClr val="FFFFFF"/>
-                </a:solidFill>
-                <a:latin typeface="Arial"/>
-                <a:cs typeface="Arial"/>
-              </a:rPr>
-              <a:t>σ</a:t>
-            </a:r>
-          </a:p>
-        </p:txBody>
-      </p:sp>
-      <p:sp>
-        <p:nvSpPr>
-          <p:cNvPr id="10" name="TextBox 9"/>
-          <p:cNvSpPr txBox="1"/>
-          <p:nvPr/>
-        </p:nvSpPr>
-        <p:spPr>
-          <a:xfrm>
-            <a:off x="777240" y="4709160"/>
-            <a:ext cx="9784080" cy="457200"/>
-          </a:xfrm>
-          <a:prstGeom prst="rect">
-            <a:avLst/>
-          </a:prstGeom>
-          <a:noFill/>
-        </p:spPr>
-        <p:txBody>
-          <a:bodyPr wrap="square" lIns="45720" tIns="27432" rIns="45720" bIns="27432" anchor="t">
-            <a:spAutoFit/>
-          </a:bodyPr>
-          <a:lstStyle/>
-          <a:p>
-            <a:pPr algn="r" rtl="1">
-              <a:spcAft>
-                <a:spcPts val="600"/>
-              </a:spcAft>
-            </a:pPr>
-            <a:r>
-              <a:rPr lang="he-IL" sz="1800" b="1" i="0">
-                <a:solidFill>
-                  <a:srgbClr val="2B1E3F"/>
-                </a:solidFill>
-                <a:latin typeface="Arial"/>
-                <a:cs typeface="Arial"/>
-              </a:rPr>
-              <a:t>למה log? טרנספורמציה אוטומטית</a:t>
-            </a:r>
-          </a:p>
-        </p:txBody>
-      </p:sp>
-      <p:sp>
-        <p:nvSpPr>
-          <p:cNvPr id="11" name="TextBox 10"/>
-          <p:cNvSpPr txBox="1"/>
-          <p:nvPr/>
-        </p:nvSpPr>
-        <p:spPr>
-          <a:xfrm>
-            <a:off x="777240" y="5212080"/>
-            <a:ext cx="9784080" cy="960120"/>
-          </a:xfrm>
-          <a:prstGeom prst="rect">
-            <a:avLst/>
-          </a:prstGeom>
-          <a:noFill/>
-        </p:spPr>
-        <p:txBody>
-          <a:bodyPr wrap="square" lIns="45720" tIns="27432" rIns="45720" bIns="27432" anchor="t">
-            <a:spAutoFit/>
-          </a:bodyPr>
-          <a:lstStyle/>
-          <a:p>
-            <a:pPr algn="r" rtl="1">
-              <a:spcAft>
-                <a:spcPts val="600"/>
-              </a:spcAft>
-            </a:pPr>
-            <a:r>
-              <a:rPr lang="en-US" sz="1500" b="0" i="0">
-                <a:solidFill>
-                  <a:srgbClr val="6B6478"/>
-                </a:solidFill>
-                <a:latin typeface="Arial"/>
-                <a:cs typeface="Arial"/>
-              </a:rPr>
-              <a:t>σ</a:t>
-            </a:r>
-            <a:r>
-              <a:rPr lang="he-IL" sz="1500" b="0" i="0">
-                <a:solidFill>
-                  <a:srgbClr val="6B6478"/>
-                </a:solidFill>
-                <a:latin typeface="Arial"/>
-                <a:cs typeface="Arial"/>
-              </a:rPr>
-              <a:t> חייב להיות חיובי, ולכן PyMC דוגם את log(</a:t>
-            </a:r>
-            <a:r>
-              <a:rPr lang="en-US" sz="1500" b="0" i="0">
-                <a:solidFill>
-                  <a:srgbClr val="6B6478"/>
-                </a:solidFill>
-                <a:latin typeface="Arial"/>
-                <a:cs typeface="Arial"/>
-              </a:rPr>
-              <a:t>σ</a:t>
-            </a:r>
-            <a:r>
-              <a:rPr lang="he-IL" sz="1500" b="0" i="0">
-                <a:solidFill>
-                  <a:srgbClr val="6B6478"/>
-                </a:solidFill>
-                <a:latin typeface="Arial"/>
-                <a:cs typeface="Arial"/>
-              </a:rPr>
-              <a:t>) — מרחב ללא הגבלות — ומחזיר כל דגימה למרחב המקורי. המשתנים המותמרים מוסתרים כברירת מחדל בסיכומים ובגרפים.</a:t>
             </a:r>
           </a:p>
         </p:txBody>
@@ -7553,14 +7521,54 @@
               </a:spcAft>
             </a:pPr>
             <a:r>
-              <a:rPr lang="en-US" sz="1300" b="0" i="0">
+              <a:rPr lang="en-US" sz="1300" b="0" i="0" dirty="0">
                 <a:solidFill>
                   <a:srgbClr val="EDE8F5"/>
                 </a:solidFill>
                 <a:latin typeface="Courier New"/>
                 <a:cs typeface="Courier New"/>
               </a:rPr>
-              <a:t>r = pm.math.switch(tau &gt;= day_ind,</a:t>
+              <a:t>r = </a:t>
+            </a:r>
+            <a:r>
+              <a:rPr lang="en-US" sz="1300" b="0" i="0" dirty="0" err="1">
+                <a:solidFill>
+                  <a:srgbClr val="EDE8F5"/>
+                </a:solidFill>
+                <a:latin typeface="Courier New"/>
+                <a:cs typeface="Courier New"/>
+              </a:rPr>
+              <a:t>pm.math.switch</a:t>
+            </a:r>
+            <a:r>
+              <a:rPr lang="en-US" sz="1300" b="0" i="0" dirty="0">
+                <a:solidFill>
+                  <a:srgbClr val="EDE8F5"/>
+                </a:solidFill>
+                <a:latin typeface="Courier New"/>
+                <a:cs typeface="Courier New"/>
+              </a:rPr>
+              <a:t>(tau &gt;= </a:t>
+            </a:r>
+            <a:r>
+              <a:rPr lang="en-US" sz="1300" b="0" i="0" dirty="0" err="1">
+                <a:solidFill>
+                  <a:srgbClr val="EDE8F5"/>
+                </a:solidFill>
+                <a:latin typeface="Courier New"/>
+                <a:cs typeface="Courier New"/>
+              </a:rPr>
+              <a:t>day_ind</a:t>
+            </a:r>
+            <a:r>
+              <a:rPr lang="en-US" sz="1300" b="0" i="0" dirty="0">
+                <a:solidFill>
+                  <a:srgbClr val="EDE8F5"/>
+                </a:solidFill>
+                <a:latin typeface="Courier New"/>
+                <a:cs typeface="Courier New"/>
+              </a:rPr>
+              <a:t>,</a:t>
             </a:r>
           </a:p>
           <a:p>
@@ -7570,7 +7578,7 @@
               </a:spcAft>
             </a:pPr>
             <a:r>
-              <a:rPr lang="en-US" sz="1300" b="0" i="0">
+              <a:rPr lang="en-US" sz="1300" b="0" i="0" dirty="0">
                 <a:solidFill>
                   <a:srgbClr val="EDE8F5"/>
                 </a:solidFill>
@@ -8195,14 +8203,34 @@
               </a:spcAft>
             </a:pPr>
             <a:r>
-              <a:rPr lang="en-US" sz="1400" b="0" i="0">
+              <a:rPr lang="en-US" sz="1400" b="0" i="0" dirty="0">
                 <a:solidFill>
                   <a:srgbClr val="EDE8F5"/>
                 </a:solidFill>
                 <a:latin typeface="Courier New"/>
                 <a:cs typeface="Courier New"/>
               </a:rPr>
-              <a:t>with spin_rate_model:</a:t>
+              <a:t>with </a:t>
+            </a:r>
+            <a:r>
+              <a:rPr lang="en-US" sz="1400" b="0" i="0" dirty="0" err="1">
+                <a:solidFill>
+                  <a:srgbClr val="EDE8F5"/>
+                </a:solidFill>
+                <a:latin typeface="Courier New"/>
+                <a:cs typeface="Courier New"/>
+              </a:rPr>
+              <a:t>spin_rate_model</a:t>
+            </a:r>
+            <a:r>
+              <a:rPr lang="en-US" sz="1400" b="0" i="0" dirty="0">
+                <a:solidFill>
+                  <a:srgbClr val="EDE8F5"/>
+                </a:solidFill>
+                <a:latin typeface="Courier New"/>
+                <a:cs typeface="Courier New"/>
+              </a:rPr>
+              <a:t>:</a:t>
             </a:r>
           </a:p>
           <a:p>
@@ -8212,14 +8240,54 @@
               </a:spcAft>
             </a:pPr>
             <a:r>
-              <a:rPr lang="en-US" sz="1400" b="0" i="0">
+              <a:rPr lang="en-US" sz="1400" b="0" i="0" dirty="0">
                 <a:solidFill>
                   <a:srgbClr val="EDE8F5"/>
                 </a:solidFill>
                 <a:latin typeface="Courier New"/>
                 <a:cs typeface="Courier New"/>
               </a:rPr>
-              <a:t>    spin_rate_like = pm.Normal(</a:t>
+              <a:t>    </a:t>
+            </a:r>
+            <a:r>
+              <a:rPr lang="en-US" sz="1400" b="0" i="0" dirty="0" err="1">
+                <a:solidFill>
+                  <a:srgbClr val="EDE8F5"/>
+                </a:solidFill>
+                <a:latin typeface="Courier New"/>
+                <a:cs typeface="Courier New"/>
+              </a:rPr>
+              <a:t>spin_rate_like</a:t>
+            </a:r>
+            <a:r>
+              <a:rPr lang="en-US" sz="1400" b="0" i="0" dirty="0">
+                <a:solidFill>
+                  <a:srgbClr val="EDE8F5"/>
+                </a:solidFill>
+                <a:latin typeface="Courier New"/>
+                <a:cs typeface="Courier New"/>
+              </a:rPr>
+              <a:t> = </a:t>
+            </a:r>
+            <a:r>
+              <a:rPr lang="en-US" sz="1400" b="0" i="0" dirty="0" err="1">
+                <a:solidFill>
+                  <a:srgbClr val="EDE8F5"/>
+                </a:solidFill>
+                <a:latin typeface="Courier New"/>
+                <a:cs typeface="Courier New"/>
+              </a:rPr>
+              <a:t>pm.Normal</a:t>
+            </a:r>
+            <a:r>
+              <a:rPr lang="en-US" sz="1400" b="0" i="0" dirty="0">
+                <a:solidFill>
+                  <a:srgbClr val="EDE8F5"/>
+                </a:solidFill>
+                <a:latin typeface="Courier New"/>
+                <a:cs typeface="Courier New"/>
+              </a:rPr>
+              <a:t>(</a:t>
             </a:r>
           </a:p>
           <a:p>
@@ -8229,14 +8297,34 @@
               </a:spcAft>
             </a:pPr>
             <a:r>
-              <a:rPr lang="en-US" sz="1400" b="0" i="0">
+              <a:rPr lang="en-US" sz="1400" b="0" i="0" dirty="0">
                 <a:solidFill>
                   <a:srgbClr val="EDE8F5"/>
                 </a:solidFill>
                 <a:latin typeface="Courier New"/>
                 <a:cs typeface="Courier New"/>
               </a:rPr>
-              <a:t>        'spin_rate_like', mu=r, sigma=sigma,</a:t>
+              <a:t>        '</a:t>
+            </a:r>
+            <a:r>
+              <a:rPr lang="en-US" sz="1400" b="0" i="0" dirty="0" err="1">
+                <a:solidFill>
+                  <a:srgbClr val="EDE8F5"/>
+                </a:solidFill>
+                <a:latin typeface="Courier New"/>
+                <a:cs typeface="Courier New"/>
+              </a:rPr>
+              <a:t>spin_rate_like</a:t>
+            </a:r>
+            <a:r>
+              <a:rPr lang="en-US" sz="1400" b="0" i="0" dirty="0">
+                <a:solidFill>
+                  <a:srgbClr val="EDE8F5"/>
+                </a:solidFill>
+                <a:latin typeface="Courier New"/>
+                <a:cs typeface="Courier New"/>
+              </a:rPr>
+              <a:t>', mu=r, sigma=sigma,</a:t>
             </a:r>
           </a:p>
           <a:p>
@@ -8246,14 +8334,34 @@
               </a:spcAft>
             </a:pPr>
             <a:r>
-              <a:rPr lang="en-US" sz="1400" b="0" i="0">
+              <a:rPr lang="en-US" sz="1400" b="0" i="0" dirty="0">
                 <a:solidFill>
                   <a:srgbClr val="EDE8F5"/>
                 </a:solidFill>
                 <a:latin typeface="Courier New"/>
                 <a:cs typeface="Courier New"/>
               </a:rPr>
-              <a:t>        observed=spin_rate)</a:t>
+              <a:t>        observed=</a:t>
+            </a:r>
+            <a:r>
+              <a:rPr lang="en-US" sz="1400" b="0" i="0" dirty="0" err="1">
+                <a:solidFill>
+                  <a:srgbClr val="EDE8F5"/>
+                </a:solidFill>
+                <a:latin typeface="Courier New"/>
+                <a:cs typeface="Courier New"/>
+              </a:rPr>
+              <a:t>spin_rate</a:t>
+            </a:r>
+            <a:r>
+              <a:rPr lang="en-US" sz="1400" b="0" i="0" dirty="0">
+                <a:solidFill>
+                  <a:srgbClr val="EDE8F5"/>
+                </a:solidFill>
+                <a:latin typeface="Courier New"/>
+                <a:cs typeface="Courier New"/>
+              </a:rPr>
+              <a:t>)</a:t>
             </a:r>
           </a:p>
         </p:txBody>
@@ -9291,14 +9399,34 @@
               </a:spcAft>
             </a:pPr>
             <a:r>
-              <a:rPr lang="en-US" sz="1500" b="0" i="0">
+              <a:rPr lang="en-US" sz="1500" b="0" i="0" dirty="0">
                 <a:solidFill>
                   <a:srgbClr val="EDE8F5"/>
                 </a:solidFill>
                 <a:latin typeface="Courier New"/>
                 <a:cs typeface="Courier New"/>
               </a:rPr>
-              <a:t>with spin_rate_model:</a:t>
+              <a:t>with </a:t>
+            </a:r>
+            <a:r>
+              <a:rPr lang="en-US" sz="1500" b="0" i="0" dirty="0" err="1">
+                <a:solidFill>
+                  <a:srgbClr val="EDE8F5"/>
+                </a:solidFill>
+                <a:latin typeface="Courier New"/>
+                <a:cs typeface="Courier New"/>
+              </a:rPr>
+              <a:t>spin_rate_model</a:t>
+            </a:r>
+            <a:r>
+              <a:rPr lang="en-US" sz="1500" b="0" i="0" dirty="0">
+                <a:solidFill>
+                  <a:srgbClr val="EDE8F5"/>
+                </a:solidFill>
+                <a:latin typeface="Courier New"/>
+                <a:cs typeface="Courier New"/>
+              </a:rPr>
+              <a:t>:</a:t>
             </a:r>
           </a:p>
           <a:p>
@@ -9308,14 +9436,34 @@
               </a:spcAft>
             </a:pPr>
             <a:r>
-              <a:rPr lang="en-US" sz="1500" b="0" i="0">
+              <a:rPr lang="en-US" sz="1500" b="0" i="0" dirty="0">
                 <a:solidFill>
                   <a:srgbClr val="EDE8F5"/>
                 </a:solidFill>
                 <a:latin typeface="Courier New"/>
                 <a:cs typeface="Courier New"/>
               </a:rPr>
-              <a:t>    trace = pm.sample(1500, chains=2)</a:t>
+              <a:t>    trace = </a:t>
+            </a:r>
+            <a:r>
+              <a:rPr lang="en-US" sz="1500" b="0" i="0" dirty="0" err="1">
+                <a:solidFill>
+                  <a:srgbClr val="EDE8F5"/>
+                </a:solidFill>
+                <a:latin typeface="Courier New"/>
+                <a:cs typeface="Courier New"/>
+              </a:rPr>
+              <a:t>pm.sample</a:t>
+            </a:r>
+            <a:r>
+              <a:rPr lang="en-US" sz="1500" b="0" i="0" dirty="0">
+                <a:solidFill>
+                  <a:srgbClr val="EDE8F5"/>
+                </a:solidFill>
+                <a:latin typeface="Courier New"/>
+                <a:cs typeface="Courier New"/>
+              </a:rPr>
+              <a:t>(1500, chains=2)</a:t>
             </a:r>
           </a:p>
           <a:p>
@@ -9325,7 +9473,7 @@
               </a:spcAft>
             </a:pPr>
             <a:r>
-              <a:rPr lang="en-US" sz="1500" b="0" i="0">
+              <a:rPr lang="en-US" sz="1500" b="0" i="0" dirty="0">
                 <a:solidFill>
                   <a:srgbClr val="EDE8F5"/>
                 </a:solidFill>
@@ -9342,14 +9490,44 @@
               </a:spcAft>
             </a:pPr>
             <a:r>
-              <a:rPr lang="en-US" sz="1500" b="0" i="0">
+              <a:rPr lang="en-US" sz="1500" b="0" i="0" dirty="0" err="1">
                 <a:solidFill>
                   <a:srgbClr val="EDE8F5"/>
                 </a:solidFill>
                 <a:latin typeface="Courier New"/>
                 <a:cs typeface="Courier New"/>
               </a:rPr>
-              <a:t>az.plot_posterior(trace, var_names=["mu", "tau"])</a:t>
+              <a:t>az.plot_posterior</a:t>
+            </a:r>
+            <a:r>
+              <a:rPr lang="en-US" sz="1500" b="0" i="0" dirty="0">
+                <a:solidFill>
+                  <a:srgbClr val="EDE8F5"/>
+                </a:solidFill>
+                <a:latin typeface="Courier New"/>
+                <a:cs typeface="Courier New"/>
+              </a:rPr>
+              <a:t>(trace, </a:t>
+            </a:r>
+            <a:r>
+              <a:rPr lang="en-US" sz="1500" b="0" i="0" dirty="0" err="1">
+                <a:solidFill>
+                  <a:srgbClr val="EDE8F5"/>
+                </a:solidFill>
+                <a:latin typeface="Courier New"/>
+                <a:cs typeface="Courier New"/>
+              </a:rPr>
+              <a:t>var_names</a:t>
+            </a:r>
+            <a:r>
+              <a:rPr lang="en-US" sz="1500" b="0" i="0" dirty="0">
+                <a:solidFill>
+                  <a:srgbClr val="EDE8F5"/>
+                </a:solidFill>
+                <a:latin typeface="Courier New"/>
+                <a:cs typeface="Courier New"/>
+              </a:rPr>
+              <a:t>=["mu", "tau"])</a:t>
             </a:r>
           </a:p>
         </p:txBody>
@@ -9873,14 +10051,6 @@
 <file path=ppt/slides/slide16.xml><?xml version="1.0" encoding="utf-8"?>
 <p:sld xmlns:a="http://schemas.openxmlformats.org/drawingml/2006/main" xmlns:r="http://schemas.openxmlformats.org/officeDocument/2006/relationships" xmlns:p="http://schemas.openxmlformats.org/presentationml/2006/main">
   <p:cSld>
-    <p:bg>
-      <p:bgPr>
-        <a:solidFill>
-          <a:srgbClr val="FFFFFF"/>
-        </a:solidFill>
-        <a:effectLst/>
-      </p:bgPr>
-    </p:bg>
     <p:spTree>
       <p:nvGrpSpPr>
         <p:cNvPr id="1" name=""/>
@@ -9897,580 +10067,658 @@
       </p:grpSpPr>
       <p:sp>
         <p:nvSpPr>
-          <p:cNvPr id="2" name="Title"/>
+          <p:cNvPr id="5" name="TextBox 4">
+            <a:extLst>
+              <a:ext uri="{FF2B5EF4-FFF2-40B4-BE49-F238E27FC236}">
+                <a16:creationId xmlns:a16="http://schemas.microsoft.com/office/drawing/2014/main" id="{BB6DE4F0-5B56-D628-1B9A-99A7212BBE8E}"/>
+              </a:ext>
+            </a:extLst>
+          </p:cNvPr>
           <p:cNvSpPr txBox="1"/>
           <p:nvPr/>
         </p:nvSpPr>
         <p:spPr>
           <a:xfrm>
-            <a:off x="548640" y="365760"/>
-            <a:ext cx="11094415" cy="822960"/>
+            <a:off x="2825750" y="983406"/>
+            <a:ext cx="6096000" cy="5109091"/>
           </a:xfrm>
           <a:prstGeom prst="rect">
             <a:avLst/>
           </a:prstGeom>
-          <a:noFill/>
-        </p:spPr>
-        <p:txBody>
-          <a:bodyPr wrap="square" lIns="45720" tIns="27432" rIns="45720" bIns="27432" anchor="ctr">
+          <a:solidFill>
+            <a:schemeClr val="tx2">
+              <a:lumMod val="75000"/>
+            </a:schemeClr>
+          </a:solidFill>
+        </p:spPr>
+        <p:txBody>
+          <a:bodyPr wrap="square">
             <a:spAutoFit/>
           </a:bodyPr>
           <a:lstStyle/>
           <a:p>
-            <a:pPr algn="r" rtl="1">
+            <a:pPr algn="l" rtl="0">
               <a:spcAft>
-                <a:spcPts val="600"/>
+                <a:spcPts val="0"/>
               </a:spcAft>
             </a:pPr>
             <a:r>
-              <a:rPr lang="he-IL" sz="3400" b="1" i="0">
-                <a:solidFill>
-                  <a:srgbClr val="2B1E3F"/>
-                </a:solidFill>
-                <a:latin typeface="Arial"/>
-                <a:cs typeface="Arial"/>
-              </a:rPr>
-              <a:t>הפוסטריור של </a:t>
-            </a:r>
-            <a:r>
-              <a:rPr lang="en-US" sz="3400" b="1" i="0">
-                <a:solidFill>
-                  <a:srgbClr val="2B1E3F"/>
-                </a:solidFill>
-                <a:latin typeface="Arial"/>
-                <a:cs typeface="Arial"/>
-              </a:rPr>
-              <a:t>μ₁</a:t>
-            </a:r>
-            <a:r>
-              <a:rPr lang="he-IL" sz="3400" b="1" i="0">
-                <a:solidFill>
-                  <a:srgbClr val="2B1E3F"/>
-                </a:solidFill>
-                <a:latin typeface="Arial"/>
-                <a:cs typeface="Arial"/>
-              </a:rPr>
-              <a:t> ו-</a:t>
-            </a:r>
-            <a:r>
-              <a:rPr lang="en-US" sz="3400" b="1" i="0">
-                <a:solidFill>
-                  <a:srgbClr val="2B1E3F"/>
-                </a:solidFill>
-                <a:latin typeface="Arial"/>
-                <a:cs typeface="Arial"/>
-              </a:rPr>
-              <a:t>μ₂</a:t>
-            </a:r>
-          </a:p>
-        </p:txBody>
-      </p:sp>
-      <p:pic>
-        <p:nvPicPr>
-          <p:cNvPr id="3" name="Picture 2" descr="post_mu.png"/>
-          <p:cNvPicPr>
-            <a:picLocks noChangeAspect="1"/>
-          </p:cNvPicPr>
-          <p:nvPr/>
-        </p:nvPicPr>
-        <p:blipFill>
-          <a:blip r:embed="rId3"/>
-          <a:stretch>
-            <a:fillRect/>
-          </a:stretch>
-        </p:blipFill>
-        <p:spPr>
-          <a:xfrm>
-            <a:off x="548640" y="1463040"/>
-            <a:ext cx="6583680" cy="4572000"/>
+              <a:rPr lang="en-US" sz="1500" b="0" i="0" dirty="0">
+                <a:solidFill>
+                  <a:srgbClr val="EDE8F5"/>
+                </a:solidFill>
+                <a:latin typeface="Courier New"/>
+                <a:cs typeface="Courier New"/>
+              </a:rPr>
+              <a:t>with </a:t>
+            </a:r>
+            <a:r>
+              <a:rPr lang="en-US" sz="1500" b="0" i="0" dirty="0" err="1">
+                <a:solidFill>
+                  <a:srgbClr val="EDE8F5"/>
+                </a:solidFill>
+                <a:latin typeface="Courier New"/>
+                <a:cs typeface="Courier New"/>
+              </a:rPr>
+              <a:t>pm.Model</a:t>
+            </a:r>
+            <a:r>
+              <a:rPr lang="en-US" sz="1500" b="0" i="0" dirty="0">
+                <a:solidFill>
+                  <a:srgbClr val="EDE8F5"/>
+                </a:solidFill>
+                <a:latin typeface="Courier New"/>
+                <a:cs typeface="Courier New"/>
+              </a:rPr>
+              <a:t>() as </a:t>
+            </a:r>
+            <a:r>
+              <a:rPr lang="en-US" sz="1500" b="0" i="0" dirty="0" err="1">
+                <a:solidFill>
+                  <a:srgbClr val="EDE8F5"/>
+                </a:solidFill>
+                <a:latin typeface="Courier New"/>
+                <a:cs typeface="Courier New"/>
+              </a:rPr>
+              <a:t>spin_rate_model</a:t>
+            </a:r>
+            <a:r>
+              <a:rPr lang="en-US" sz="1500" b="0" i="0" dirty="0">
+                <a:solidFill>
+                  <a:srgbClr val="EDE8F5"/>
+                </a:solidFill>
+                <a:latin typeface="Courier New"/>
+                <a:cs typeface="Courier New"/>
+              </a:rPr>
+              <a:t>:</a:t>
+            </a:r>
+          </a:p>
+          <a:p>
+            <a:pPr algn="l" rtl="0">
+              <a:spcAft>
+                <a:spcPts val="0"/>
+              </a:spcAft>
+            </a:pPr>
+            <a:r>
+              <a:rPr lang="en-US" sz="1500" b="0" i="0" dirty="0">
+                <a:solidFill>
+                  <a:srgbClr val="EDE8F5"/>
+                </a:solidFill>
+                <a:latin typeface="Courier New"/>
+                <a:cs typeface="Courier New"/>
+              </a:rPr>
+              <a:t> 	</a:t>
+            </a:r>
+          </a:p>
+          <a:p>
+            <a:pPr algn="l" rtl="0">
+              <a:spcAft>
+                <a:spcPts val="0"/>
+              </a:spcAft>
+            </a:pPr>
+            <a:r>
+              <a:rPr lang="en-US" sz="1500" dirty="0">
+                <a:solidFill>
+                  <a:srgbClr val="EDE8F5"/>
+                </a:solidFill>
+                <a:latin typeface="Courier New"/>
+                <a:cs typeface="Courier New"/>
+              </a:rPr>
+              <a:t>	## priors</a:t>
+            </a:r>
+            <a:endParaRPr lang="en-US" sz="1500" b="0" i="0" dirty="0">
+              <a:solidFill>
+                <a:srgbClr val="EDE8F5"/>
+              </a:solidFill>
+              <a:latin typeface="Courier New"/>
+              <a:cs typeface="Courier New"/>
+            </a:endParaRPr>
+          </a:p>
+          <a:p>
+            <a:pPr algn="l" rtl="0">
+              <a:spcAft>
+                <a:spcPts val="0"/>
+              </a:spcAft>
+            </a:pPr>
+            <a:r>
+              <a:rPr lang="en-US" sz="1500" b="0" i="0" dirty="0">
+                <a:solidFill>
+                  <a:srgbClr val="EDE8F5"/>
+                </a:solidFill>
+                <a:latin typeface="Courier New"/>
+                <a:cs typeface="Courier New"/>
+              </a:rPr>
+              <a:t>    mu = </a:t>
+            </a:r>
+            <a:r>
+              <a:rPr lang="en-US" sz="1500" b="0" i="0" dirty="0" err="1">
+                <a:solidFill>
+                  <a:srgbClr val="EDE8F5"/>
+                </a:solidFill>
+                <a:latin typeface="Courier New"/>
+                <a:cs typeface="Courier New"/>
+              </a:rPr>
+              <a:t>pm.Normal</a:t>
+            </a:r>
+            <a:r>
+              <a:rPr lang="en-US" sz="1500" b="0" i="0" dirty="0">
+                <a:solidFill>
+                  <a:srgbClr val="EDE8F5"/>
+                </a:solidFill>
+                <a:latin typeface="Courier New"/>
+                <a:cs typeface="Courier New"/>
+              </a:rPr>
+              <a:t>('mu', mu=2500, sigma=100,</a:t>
+            </a:r>
+          </a:p>
+          <a:p>
+            <a:pPr algn="l" rtl="0">
+              <a:spcAft>
+                <a:spcPts val="0"/>
+              </a:spcAft>
+            </a:pPr>
+            <a:r>
+              <a:rPr lang="en-US" sz="1500" b="0" i="0" dirty="0">
+                <a:solidFill>
+                  <a:srgbClr val="EDE8F5"/>
+                </a:solidFill>
+                <a:latin typeface="Courier New"/>
+                <a:cs typeface="Courier New"/>
+              </a:rPr>
+              <a:t>                   shape=2)</a:t>
+            </a:r>
+          </a:p>
+          <a:p>
+            <a:pPr algn="l" rtl="0">
+              <a:spcAft>
+                <a:spcPts val="0"/>
+              </a:spcAft>
+            </a:pPr>
+            <a:r>
+              <a:rPr lang="en-US" sz="1500" b="0" i="0" dirty="0">
+                <a:solidFill>
+                  <a:srgbClr val="EDE8F5"/>
+                </a:solidFill>
+                <a:latin typeface="Courier New"/>
+                <a:cs typeface="Courier New"/>
+              </a:rPr>
+              <a:t>    tau = </a:t>
+            </a:r>
+            <a:r>
+              <a:rPr lang="en-US" sz="1500" b="0" i="0" dirty="0" err="1">
+                <a:solidFill>
+                  <a:srgbClr val="EDE8F5"/>
+                </a:solidFill>
+                <a:latin typeface="Courier New"/>
+                <a:cs typeface="Courier New"/>
+              </a:rPr>
+              <a:t>pm.Uniform</a:t>
+            </a:r>
+            <a:r>
+              <a:rPr lang="en-US" sz="1500" b="0" i="0" dirty="0">
+                <a:solidFill>
+                  <a:srgbClr val="EDE8F5"/>
+                </a:solidFill>
+                <a:latin typeface="Courier New"/>
+                <a:cs typeface="Courier New"/>
+              </a:rPr>
+              <a:t>('tau', lower=</a:t>
+            </a:r>
+            <a:r>
+              <a:rPr lang="en-US" sz="1500" b="0" i="0" dirty="0" err="1">
+                <a:solidFill>
+                  <a:srgbClr val="EDE8F5"/>
+                </a:solidFill>
+                <a:latin typeface="Courier New"/>
+                <a:cs typeface="Courier New"/>
+              </a:rPr>
+              <a:t>day_ind.min</a:t>
+            </a:r>
+            <a:r>
+              <a:rPr lang="en-US" sz="1500" b="0" i="0" dirty="0">
+                <a:solidFill>
+                  <a:srgbClr val="EDE8F5"/>
+                </a:solidFill>
+                <a:latin typeface="Courier New"/>
+                <a:cs typeface="Courier New"/>
+              </a:rPr>
+              <a:t>(),</a:t>
+            </a:r>
+          </a:p>
+          <a:p>
+            <a:pPr algn="l" rtl="0">
+              <a:spcAft>
+                <a:spcPts val="0"/>
+              </a:spcAft>
+            </a:pPr>
+            <a:r>
+              <a:rPr lang="en-US" sz="1500" b="0" i="0" dirty="0">
+                <a:solidFill>
+                  <a:srgbClr val="EDE8F5"/>
+                </a:solidFill>
+                <a:latin typeface="Courier New"/>
+                <a:cs typeface="Courier New"/>
+              </a:rPr>
+              <a:t>                     upper=</a:t>
+            </a:r>
+            <a:r>
+              <a:rPr lang="en-US" sz="1500" b="0" i="0" dirty="0" err="1">
+                <a:solidFill>
+                  <a:srgbClr val="EDE8F5"/>
+                </a:solidFill>
+                <a:latin typeface="Courier New"/>
+                <a:cs typeface="Courier New"/>
+              </a:rPr>
+              <a:t>day_ind.max</a:t>
+            </a:r>
+            <a:r>
+              <a:rPr lang="en-US" sz="1500" b="0" i="0" dirty="0">
+                <a:solidFill>
+                  <a:srgbClr val="EDE8F5"/>
+                </a:solidFill>
+                <a:latin typeface="Courier New"/>
+                <a:cs typeface="Courier New"/>
+              </a:rPr>
+              <a:t>())</a:t>
+            </a:r>
+          </a:p>
+          <a:p>
+            <a:r>
+              <a:rPr lang="en-US" sz="1500" dirty="0">
+                <a:solidFill>
+                  <a:srgbClr val="EDE8F5"/>
+                </a:solidFill>
+                <a:latin typeface="Courier New"/>
+                <a:cs typeface="Courier New"/>
+              </a:rPr>
+              <a:t>	sigma = </a:t>
+            </a:r>
+            <a:r>
+              <a:rPr lang="en-US" sz="1500" dirty="0" err="1">
+                <a:solidFill>
+                  <a:srgbClr val="EDE8F5"/>
+                </a:solidFill>
+                <a:latin typeface="Courier New"/>
+                <a:cs typeface="Courier New"/>
+              </a:rPr>
+              <a:t>pm.HalfNormal</a:t>
+            </a:r>
+            <a:r>
+              <a:rPr lang="en-US" sz="1500" dirty="0">
+                <a:solidFill>
+                  <a:srgbClr val="EDE8F5"/>
+                </a:solidFill>
+                <a:latin typeface="Courier New"/>
+                <a:cs typeface="Courier New"/>
+              </a:rPr>
+              <a:t>("sigma", 100.)</a:t>
+            </a:r>
+          </a:p>
+          <a:p>
+            <a:r>
+              <a:rPr lang="en-US" sz="1600" dirty="0">
+                <a:solidFill>
+                  <a:srgbClr val="EDE8F5"/>
+                </a:solidFill>
+                <a:latin typeface="Courier New"/>
+                <a:cs typeface="Courier New"/>
+              </a:rPr>
+              <a:t>	r = </a:t>
+            </a:r>
+            <a:r>
+              <a:rPr lang="en-US" sz="1600" dirty="0" err="1">
+                <a:solidFill>
+                  <a:srgbClr val="EDE8F5"/>
+                </a:solidFill>
+                <a:latin typeface="Courier New"/>
+                <a:cs typeface="Courier New"/>
+              </a:rPr>
+              <a:t>pm.math.switch</a:t>
+            </a:r>
+            <a:r>
+              <a:rPr lang="en-US" sz="1600" dirty="0">
+                <a:solidFill>
+                  <a:srgbClr val="EDE8F5"/>
+                </a:solidFill>
+                <a:latin typeface="Courier New"/>
+                <a:cs typeface="Courier New"/>
+              </a:rPr>
+              <a:t>(tau &gt;= </a:t>
+            </a:r>
+            <a:r>
+              <a:rPr lang="en-US" sz="1600" dirty="0" err="1">
+                <a:solidFill>
+                  <a:srgbClr val="EDE8F5"/>
+                </a:solidFill>
+                <a:latin typeface="Courier New"/>
+                <a:cs typeface="Courier New"/>
+              </a:rPr>
+              <a:t>day_ind</a:t>
+            </a:r>
+            <a:r>
+              <a:rPr lang="en-US" sz="1600" dirty="0">
+                <a:solidFill>
+                  <a:srgbClr val="EDE8F5"/>
+                </a:solidFill>
+                <a:latin typeface="Courier New"/>
+                <a:cs typeface="Courier New"/>
+              </a:rPr>
+              <a:t>,</a:t>
+            </a:r>
+          </a:p>
+          <a:p>
+            <a:r>
+              <a:rPr lang="en-US" sz="1600" dirty="0">
+                <a:solidFill>
+                  <a:srgbClr val="EDE8F5"/>
+                </a:solidFill>
+                <a:latin typeface="Courier New"/>
+                <a:cs typeface="Courier New"/>
+              </a:rPr>
+              <a:t>                   mu[0], mu[1])</a:t>
+            </a:r>
+          </a:p>
+          <a:p>
+            <a:endParaRPr lang="en-US" sz="1600" dirty="0">
+              <a:solidFill>
+                <a:srgbClr val="EDE8F5"/>
+              </a:solidFill>
+              <a:latin typeface="Courier New"/>
+              <a:cs typeface="Courier New"/>
+            </a:endParaRPr>
+          </a:p>
+          <a:p>
+            <a:r>
+              <a:rPr lang="en-US" sz="1600" dirty="0">
+                <a:solidFill>
+                  <a:srgbClr val="EDE8F5"/>
+                </a:solidFill>
+                <a:latin typeface="Courier New"/>
+                <a:cs typeface="Courier New"/>
+              </a:rPr>
+              <a:t>	</a:t>
+            </a:r>
+          </a:p>
+          <a:p>
+            <a:r>
+              <a:rPr lang="en-US" sz="1600" dirty="0">
+                <a:solidFill>
+                  <a:srgbClr val="EDE8F5"/>
+                </a:solidFill>
+                <a:latin typeface="Courier New"/>
+                <a:cs typeface="Courier New"/>
+              </a:rPr>
+              <a:t>	## Likelihood</a:t>
+            </a:r>
+          </a:p>
+          <a:p>
+            <a:r>
+              <a:rPr lang="en-US" sz="1600" dirty="0">
+                <a:solidFill>
+                  <a:srgbClr val="EDE8F5"/>
+                </a:solidFill>
+                <a:latin typeface="Courier New"/>
+                <a:cs typeface="Courier New"/>
+              </a:rPr>
+              <a:t>	</a:t>
+            </a:r>
+            <a:r>
+              <a:rPr lang="en-US" sz="1600" dirty="0" err="1">
+                <a:solidFill>
+                  <a:srgbClr val="EDE8F5"/>
+                </a:solidFill>
+                <a:latin typeface="Courier New"/>
+                <a:cs typeface="Courier New"/>
+              </a:rPr>
+              <a:t>spin_rate_like</a:t>
+            </a:r>
+            <a:r>
+              <a:rPr lang="en-US" sz="1600" dirty="0">
+                <a:solidFill>
+                  <a:srgbClr val="EDE8F5"/>
+                </a:solidFill>
+                <a:latin typeface="Courier New"/>
+                <a:cs typeface="Courier New"/>
+              </a:rPr>
+              <a:t> = </a:t>
+            </a:r>
+            <a:r>
+              <a:rPr lang="en-US" sz="1600" dirty="0" err="1">
+                <a:solidFill>
+                  <a:srgbClr val="EDE8F5"/>
+                </a:solidFill>
+                <a:latin typeface="Courier New"/>
+                <a:cs typeface="Courier New"/>
+              </a:rPr>
+              <a:t>pm.Normal</a:t>
+            </a:r>
+            <a:r>
+              <a:rPr lang="en-US" sz="1600" dirty="0">
+                <a:solidFill>
+                  <a:srgbClr val="EDE8F5"/>
+                </a:solidFill>
+                <a:latin typeface="Courier New"/>
+                <a:cs typeface="Courier New"/>
+              </a:rPr>
+              <a:t>(</a:t>
+            </a:r>
+          </a:p>
+          <a:p>
+            <a:r>
+              <a:rPr lang="en-US" sz="1600" dirty="0">
+                <a:solidFill>
+                  <a:srgbClr val="EDE8F5"/>
+                </a:solidFill>
+                <a:latin typeface="Courier New"/>
+                <a:cs typeface="Courier New"/>
+              </a:rPr>
+              <a:t>        '</a:t>
+            </a:r>
+            <a:r>
+              <a:rPr lang="en-US" sz="1600" dirty="0" err="1">
+                <a:solidFill>
+                  <a:srgbClr val="EDE8F5"/>
+                </a:solidFill>
+                <a:latin typeface="Courier New"/>
+                <a:cs typeface="Courier New"/>
+              </a:rPr>
+              <a:t>spin_rate_like</a:t>
+            </a:r>
+            <a:r>
+              <a:rPr lang="en-US" sz="1600" dirty="0">
+                <a:solidFill>
+                  <a:srgbClr val="EDE8F5"/>
+                </a:solidFill>
+                <a:latin typeface="Courier New"/>
+                <a:cs typeface="Courier New"/>
+              </a:rPr>
+              <a:t>', mu=r, sigma=sigma,</a:t>
+            </a:r>
+          </a:p>
+          <a:p>
+            <a:r>
+              <a:rPr lang="en-US" sz="1600" dirty="0">
+                <a:solidFill>
+                  <a:srgbClr val="EDE8F5"/>
+                </a:solidFill>
+                <a:latin typeface="Courier New"/>
+                <a:cs typeface="Courier New"/>
+              </a:rPr>
+              <a:t>        observed=</a:t>
+            </a:r>
+            <a:r>
+              <a:rPr lang="en-US" sz="1600" dirty="0" err="1">
+                <a:solidFill>
+                  <a:srgbClr val="EDE8F5"/>
+                </a:solidFill>
+                <a:latin typeface="Courier New"/>
+                <a:cs typeface="Courier New"/>
+              </a:rPr>
+              <a:t>spin_rate</a:t>
+            </a:r>
+            <a:r>
+              <a:rPr lang="en-US" sz="1600" dirty="0">
+                <a:solidFill>
+                  <a:srgbClr val="EDE8F5"/>
+                </a:solidFill>
+                <a:latin typeface="Courier New"/>
+                <a:cs typeface="Courier New"/>
+              </a:rPr>
+              <a:t>)</a:t>
+            </a:r>
+          </a:p>
+          <a:p>
+            <a:endParaRPr lang="en-US" sz="1600" dirty="0">
+              <a:solidFill>
+                <a:srgbClr val="EDE8F5"/>
+              </a:solidFill>
+              <a:latin typeface="Courier New"/>
+              <a:cs typeface="Courier New"/>
+            </a:endParaRPr>
+          </a:p>
+          <a:p>
+            <a:r>
+              <a:rPr lang="en-US" sz="1600" dirty="0">
+                <a:solidFill>
+                  <a:srgbClr val="EDE8F5"/>
+                </a:solidFill>
+                <a:latin typeface="Courier New"/>
+                <a:cs typeface="Courier New"/>
+              </a:rPr>
+              <a:t>	## sampling</a:t>
+            </a:r>
+          </a:p>
+          <a:p>
+            <a:r>
+              <a:rPr lang="en-US" sz="1600" dirty="0">
+                <a:solidFill>
+                  <a:srgbClr val="EDE8F5"/>
+                </a:solidFill>
+                <a:latin typeface="Courier New"/>
+                <a:cs typeface="Courier New"/>
+              </a:rPr>
+              <a:t>	trace = </a:t>
+            </a:r>
+            <a:r>
+              <a:rPr lang="en-US" sz="1600" dirty="0" err="1">
+                <a:solidFill>
+                  <a:srgbClr val="EDE8F5"/>
+                </a:solidFill>
+                <a:latin typeface="Courier New"/>
+                <a:cs typeface="Courier New"/>
+              </a:rPr>
+              <a:t>pm.sample</a:t>
+            </a:r>
+            <a:r>
+              <a:rPr lang="en-US" sz="1600" dirty="0">
+                <a:solidFill>
+                  <a:srgbClr val="EDE8F5"/>
+                </a:solidFill>
+                <a:latin typeface="Courier New"/>
+                <a:cs typeface="Courier New"/>
+              </a:rPr>
+              <a:t>(1500, chains=2)</a:t>
+            </a:r>
+            <a:endParaRPr lang="en-US" sz="1500" dirty="0">
+              <a:solidFill>
+                <a:srgbClr val="EDE8F5"/>
+              </a:solidFill>
+              <a:latin typeface="Courier New"/>
+              <a:cs typeface="Courier New"/>
+            </a:endParaRPr>
+          </a:p>
+          <a:p>
+            <a:endParaRPr lang="en-US" sz="1500" b="0" i="0" dirty="0">
+              <a:solidFill>
+                <a:srgbClr val="EDE8F5"/>
+              </a:solidFill>
+              <a:latin typeface="Courier New"/>
+              <a:cs typeface="Courier New"/>
+            </a:endParaRPr>
+          </a:p>
+          <a:p>
+            <a:r>
+              <a:rPr lang="en-US" sz="1500" dirty="0">
+                <a:solidFill>
+                  <a:srgbClr val="EDE8F5"/>
+                </a:solidFill>
+                <a:latin typeface="Courier New"/>
+                <a:cs typeface="Courier New"/>
+              </a:rPr>
+              <a:t>	</a:t>
+            </a:r>
+            <a:endParaRPr lang="en-US" sz="1500" b="0" i="0" dirty="0">
+              <a:solidFill>
+                <a:srgbClr val="EDE8F5"/>
+              </a:solidFill>
+              <a:latin typeface="Courier New"/>
+              <a:cs typeface="Courier New"/>
+            </a:endParaRPr>
+          </a:p>
+        </p:txBody>
+      </p:sp>
+      <p:sp>
+        <p:nvSpPr>
+          <p:cNvPr id="6" name="TextBox 5">
+            <a:extLst>
+              <a:ext uri="{FF2B5EF4-FFF2-40B4-BE49-F238E27FC236}">
+                <a16:creationId xmlns:a16="http://schemas.microsoft.com/office/drawing/2014/main" id="{B11A2427-D14E-26CB-7535-3DDD4202D9EE}"/>
+              </a:ext>
+            </a:extLst>
+          </p:cNvPr>
+          <p:cNvSpPr txBox="1"/>
+          <p:nvPr/>
+        </p:nvSpPr>
+        <p:spPr>
+          <a:xfrm>
+            <a:off x="2908300" y="402521"/>
+            <a:ext cx="4597400" cy="369332"/>
           </a:xfrm>
           <a:prstGeom prst="rect">
             <a:avLst/>
           </a:prstGeom>
-        </p:spPr>
-      </p:pic>
-      <p:sp>
-        <p:nvSpPr>
-          <p:cNvPr id="4" name="card"/>
-          <p:cNvSpPr/>
-          <p:nvPr/>
-        </p:nvSpPr>
-        <p:spPr>
-          <a:xfrm>
-            <a:off x="9601200" y="1463040"/>
-            <a:ext cx="2039112" cy="1737360"/>
-          </a:xfrm>
-          <a:prstGeom prst="roundRect">
-            <a:avLst>
-              <a:gd name="adj" fmla="val 8000"/>
-            </a:avLst>
-          </a:prstGeom>
-          <a:solidFill>
-            <a:srgbClr val="F3F0F7"/>
-          </a:solidFill>
-          <a:ln>
-            <a:noFill/>
-          </a:ln>
-          <a:effectLst/>
-        </p:spPr>
-        <p:style>
-          <a:lnRef idx="1">
-            <a:schemeClr val="accent1"/>
-          </a:lnRef>
-          <a:fillRef idx="3">
-            <a:schemeClr val="accent1"/>
-          </a:fillRef>
-          <a:effectRef idx="2">
-            <a:schemeClr val="accent1"/>
-          </a:effectRef>
-          <a:fontRef idx="minor">
-            <a:schemeClr val="lt1"/>
-          </a:fontRef>
-        </p:style>
-        <p:txBody>
-          <a:bodyPr rtlCol="0" anchor="ctr"/>
-          <a:lstStyle/>
-          <a:p>
-            <a:endParaRPr/>
-          </a:p>
-        </p:txBody>
-      </p:sp>
-      <p:sp>
-        <p:nvSpPr>
-          <p:cNvPr id="5" name="TextBox 4"/>
-          <p:cNvSpPr txBox="1"/>
-          <p:nvPr/>
-        </p:nvSpPr>
-        <p:spPr>
-          <a:xfrm>
-            <a:off x="9601200" y="1536192"/>
-            <a:ext cx="2039112" cy="731520"/>
-          </a:xfrm>
-          <a:prstGeom prst="rect">
-            <a:avLst/>
-          </a:prstGeom>
           <a:noFill/>
         </p:spPr>
         <p:txBody>
-          <a:bodyPr wrap="square" lIns="45720" tIns="27432" rIns="45720" bIns="27432" anchor="ctr">
+          <a:bodyPr wrap="square" rtlCol="0">
             <a:spAutoFit/>
           </a:bodyPr>
           <a:lstStyle/>
           <a:p>
-            <a:pPr algn="ctr" rtl="1">
-              <a:spcAft>
-                <a:spcPts val="600"/>
-              </a:spcAft>
-            </a:pPr>
-            <a:r>
-              <a:rPr lang="he-IL" sz="3400" b="1" i="0">
-                <a:solidFill>
-                  <a:srgbClr val="17A398"/>
-                </a:solidFill>
-                <a:latin typeface="Arial"/>
-                <a:cs typeface="Arial"/>
-              </a:rPr>
-              <a:t>2,539</a:t>
-            </a:r>
-          </a:p>
-        </p:txBody>
-      </p:sp>
-      <p:sp>
-        <p:nvSpPr>
-          <p:cNvPr id="6" name="TextBox 5"/>
-          <p:cNvSpPr txBox="1"/>
-          <p:nvPr/>
-        </p:nvSpPr>
-        <p:spPr>
-          <a:xfrm>
-            <a:off x="9601200" y="2240280"/>
-            <a:ext cx="2039112" cy="365760"/>
-          </a:xfrm>
-          <a:prstGeom prst="rect">
-            <a:avLst/>
-          </a:prstGeom>
-          <a:noFill/>
-        </p:spPr>
-        <p:txBody>
-          <a:bodyPr wrap="square" lIns="45720" tIns="27432" rIns="45720" bIns="27432" anchor="t">
-            <a:spAutoFit/>
-          </a:bodyPr>
-          <a:lstStyle/>
-          <a:p>
-            <a:pPr algn="ctr" rtl="1">
-              <a:spcAft>
-                <a:spcPts val="600"/>
-              </a:spcAft>
-            </a:pPr>
-            <a:r>
-              <a:rPr lang="en-US" sz="1300" b="0" i="0">
-                <a:solidFill>
-                  <a:srgbClr val="6B6478"/>
-                </a:solidFill>
-                <a:latin typeface="Arial"/>
-                <a:cs typeface="Arial"/>
-              </a:rPr>
-              <a:t>μ₁</a:t>
-            </a:r>
-            <a:r>
-              <a:rPr lang="he-IL" sz="1300" b="0" i="0">
-                <a:solidFill>
-                  <a:srgbClr val="6B6478"/>
-                </a:solidFill>
-                <a:latin typeface="Arial"/>
-                <a:cs typeface="Arial"/>
-              </a:rPr>
-              <a:t> — לפני</a:t>
-            </a:r>
-          </a:p>
-        </p:txBody>
-      </p:sp>
-      <p:sp>
-        <p:nvSpPr>
-          <p:cNvPr id="7" name="TextBox 6"/>
-          <p:cNvSpPr txBox="1"/>
-          <p:nvPr/>
-        </p:nvSpPr>
-        <p:spPr>
-          <a:xfrm>
-            <a:off x="9601200" y="2606040"/>
-            <a:ext cx="2039112" cy="365760"/>
-          </a:xfrm>
-          <a:prstGeom prst="rect">
-            <a:avLst/>
-          </a:prstGeom>
-          <a:noFill/>
-        </p:spPr>
-        <p:txBody>
-          <a:bodyPr wrap="square" lIns="45720" tIns="27432" rIns="45720" bIns="27432" anchor="t">
-            <a:spAutoFit/>
-          </a:bodyPr>
-          <a:lstStyle/>
-          <a:p>
-            <a:pPr algn="ctr" rtl="0">
-              <a:spcAft>
-                <a:spcPts val="600"/>
-              </a:spcAft>
-            </a:pPr>
-            <a:r>
-              <a:rPr lang="en-US" sz="1200" b="0" i="0">
-                <a:solidFill>
-                  <a:srgbClr val="6B6478"/>
-                </a:solidFill>
-                <a:latin typeface="Arial"/>
-                <a:cs typeface="Arial"/>
-              </a:rPr>
-              <a:t>HDI: 2,528–2,551</a:t>
-            </a:r>
-          </a:p>
-        </p:txBody>
-      </p:sp>
-      <p:sp>
-        <p:nvSpPr>
-          <p:cNvPr id="8" name="card"/>
-          <p:cNvSpPr/>
-          <p:nvPr/>
-        </p:nvSpPr>
-        <p:spPr>
-          <a:xfrm>
-            <a:off x="7452360" y="1463040"/>
-            <a:ext cx="2039112" cy="1737360"/>
-          </a:xfrm>
-          <a:prstGeom prst="roundRect">
-            <a:avLst>
-              <a:gd name="adj" fmla="val 8000"/>
-            </a:avLst>
-          </a:prstGeom>
-          <a:solidFill>
-            <a:srgbClr val="F3F0F7"/>
-          </a:solidFill>
-          <a:ln>
-            <a:noFill/>
-          </a:ln>
-          <a:effectLst/>
-        </p:spPr>
-        <p:style>
-          <a:lnRef idx="1">
-            <a:schemeClr val="accent1"/>
-          </a:lnRef>
-          <a:fillRef idx="3">
-            <a:schemeClr val="accent1"/>
-          </a:fillRef>
-          <a:effectRef idx="2">
-            <a:schemeClr val="accent1"/>
-          </a:effectRef>
-          <a:fontRef idx="minor">
-            <a:schemeClr val="lt1"/>
-          </a:fontRef>
-        </p:style>
-        <p:txBody>
-          <a:bodyPr rtlCol="0" anchor="ctr"/>
-          <a:lstStyle/>
-          <a:p>
-            <a:endParaRPr/>
-          </a:p>
-        </p:txBody>
-      </p:sp>
-      <p:sp>
-        <p:nvSpPr>
-          <p:cNvPr id="9" name="TextBox 8"/>
-          <p:cNvSpPr txBox="1"/>
-          <p:nvPr/>
-        </p:nvSpPr>
-        <p:spPr>
-          <a:xfrm>
-            <a:off x="7452360" y="1536192"/>
-            <a:ext cx="2039112" cy="731520"/>
-          </a:xfrm>
-          <a:prstGeom prst="rect">
-            <a:avLst/>
-          </a:prstGeom>
-          <a:noFill/>
-        </p:spPr>
-        <p:txBody>
-          <a:bodyPr wrap="square" lIns="45720" tIns="27432" rIns="45720" bIns="27432" anchor="ctr">
-            <a:spAutoFit/>
-          </a:bodyPr>
-          <a:lstStyle/>
-          <a:p>
-            <a:pPr algn="ctr" rtl="1">
-              <a:spcAft>
-                <a:spcPts val="600"/>
-              </a:spcAft>
-            </a:pPr>
-            <a:r>
-              <a:rPr lang="he-IL" sz="3400" b="1" i="0">
-                <a:solidFill>
-                  <a:srgbClr val="E4572E"/>
-                </a:solidFill>
-                <a:latin typeface="Arial"/>
-                <a:cs typeface="Arial"/>
-              </a:rPr>
-              <a:t>2,442</a:t>
-            </a:r>
-          </a:p>
-        </p:txBody>
-      </p:sp>
-      <p:sp>
-        <p:nvSpPr>
-          <p:cNvPr id="10" name="TextBox 9"/>
-          <p:cNvSpPr txBox="1"/>
-          <p:nvPr/>
-        </p:nvSpPr>
-        <p:spPr>
-          <a:xfrm>
-            <a:off x="7452360" y="2240280"/>
-            <a:ext cx="2039112" cy="365760"/>
-          </a:xfrm>
-          <a:prstGeom prst="rect">
-            <a:avLst/>
-          </a:prstGeom>
-          <a:noFill/>
-        </p:spPr>
-        <p:txBody>
-          <a:bodyPr wrap="square" lIns="45720" tIns="27432" rIns="45720" bIns="27432" anchor="t">
-            <a:spAutoFit/>
-          </a:bodyPr>
-          <a:lstStyle/>
-          <a:p>
-            <a:pPr algn="ctr" rtl="1">
-              <a:spcAft>
-                <a:spcPts val="600"/>
-              </a:spcAft>
-            </a:pPr>
-            <a:r>
-              <a:rPr lang="en-US" sz="1300" b="0" i="0">
-                <a:solidFill>
-                  <a:srgbClr val="6B6478"/>
-                </a:solidFill>
-                <a:latin typeface="Arial"/>
-                <a:cs typeface="Arial"/>
-              </a:rPr>
-              <a:t>μ₂</a:t>
-            </a:r>
-            <a:r>
-              <a:rPr lang="he-IL" sz="1300" b="0" i="0">
-                <a:solidFill>
-                  <a:srgbClr val="6B6478"/>
-                </a:solidFill>
-                <a:latin typeface="Arial"/>
-                <a:cs typeface="Arial"/>
-              </a:rPr>
-              <a:t> — אחרי</a:t>
-            </a:r>
-          </a:p>
-        </p:txBody>
-      </p:sp>
-      <p:sp>
-        <p:nvSpPr>
-          <p:cNvPr id="11" name="TextBox 10"/>
-          <p:cNvSpPr txBox="1"/>
-          <p:nvPr/>
-        </p:nvSpPr>
-        <p:spPr>
-          <a:xfrm>
-            <a:off x="7452360" y="2606040"/>
-            <a:ext cx="2039112" cy="365760"/>
-          </a:xfrm>
-          <a:prstGeom prst="rect">
-            <a:avLst/>
-          </a:prstGeom>
-          <a:noFill/>
-        </p:spPr>
-        <p:txBody>
-          <a:bodyPr wrap="square" lIns="45720" tIns="27432" rIns="45720" bIns="27432" anchor="t">
-            <a:spAutoFit/>
-          </a:bodyPr>
-          <a:lstStyle/>
-          <a:p>
-            <a:pPr algn="ctr" rtl="0">
-              <a:spcAft>
-                <a:spcPts val="600"/>
-              </a:spcAft>
-            </a:pPr>
-            <a:r>
-              <a:rPr lang="en-US" sz="1200" b="0" i="0">
-                <a:solidFill>
-                  <a:srgbClr val="6B6478"/>
-                </a:solidFill>
-                <a:latin typeface="Arial"/>
-                <a:cs typeface="Arial"/>
-              </a:rPr>
-              <a:t>HDI: 2,433–2,450</a:t>
-            </a:r>
-          </a:p>
-        </p:txBody>
-      </p:sp>
-      <p:sp>
-        <p:nvSpPr>
-          <p:cNvPr id="12" name="TextBox 11"/>
-          <p:cNvSpPr txBox="1"/>
-          <p:nvPr/>
-        </p:nvSpPr>
-        <p:spPr>
-          <a:xfrm>
-            <a:off x="7452360" y="3474720"/>
-            <a:ext cx="4187952" cy="2743200"/>
-          </a:xfrm>
-          <a:prstGeom prst="rect">
-            <a:avLst/>
-          </a:prstGeom>
-          <a:noFill/>
-        </p:spPr>
-        <p:txBody>
-          <a:bodyPr wrap="square" lIns="45720" tIns="27432" rIns="45720" bIns="27432" anchor="t">
-            <a:spAutoFit/>
-          </a:bodyPr>
-          <a:lstStyle/>
-          <a:p>
-            <a:pPr marR="274320" indent="-274320" algn="r" rtl="1">
-              <a:spcAft>
-                <a:spcPts val="1200"/>
-              </a:spcAft>
-              <a:buClr>
-                <a:srgbClr val="17A398"/>
-              </a:buClr>
-              <a:buFont typeface="Arial"/>
-              <a:buChar char="•"/>
-            </a:pPr>
-            <a:r>
-              <a:rPr lang="he-IL" sz="1600" b="0" i="0">
-                <a:solidFill>
-                  <a:srgbClr val="2B1E3F"/>
-                </a:solidFill>
-                <a:latin typeface="Arial"/>
-                <a:cs typeface="Arial"/>
-              </a:rPr>
-              <a:t>ירידה של כ-</a:t>
-            </a:r>
-            <a:r>
-              <a:rPr lang="he-IL" sz="1600" b="1" i="0">
-                <a:solidFill>
-                  <a:srgbClr val="E4572E"/>
-                </a:solidFill>
-                <a:latin typeface="Arial"/>
-                <a:cs typeface="Arial"/>
-              </a:rPr>
-              <a:t>97 סל”ד</a:t>
-            </a:r>
-            <a:r>
-              <a:rPr lang="he-IL" sz="1600" b="0" i="0">
-                <a:solidFill>
-                  <a:srgbClr val="2B1E3F"/>
-                </a:solidFill>
-                <a:latin typeface="Arial"/>
-                <a:cs typeface="Arial"/>
-              </a:rPr>
-              <a:t> בממוצע קצב הסיבוב</a:t>
-            </a:r>
-          </a:p>
-          <a:p>
-            <a:pPr marR="274320" indent="-274320" algn="r" rtl="1">
-              <a:spcAft>
-                <a:spcPts val="1200"/>
-              </a:spcAft>
-              <a:buClr>
-                <a:srgbClr val="17A398"/>
-              </a:buClr>
-              <a:buFont typeface="Arial"/>
-              <a:buChar char="•"/>
-            </a:pPr>
-            <a:r>
-              <a:rPr lang="he-IL" sz="1600" b="0" i="0">
-                <a:solidFill>
-                  <a:srgbClr val="2B1E3F"/>
-                </a:solidFill>
-                <a:latin typeface="Arial"/>
-                <a:cs typeface="Arial"/>
-              </a:rPr>
-              <a:t>מרווחי ה-HDI </a:t>
-            </a:r>
-            <a:r>
-              <a:rPr lang="he-IL" sz="1600" b="1" i="0">
-                <a:solidFill>
-                  <a:srgbClr val="2B1E3F"/>
-                </a:solidFill>
-                <a:latin typeface="Arial"/>
-                <a:cs typeface="Arial"/>
-              </a:rPr>
-              <a:t>לא חופפים</a:t>
-            </a:r>
-            <a:r>
-              <a:rPr lang="he-IL" sz="1600" b="0" i="0">
-                <a:solidFill>
-                  <a:srgbClr val="2B1E3F"/>
-                </a:solidFill>
-                <a:latin typeface="Arial"/>
-                <a:cs typeface="Arial"/>
-              </a:rPr>
-              <a:t> ← ראיה חזקה לשינוי אמיתי</a:t>
-            </a:r>
-          </a:p>
-          <a:p>
-            <a:pPr marR="274320" indent="-274320" algn="r" rtl="1">
-              <a:spcAft>
-                <a:spcPts val="1200"/>
-              </a:spcAft>
-              <a:buClr>
-                <a:srgbClr val="17A398"/>
-              </a:buClr>
-              <a:buFont typeface="Arial"/>
-              <a:buChar char="•"/>
-            </a:pPr>
-            <a:r>
-              <a:rPr lang="he-IL" sz="1600" b="0" i="0">
-                <a:solidFill>
-                  <a:srgbClr val="2B1E3F"/>
-                </a:solidFill>
-                <a:latin typeface="Arial"/>
-                <a:cs typeface="Arial"/>
-              </a:rPr>
-              <a:t>היחידות: סיבובים לדקה (rpm)</a:t>
-            </a:r>
+            <a:r>
+              <a:rPr lang="en-US" dirty="0"/>
+              <a:t>The entire code in one shot</a:t>
+            </a:r>
+            <a:endParaRPr lang="en-IL" dirty="0"/>
           </a:p>
         </p:txBody>
       </p:sp>
     </p:spTree>
+    <p:extLst>
+      <p:ext uri="{BB962C8B-B14F-4D97-AF65-F5344CB8AC3E}">
+        <p14:creationId xmlns:p14="http://schemas.microsoft.com/office/powerpoint/2010/main" val="3407960334"/>
+      </p:ext>
+    </p:extLst>
   </p:cSld>
   <p:clrMapOvr>
     <a:masterClrMapping/>
@@ -10545,10 +10793,10 @@
                 <a:solidFill>
                   <a:srgbClr val="2B1E3F"/>
                 </a:solidFill>
-                <a:latin typeface="Cambria Math"/>
-                <a:cs typeface="Cambria Math"/>
-              </a:rPr>
-              <a:t>τ</a:t>
+                <a:latin typeface="Arial"/>
+                <a:cs typeface="Arial"/>
+              </a:rPr>
+              <a:t>μ₁</a:t>
             </a:r>
             <a:r>
               <a:rPr lang="he-IL" sz="3400" b="1" i="0">
@@ -10558,14 +10806,24 @@
                 <a:latin typeface="Arial"/>
                 <a:cs typeface="Arial"/>
               </a:rPr>
-              <a:t>: מתי זה קרה?</a:t>
+              <a:t> ו-</a:t>
+            </a:r>
+            <a:r>
+              <a:rPr lang="en-US" sz="3400" b="1" i="0">
+                <a:solidFill>
+                  <a:srgbClr val="2B1E3F"/>
+                </a:solidFill>
+                <a:latin typeface="Arial"/>
+                <a:cs typeface="Arial"/>
+              </a:rPr>
+              <a:t>μ₂</a:t>
             </a:r>
           </a:p>
         </p:txBody>
       </p:sp>
       <p:pic>
         <p:nvPicPr>
-          <p:cNvPr id="3" name="Picture 2" descr="post_tau.png"/>
+          <p:cNvPr id="3" name="Picture 2" descr="post_mu.png"/>
           <p:cNvPicPr>
             <a:picLocks noChangeAspect="1"/>
           </p:cNvPicPr>
@@ -10580,7 +10838,7 @@
         <p:spPr>
           <a:xfrm>
             <a:off x="548640" y="1463040"/>
-            <a:ext cx="6949440" cy="4572000"/>
+            <a:ext cx="6583680" cy="4572000"/>
           </a:xfrm>
           <a:prstGeom prst="rect">
             <a:avLst/>
@@ -10595,8 +10853,8 @@
         </p:nvSpPr>
         <p:spPr>
           <a:xfrm>
-            <a:off x="7818120" y="1463040"/>
-            <a:ext cx="3822191" cy="1737360"/>
+            <a:off x="9601200" y="1463040"/>
+            <a:ext cx="2039112" cy="1737360"/>
           </a:xfrm>
           <a:prstGeom prst="roundRect">
             <a:avLst>
@@ -10641,8 +10899,8 @@
         </p:nvSpPr>
         <p:spPr>
           <a:xfrm>
-            <a:off x="7818120" y="1554480"/>
-            <a:ext cx="3822191" cy="822960"/>
+            <a:off x="9601200" y="1536192"/>
+            <a:ext cx="2039112" cy="731520"/>
           </a:xfrm>
           <a:prstGeom prst="rect">
             <a:avLst/>
@@ -10661,14 +10919,14 @@
               </a:spcAft>
             </a:pPr>
             <a:r>
-              <a:rPr lang="he-IL" sz="3000" b="1" i="0">
-                <a:solidFill>
-                  <a:srgbClr val="7B5EA7"/>
-                </a:solidFill>
-                <a:latin typeface="Arial"/>
-                <a:cs typeface="Arial"/>
-              </a:rPr>
-              <a:t>8 ביוני 2021</a:t>
+              <a:rPr lang="he-IL" sz="3400" b="1" i="0">
+                <a:solidFill>
+                  <a:srgbClr val="17A398"/>
+                </a:solidFill>
+                <a:latin typeface="Arial"/>
+                <a:cs typeface="Arial"/>
+              </a:rPr>
+              <a:t>2,539</a:t>
             </a:r>
           </a:p>
         </p:txBody>
@@ -10681,8 +10939,8 @@
         </p:nvSpPr>
         <p:spPr>
           <a:xfrm>
-            <a:off x="7818120" y="2377440"/>
-            <a:ext cx="3822191" cy="731520"/>
+            <a:off x="9601200" y="2240280"/>
+            <a:ext cx="2039112" cy="365760"/>
           </a:xfrm>
           <a:prstGeom prst="rect">
             <a:avLst/>
@@ -10701,6 +10959,16 @@
               </a:spcAft>
             </a:pPr>
             <a:r>
+              <a:rPr lang="en-US" sz="1300" b="0" i="0">
+                <a:solidFill>
+                  <a:srgbClr val="6B6478"/>
+                </a:solidFill>
+                <a:latin typeface="Arial"/>
+                <a:cs typeface="Arial"/>
+              </a:rPr>
+              <a:t>μ₁</a:t>
+            </a:r>
+            <a:r>
               <a:rPr lang="he-IL" sz="1300" b="0" i="0">
                 <a:solidFill>
                   <a:srgbClr val="6B6478"/>
@@ -10708,27 +10976,7 @@
                 <a:latin typeface="Arial"/>
                 <a:cs typeface="Arial"/>
               </a:rPr>
-              <a:t>ממוצע הפוסטריור של </a:t>
-            </a:r>
-            <a:r>
-              <a:rPr lang="en-US" sz="1300" b="0" i="0">
-                <a:solidFill>
-                  <a:srgbClr val="6B6478"/>
-                </a:solidFill>
-                <a:latin typeface="Cambria Math"/>
-                <a:cs typeface="Cambria Math"/>
-              </a:rPr>
-              <a:t>τ</a:t>
-            </a:r>
-            <a:r>
-              <a:rPr lang="he-IL" sz="1300" b="0" i="0">
-                <a:solidFill>
-                  <a:srgbClr val="6B6478"/>
-                </a:solidFill>
-                <a:latin typeface="Arial"/>
-                <a:cs typeface="Arial"/>
-              </a:rPr>
-              <a:t> (יום 68 בעונה)</a:t>
+              <a:t> — לפני</a:t>
             </a:r>
           </a:p>
         </p:txBody>
@@ -10741,8 +10989,224 @@
         </p:nvSpPr>
         <p:spPr>
           <a:xfrm>
-            <a:off x="7818120" y="3474720"/>
-            <a:ext cx="3822191" cy="2743200"/>
+            <a:off x="9601200" y="2606040"/>
+            <a:ext cx="2039112" cy="365760"/>
+          </a:xfrm>
+          <a:prstGeom prst="rect">
+            <a:avLst/>
+          </a:prstGeom>
+          <a:noFill/>
+        </p:spPr>
+        <p:txBody>
+          <a:bodyPr wrap="square" lIns="45720" tIns="27432" rIns="45720" bIns="27432" anchor="t">
+            <a:spAutoFit/>
+          </a:bodyPr>
+          <a:lstStyle/>
+          <a:p>
+            <a:pPr algn="ctr" rtl="0">
+              <a:spcAft>
+                <a:spcPts val="600"/>
+              </a:spcAft>
+            </a:pPr>
+            <a:r>
+              <a:rPr lang="en-US" sz="1200" b="0" i="0">
+                <a:solidFill>
+                  <a:srgbClr val="6B6478"/>
+                </a:solidFill>
+                <a:latin typeface="Arial"/>
+                <a:cs typeface="Arial"/>
+              </a:rPr>
+              <a:t>HDI: 2,528–2,551</a:t>
+            </a:r>
+          </a:p>
+        </p:txBody>
+      </p:sp>
+      <p:sp>
+        <p:nvSpPr>
+          <p:cNvPr id="8" name="card"/>
+          <p:cNvSpPr/>
+          <p:nvPr/>
+        </p:nvSpPr>
+        <p:spPr>
+          <a:xfrm>
+            <a:off x="7452360" y="1463040"/>
+            <a:ext cx="2039112" cy="1737360"/>
+          </a:xfrm>
+          <a:prstGeom prst="roundRect">
+            <a:avLst>
+              <a:gd name="adj" fmla="val 8000"/>
+            </a:avLst>
+          </a:prstGeom>
+          <a:solidFill>
+            <a:srgbClr val="F3F0F7"/>
+          </a:solidFill>
+          <a:ln>
+            <a:noFill/>
+          </a:ln>
+          <a:effectLst/>
+        </p:spPr>
+        <p:style>
+          <a:lnRef idx="1">
+            <a:schemeClr val="accent1"/>
+          </a:lnRef>
+          <a:fillRef idx="3">
+            <a:schemeClr val="accent1"/>
+          </a:fillRef>
+          <a:effectRef idx="2">
+            <a:schemeClr val="accent1"/>
+          </a:effectRef>
+          <a:fontRef idx="minor">
+            <a:schemeClr val="lt1"/>
+          </a:fontRef>
+        </p:style>
+        <p:txBody>
+          <a:bodyPr rtlCol="0" anchor="ctr"/>
+          <a:lstStyle/>
+          <a:p>
+            <a:endParaRPr/>
+          </a:p>
+        </p:txBody>
+      </p:sp>
+      <p:sp>
+        <p:nvSpPr>
+          <p:cNvPr id="9" name="TextBox 8"/>
+          <p:cNvSpPr txBox="1"/>
+          <p:nvPr/>
+        </p:nvSpPr>
+        <p:spPr>
+          <a:xfrm>
+            <a:off x="7452360" y="1536192"/>
+            <a:ext cx="2039112" cy="731520"/>
+          </a:xfrm>
+          <a:prstGeom prst="rect">
+            <a:avLst/>
+          </a:prstGeom>
+          <a:noFill/>
+        </p:spPr>
+        <p:txBody>
+          <a:bodyPr wrap="square" lIns="45720" tIns="27432" rIns="45720" bIns="27432" anchor="ctr">
+            <a:spAutoFit/>
+          </a:bodyPr>
+          <a:lstStyle/>
+          <a:p>
+            <a:pPr algn="ctr" rtl="1">
+              <a:spcAft>
+                <a:spcPts val="600"/>
+              </a:spcAft>
+            </a:pPr>
+            <a:r>
+              <a:rPr lang="he-IL" sz="3400" b="1" i="0">
+                <a:solidFill>
+                  <a:srgbClr val="E4572E"/>
+                </a:solidFill>
+                <a:latin typeface="Arial"/>
+                <a:cs typeface="Arial"/>
+              </a:rPr>
+              <a:t>2,442</a:t>
+            </a:r>
+          </a:p>
+        </p:txBody>
+      </p:sp>
+      <p:sp>
+        <p:nvSpPr>
+          <p:cNvPr id="10" name="TextBox 9"/>
+          <p:cNvSpPr txBox="1"/>
+          <p:nvPr/>
+        </p:nvSpPr>
+        <p:spPr>
+          <a:xfrm>
+            <a:off x="7452360" y="2240280"/>
+            <a:ext cx="2039112" cy="365760"/>
+          </a:xfrm>
+          <a:prstGeom prst="rect">
+            <a:avLst/>
+          </a:prstGeom>
+          <a:noFill/>
+        </p:spPr>
+        <p:txBody>
+          <a:bodyPr wrap="square" lIns="45720" tIns="27432" rIns="45720" bIns="27432" anchor="t">
+            <a:spAutoFit/>
+          </a:bodyPr>
+          <a:lstStyle/>
+          <a:p>
+            <a:pPr algn="ctr" rtl="1">
+              <a:spcAft>
+                <a:spcPts val="600"/>
+              </a:spcAft>
+            </a:pPr>
+            <a:r>
+              <a:rPr lang="en-US" sz="1300" b="0" i="0">
+                <a:solidFill>
+                  <a:srgbClr val="6B6478"/>
+                </a:solidFill>
+                <a:latin typeface="Arial"/>
+                <a:cs typeface="Arial"/>
+              </a:rPr>
+              <a:t>μ₂</a:t>
+            </a:r>
+            <a:r>
+              <a:rPr lang="he-IL" sz="1300" b="0" i="0">
+                <a:solidFill>
+                  <a:srgbClr val="6B6478"/>
+                </a:solidFill>
+                <a:latin typeface="Arial"/>
+                <a:cs typeface="Arial"/>
+              </a:rPr>
+              <a:t> — אחרי</a:t>
+            </a:r>
+          </a:p>
+        </p:txBody>
+      </p:sp>
+      <p:sp>
+        <p:nvSpPr>
+          <p:cNvPr id="11" name="TextBox 10"/>
+          <p:cNvSpPr txBox="1"/>
+          <p:nvPr/>
+        </p:nvSpPr>
+        <p:spPr>
+          <a:xfrm>
+            <a:off x="7452360" y="2606040"/>
+            <a:ext cx="2039112" cy="365760"/>
+          </a:xfrm>
+          <a:prstGeom prst="rect">
+            <a:avLst/>
+          </a:prstGeom>
+          <a:noFill/>
+        </p:spPr>
+        <p:txBody>
+          <a:bodyPr wrap="square" lIns="45720" tIns="27432" rIns="45720" bIns="27432" anchor="t">
+            <a:spAutoFit/>
+          </a:bodyPr>
+          <a:lstStyle/>
+          <a:p>
+            <a:pPr algn="ctr" rtl="0">
+              <a:spcAft>
+                <a:spcPts val="600"/>
+              </a:spcAft>
+            </a:pPr>
+            <a:r>
+              <a:rPr lang="en-US" sz="1200" b="0" i="0">
+                <a:solidFill>
+                  <a:srgbClr val="6B6478"/>
+                </a:solidFill>
+                <a:latin typeface="Arial"/>
+                <a:cs typeface="Arial"/>
+              </a:rPr>
+              <a:t>HDI: 2,433–2,450</a:t>
+            </a:r>
+          </a:p>
+        </p:txBody>
+      </p:sp>
+      <p:sp>
+        <p:nvSpPr>
+          <p:cNvPr id="12" name="TextBox 11"/>
+          <p:cNvSpPr txBox="1"/>
+          <p:nvPr/>
+        </p:nvSpPr>
+        <p:spPr>
+          <a:xfrm>
+            <a:off x="7452360" y="3474720"/>
+            <a:ext cx="4187952" cy="2743200"/>
           </a:xfrm>
           <a:prstGeom prst="rect">
             <a:avLst/>
@@ -10760,7 +11224,7 @@
                 <a:spcPts val="1200"/>
               </a:spcAft>
               <a:buClr>
-                <a:srgbClr val="7B5EA7"/>
+                <a:srgbClr val="17A398"/>
               </a:buClr>
               <a:buFont typeface="Arial"/>
               <a:buChar char="•"/>
@@ -10773,7 +11237,27 @@
                 <a:latin typeface="Arial"/>
                 <a:cs typeface="Arial"/>
               </a:rPr>
-              <a:t>מרווח HDI של 94%: בין יום 65 ליום 72 — חלון של כשבוע</a:t>
+              <a:t>ירידה של כ-</a:t>
+            </a:r>
+            <a:r>
+              <a:rPr lang="he-IL" sz="1600" b="1" i="0">
+                <a:solidFill>
+                  <a:srgbClr val="E4572E"/>
+                </a:solidFill>
+                <a:latin typeface="Arial"/>
+                <a:cs typeface="Arial"/>
+              </a:rPr>
+              <a:t>97 סל”ד</a:t>
+            </a:r>
+            <a:r>
+              <a:rPr lang="he-IL" sz="1600" b="0" i="0">
+                <a:solidFill>
+                  <a:srgbClr val="2B1E3F"/>
+                </a:solidFill>
+                <a:latin typeface="Arial"/>
+                <a:cs typeface="Arial"/>
+              </a:rPr>
+              <a:t> בממוצע קצב הסיבוב</a:t>
             </a:r>
           </a:p>
           <a:p>
@@ -10782,7 +11266,7 @@
                 <a:spcPts val="1200"/>
               </a:spcAft>
               <a:buClr>
-                <a:srgbClr val="7B5EA7"/>
+                <a:srgbClr val="17A398"/>
               </a:buClr>
               <a:buFont typeface="Arial"/>
               <a:buChar char="•"/>
@@ -10795,7 +11279,27 @@
                 <a:latin typeface="Arial"/>
                 <a:cs typeface="Arial"/>
               </a:rPr>
-              <a:t>תואם את מועד השינוי בכללים — וקרוב לשמועה על האכיפה (3 ביוני)</a:t>
+              <a:t>מרווחי ה-HDI </a:t>
+            </a:r>
+            <a:r>
+              <a:rPr lang="he-IL" sz="1600" b="1" i="0">
+                <a:solidFill>
+                  <a:srgbClr val="2B1E3F"/>
+                </a:solidFill>
+                <a:latin typeface="Arial"/>
+                <a:cs typeface="Arial"/>
+              </a:rPr>
+              <a:t>לא חופפים</a:t>
+            </a:r>
+            <a:r>
+              <a:rPr lang="he-IL" sz="1600" b="0" i="0">
+                <a:solidFill>
+                  <a:srgbClr val="2B1E3F"/>
+                </a:solidFill>
+                <a:latin typeface="Arial"/>
+                <a:cs typeface="Arial"/>
+              </a:rPr>
+              <a:t> ← ראיה חזקה לשינוי אמיתי</a:t>
             </a:r>
           </a:p>
           <a:p>
@@ -10804,7 +11308,7 @@
                 <a:spcPts val="1200"/>
               </a:spcAft>
               <a:buClr>
-                <a:srgbClr val="7B5EA7"/>
+                <a:srgbClr val="17A398"/>
               </a:buClr>
               <a:buFont typeface="Arial"/>
               <a:buChar char="•"/>
@@ -10817,7 +11321,7 @@
                 <a:latin typeface="Arial"/>
                 <a:cs typeface="Arial"/>
               </a:rPr>
-              <a:t>הפוסטריור לא חלק: כמה ימים מתחרים על המקום</a:t>
+              <a:t>היחידות: סיבובים לדקה (rpm)</a:t>
             </a:r>
           </a:p>
         </p:txBody>
@@ -10890,14 +11394,34 @@
                 <a:latin typeface="Arial"/>
                 <a:cs typeface="Arial"/>
               </a:rPr>
-              <a:t>התמונה המלאה</a:t>
+              <a:t>הפוסטריור של </a:t>
+            </a:r>
+            <a:r>
+              <a:rPr lang="en-US" sz="3400" b="1" i="0">
+                <a:solidFill>
+                  <a:srgbClr val="2B1E3F"/>
+                </a:solidFill>
+                <a:latin typeface="Cambria Math"/>
+                <a:cs typeface="Cambria Math"/>
+              </a:rPr>
+              <a:t>τ</a:t>
+            </a:r>
+            <a:r>
+              <a:rPr lang="he-IL" sz="3400" b="1" i="0">
+                <a:solidFill>
+                  <a:srgbClr val="2B1E3F"/>
+                </a:solidFill>
+                <a:latin typeface="Arial"/>
+                <a:cs typeface="Arial"/>
+              </a:rPr>
+              <a:t>: מתי זה קרה?</a:t>
             </a:r>
           </a:p>
         </p:txBody>
       </p:sp>
       <p:pic>
         <p:nvPicPr>
-          <p:cNvPr id="3" name="Picture 2" descr="fit.png"/>
+          <p:cNvPr id="3" name="Picture 2" descr="post_tau.png"/>
           <p:cNvPicPr>
             <a:picLocks noChangeAspect="1"/>
           </p:cNvPicPr>
@@ -10912,7 +11436,7 @@
         <p:spPr>
           <a:xfrm>
             <a:off x="548640" y="1463040"/>
-            <a:ext cx="7498079" cy="4574789"/>
+            <a:ext cx="6949440" cy="4572000"/>
           </a:xfrm>
           <a:prstGeom prst="rect">
             <a:avLst/>
@@ -10921,14 +11445,100 @@
       </p:pic>
       <p:sp>
         <p:nvSpPr>
-          <p:cNvPr id="4" name="TextBox 3"/>
+          <p:cNvPr id="4" name="card"/>
+          <p:cNvSpPr/>
+          <p:nvPr/>
+        </p:nvSpPr>
+        <p:spPr>
+          <a:xfrm>
+            <a:off x="7818120" y="1463040"/>
+            <a:ext cx="3822191" cy="1737360"/>
+          </a:xfrm>
+          <a:prstGeom prst="roundRect">
+            <a:avLst>
+              <a:gd name="adj" fmla="val 8000"/>
+            </a:avLst>
+          </a:prstGeom>
+          <a:solidFill>
+            <a:srgbClr val="F3F0F7"/>
+          </a:solidFill>
+          <a:ln>
+            <a:noFill/>
+          </a:ln>
+          <a:effectLst/>
+        </p:spPr>
+        <p:style>
+          <a:lnRef idx="1">
+            <a:schemeClr val="accent1"/>
+          </a:lnRef>
+          <a:fillRef idx="3">
+            <a:schemeClr val="accent1"/>
+          </a:fillRef>
+          <a:effectRef idx="2">
+            <a:schemeClr val="accent1"/>
+          </a:effectRef>
+          <a:fontRef idx="minor">
+            <a:schemeClr val="lt1"/>
+          </a:fontRef>
+        </p:style>
+        <p:txBody>
+          <a:bodyPr rtlCol="0" anchor="ctr"/>
+          <a:lstStyle/>
+          <a:p>
+            <a:endParaRPr/>
+          </a:p>
+        </p:txBody>
+      </p:sp>
+      <p:sp>
+        <p:nvSpPr>
+          <p:cNvPr id="5" name="TextBox 4"/>
           <p:cNvSpPr txBox="1"/>
           <p:nvPr/>
         </p:nvSpPr>
         <p:spPr>
           <a:xfrm>
-            <a:off x="8321040" y="1554480"/>
-            <a:ext cx="3319272" cy="4663440"/>
+            <a:off x="7818120" y="1554480"/>
+            <a:ext cx="3822191" cy="822960"/>
+          </a:xfrm>
+          <a:prstGeom prst="rect">
+            <a:avLst/>
+          </a:prstGeom>
+          <a:noFill/>
+        </p:spPr>
+        <p:txBody>
+          <a:bodyPr wrap="square" lIns="45720" tIns="27432" rIns="45720" bIns="27432" anchor="ctr">
+            <a:spAutoFit/>
+          </a:bodyPr>
+          <a:lstStyle/>
+          <a:p>
+            <a:pPr algn="ctr" rtl="1">
+              <a:spcAft>
+                <a:spcPts val="600"/>
+              </a:spcAft>
+            </a:pPr>
+            <a:r>
+              <a:rPr lang="he-IL" sz="3000" b="1" i="0">
+                <a:solidFill>
+                  <a:srgbClr val="7B5EA7"/>
+                </a:solidFill>
+                <a:latin typeface="Arial"/>
+                <a:cs typeface="Arial"/>
+              </a:rPr>
+              <a:t>8 ביוני 2021</a:t>
+            </a:r>
+          </a:p>
+        </p:txBody>
+      </p:sp>
+      <p:sp>
+        <p:nvSpPr>
+          <p:cNvPr id="6" name="TextBox 5"/>
+          <p:cNvSpPr txBox="1"/>
+          <p:nvPr/>
+        </p:nvSpPr>
+        <p:spPr>
+          <a:xfrm>
+            <a:off x="7818120" y="2377440"/>
+            <a:ext cx="3822191" cy="731520"/>
           </a:xfrm>
           <a:prstGeom prst="rect">
             <a:avLst/>
@@ -10941,12 +11551,72 @@
           </a:bodyPr>
           <a:lstStyle/>
           <a:p>
+            <a:pPr algn="ctr" rtl="1">
+              <a:spcAft>
+                <a:spcPts val="600"/>
+              </a:spcAft>
+            </a:pPr>
+            <a:r>
+              <a:rPr lang="he-IL" sz="1300" b="0" i="0">
+                <a:solidFill>
+                  <a:srgbClr val="6B6478"/>
+                </a:solidFill>
+                <a:latin typeface="Arial"/>
+                <a:cs typeface="Arial"/>
+              </a:rPr>
+              <a:t>ממוצע הפוסטריור של </a:t>
+            </a:r>
+            <a:r>
+              <a:rPr lang="en-US" sz="1300" b="0" i="0">
+                <a:solidFill>
+                  <a:srgbClr val="6B6478"/>
+                </a:solidFill>
+                <a:latin typeface="Cambria Math"/>
+                <a:cs typeface="Cambria Math"/>
+              </a:rPr>
+              <a:t>τ</a:t>
+            </a:r>
+            <a:r>
+              <a:rPr lang="he-IL" sz="1300" b="0" i="0">
+                <a:solidFill>
+                  <a:srgbClr val="6B6478"/>
+                </a:solidFill>
+                <a:latin typeface="Arial"/>
+                <a:cs typeface="Arial"/>
+              </a:rPr>
+              <a:t> (יום 68 בעונה)</a:t>
+            </a:r>
+          </a:p>
+        </p:txBody>
+      </p:sp>
+      <p:sp>
+        <p:nvSpPr>
+          <p:cNvPr id="7" name="TextBox 6"/>
+          <p:cNvSpPr txBox="1"/>
+          <p:nvPr/>
+        </p:nvSpPr>
+        <p:spPr>
+          <a:xfrm>
+            <a:off x="7818120" y="3474720"/>
+            <a:ext cx="3822191" cy="2743200"/>
+          </a:xfrm>
+          <a:prstGeom prst="rect">
+            <a:avLst/>
+          </a:prstGeom>
+          <a:noFill/>
+        </p:spPr>
+        <p:txBody>
+          <a:bodyPr wrap="square" lIns="45720" tIns="27432" rIns="45720" bIns="27432" anchor="t">
+            <a:spAutoFit/>
+          </a:bodyPr>
+          <a:lstStyle/>
+          <a:p>
             <a:pPr marR="274320" indent="-274320" algn="r" rtl="1">
               <a:spcAft>
-                <a:spcPts val="1400"/>
+                <a:spcPts val="1200"/>
               </a:spcAft>
               <a:buClr>
-                <a:srgbClr val="17A398"/>
+                <a:srgbClr val="7B5EA7"/>
               </a:buClr>
               <a:buFont typeface="Arial"/>
               <a:buChar char="•"/>
@@ -10959,16 +11629,16 @@
                 <a:latin typeface="Arial"/>
                 <a:cs typeface="Arial"/>
               </a:rPr>
-              <a:t>נקודות: ממוצע קצב הסיבוב בכל יום משחק</a:t>
+              <a:t>מרווח HDI של 94%: בין יום 65 ליום 72 — חלון של כשבוע</a:t>
             </a:r>
           </a:p>
           <a:p>
             <a:pPr marR="274320" indent="-274320" algn="r" rtl="1">
               <a:spcAft>
-                <a:spcPts val="1400"/>
+                <a:spcPts val="1200"/>
               </a:spcAft>
               <a:buClr>
-                <a:srgbClr val="17A398"/>
+                <a:srgbClr val="7B5EA7"/>
               </a:buClr>
               <a:buFont typeface="Arial"/>
               <a:buChar char="•"/>
@@ -10981,16 +11651,16 @@
                 <a:latin typeface="Arial"/>
                 <a:cs typeface="Arial"/>
               </a:rPr>
-              <a:t>קו: הקצב הצפוי לפי הפוסטריור, ממוצע על כל הדגימות</a:t>
+              <a:t>תואם את מועד השינוי בכללים — וקרוב לשמועה על האכיפה (3 ביוני)</a:t>
             </a:r>
           </a:p>
           <a:p>
             <a:pPr marR="274320" indent="-274320" algn="r" rtl="1">
               <a:spcAft>
-                <a:spcPts val="1400"/>
+                <a:spcPts val="1200"/>
               </a:spcAft>
               <a:buClr>
-                <a:srgbClr val="17A398"/>
+                <a:srgbClr val="7B5EA7"/>
               </a:buClr>
               <a:buFont typeface="Arial"/>
               <a:buChar char="•"/>
@@ -11003,34 +11673,7 @@
                 <a:latin typeface="Arial"/>
                 <a:cs typeface="Arial"/>
               </a:rPr>
-              <a:t>רצועה: מרווח ה-HDI של </a:t>
-            </a:r>
-            <a:r>
-              <a:rPr lang="en-US" sz="1600" b="0" i="0">
-                <a:solidFill>
-                  <a:srgbClr val="2B1E3F"/>
-                </a:solidFill>
-                <a:latin typeface="Cambria Math"/>
-                <a:cs typeface="Cambria Math"/>
-              </a:rPr>
-              <a:t>τ</a:t>
-            </a:r>
-          </a:p>
-          <a:p>
-            <a:pPr algn="r" rtl="1">
-              <a:spcAft>
-                <a:spcPts val="1400"/>
-              </a:spcAft>
-            </a:pPr>
-            <a:r>
-              <a:rPr lang="he-IL" sz="1600" b="1" i="0">
-                <a:solidFill>
-                  <a:srgbClr val="7B5EA7"/>
-                </a:solidFill>
-                <a:latin typeface="Arial"/>
-                <a:cs typeface="Arial"/>
-              </a:rPr>
-              <a:t>הרעש היומי גדול — ובדיוק בשביל זה צריך מודל הסתברותי</a:t>
+              <a:t>הפוסטריור לא חלק: כמה ימים מתחרים על המקום</a:t>
             </a:r>
           </a:p>
         </p:txBody>
@@ -11103,55 +11746,35 @@
                 <a:latin typeface="Arial"/>
                 <a:cs typeface="Arial"/>
               </a:rPr>
-              <a:t>מה השתנה לעומת השיעור הקודם?</a:t>
-            </a:r>
-          </a:p>
-        </p:txBody>
-      </p:sp>
-      <p:sp>
-        <p:nvSpPr>
-          <p:cNvPr id="3" name="Rectangle 2"/>
-          <p:cNvSpPr/>
-          <p:nvPr/>
-        </p:nvSpPr>
-        <p:spPr>
-          <a:xfrm>
-            <a:off x="8625535" y="1463040"/>
-            <a:ext cx="3017520" cy="786384"/>
+              <a:t>התמונה המלאה</a:t>
+            </a:r>
+          </a:p>
+        </p:txBody>
+      </p:sp>
+      <p:pic>
+        <p:nvPicPr>
+          <p:cNvPr id="3" name="Picture 2" descr="fit.png"/>
+          <p:cNvPicPr>
+            <a:picLocks noChangeAspect="1"/>
+          </p:cNvPicPr>
+          <p:nvPr/>
+        </p:nvPicPr>
+        <p:blipFill>
+          <a:blip r:embed="rId3"/>
+          <a:stretch>
+            <a:fillRect/>
+          </a:stretch>
+        </p:blipFill>
+        <p:spPr>
+          <a:xfrm>
+            <a:off x="548640" y="1463040"/>
+            <a:ext cx="7498079" cy="4574789"/>
           </a:xfrm>
           <a:prstGeom prst="rect">
             <a:avLst/>
           </a:prstGeom>
-          <a:solidFill>
-            <a:srgbClr val="2B1E3F"/>
-          </a:solidFill>
-          <a:ln>
-            <a:noFill/>
-          </a:ln>
-          <a:effectLst/>
-        </p:spPr>
-        <p:style>
-          <a:lnRef idx="1">
-            <a:schemeClr val="accent1"/>
-          </a:lnRef>
-          <a:fillRef idx="3">
-            <a:schemeClr val="accent1"/>
-          </a:fillRef>
-          <a:effectRef idx="2">
-            <a:schemeClr val="accent1"/>
-          </a:effectRef>
-          <a:fontRef idx="minor">
-            <a:schemeClr val="lt1"/>
-          </a:fontRef>
-        </p:style>
-        <p:txBody>
-          <a:bodyPr rtlCol="0" anchor="ctr"/>
-          <a:lstStyle/>
-          <a:p>
-            <a:endParaRPr/>
-          </a:p>
-        </p:txBody>
-      </p:sp>
+        </p:spPr>
+      </p:pic>
       <p:sp>
         <p:nvSpPr>
           <p:cNvPr id="4" name="TextBox 3"/>
@@ -11160,8 +11783,8 @@
         </p:nvSpPr>
         <p:spPr>
           <a:xfrm>
-            <a:off x="8808415" y="1463040"/>
-            <a:ext cx="2651760" cy="786384"/>
+            <a:off x="8321040" y="1554480"/>
+            <a:ext cx="3319272" cy="4663440"/>
           </a:xfrm>
           <a:prstGeom prst="rect">
             <a:avLst/>
@@ -11169,1454 +11792,101 @@
           <a:noFill/>
         </p:spPr>
         <p:txBody>
-          <a:bodyPr wrap="square" lIns="45720" tIns="27432" rIns="45720" bIns="27432" anchor="ctr">
+          <a:bodyPr wrap="square" lIns="45720" tIns="27432" rIns="45720" bIns="27432" anchor="t">
             <a:spAutoFit/>
           </a:bodyPr>
           <a:lstStyle/>
           <a:p>
+            <a:pPr marR="274320" indent="-274320" algn="r" rtl="1">
+              <a:spcAft>
+                <a:spcPts val="1400"/>
+              </a:spcAft>
+              <a:buClr>
+                <a:srgbClr val="17A398"/>
+              </a:buClr>
+              <a:buFont typeface="Arial"/>
+              <a:buChar char="•"/>
+            </a:pPr>
+            <a:r>
+              <a:rPr lang="he-IL" sz="1600" b="0" i="0">
+                <a:solidFill>
+                  <a:srgbClr val="2B1E3F"/>
+                </a:solidFill>
+                <a:latin typeface="Arial"/>
+                <a:cs typeface="Arial"/>
+              </a:rPr>
+              <a:t>נקודות: ממוצע קצב הסיבוב בכל יום משחק</a:t>
+            </a:r>
+          </a:p>
+          <a:p>
+            <a:pPr marR="274320" indent="-274320" algn="r" rtl="1">
+              <a:spcAft>
+                <a:spcPts val="1400"/>
+              </a:spcAft>
+              <a:buClr>
+                <a:srgbClr val="17A398"/>
+              </a:buClr>
+              <a:buFont typeface="Arial"/>
+              <a:buChar char="•"/>
+            </a:pPr>
+            <a:r>
+              <a:rPr lang="he-IL" sz="1600" b="0" i="0">
+                <a:solidFill>
+                  <a:srgbClr val="2B1E3F"/>
+                </a:solidFill>
+                <a:latin typeface="Arial"/>
+                <a:cs typeface="Arial"/>
+              </a:rPr>
+              <a:t>קו: הקצב הצפוי לפי הפוסטריור, ממוצע על כל הדגימות</a:t>
+            </a:r>
+          </a:p>
+          <a:p>
+            <a:pPr marR="274320" indent="-274320" algn="r" rtl="1">
+              <a:spcAft>
+                <a:spcPts val="1400"/>
+              </a:spcAft>
+              <a:buClr>
+                <a:srgbClr val="17A398"/>
+              </a:buClr>
+              <a:buFont typeface="Arial"/>
+              <a:buChar char="•"/>
+            </a:pPr>
+            <a:r>
+              <a:rPr lang="he-IL" sz="1600" b="0" i="0">
+                <a:solidFill>
+                  <a:srgbClr val="2B1E3F"/>
+                </a:solidFill>
+                <a:latin typeface="Arial"/>
+                <a:cs typeface="Arial"/>
+              </a:rPr>
+              <a:t>רצועה: מרווח ה-HDI של </a:t>
+            </a:r>
+            <a:r>
+              <a:rPr lang="en-US" sz="1600" b="0" i="0">
+                <a:solidFill>
+                  <a:srgbClr val="2B1E3F"/>
+                </a:solidFill>
+                <a:latin typeface="Cambria Math"/>
+                <a:cs typeface="Cambria Math"/>
+              </a:rPr>
+              <a:t>τ</a:t>
+            </a:r>
+          </a:p>
+          <a:p>
             <a:pPr algn="r" rtl="1">
               <a:spcAft>
-                <a:spcPts val="600"/>
+                <a:spcPts val="1400"/>
               </a:spcAft>
             </a:pPr>
-            <a:endParaRPr/>
-          </a:p>
-        </p:txBody>
-      </p:sp>
-      <p:sp>
-        <p:nvSpPr>
-          <p:cNvPr id="5" name="Rectangle 4"/>
-          <p:cNvSpPr/>
-          <p:nvPr/>
-        </p:nvSpPr>
-        <p:spPr>
-          <a:xfrm>
-            <a:off x="4602175" y="1463040"/>
-            <a:ext cx="4023360" cy="786384"/>
-          </a:xfrm>
-          <a:prstGeom prst="rect">
-            <a:avLst/>
-          </a:prstGeom>
-          <a:solidFill>
-            <a:srgbClr val="2B1E3F"/>
-          </a:solidFill>
-          <a:ln>
-            <a:noFill/>
-          </a:ln>
-          <a:effectLst/>
-        </p:spPr>
-        <p:style>
-          <a:lnRef idx="1">
-            <a:schemeClr val="accent1"/>
-          </a:lnRef>
-          <a:fillRef idx="3">
-            <a:schemeClr val="accent1"/>
-          </a:fillRef>
-          <a:effectRef idx="2">
-            <a:schemeClr val="accent1"/>
-          </a:effectRef>
-          <a:fontRef idx="minor">
-            <a:schemeClr val="lt1"/>
-          </a:fontRef>
-        </p:style>
-        <p:txBody>
-          <a:bodyPr rtlCol="0" anchor="ctr"/>
-          <a:lstStyle/>
-          <a:p>
-            <a:endParaRPr/>
-          </a:p>
-        </p:txBody>
-      </p:sp>
-      <p:sp>
-        <p:nvSpPr>
-          <p:cNvPr id="6" name="TextBox 5"/>
-          <p:cNvSpPr txBox="1"/>
-          <p:nvPr/>
-        </p:nvSpPr>
-        <p:spPr>
-          <a:xfrm>
-            <a:off x="4785055" y="1463040"/>
-            <a:ext cx="3657600" cy="786384"/>
-          </a:xfrm>
-          <a:prstGeom prst="rect">
-            <a:avLst/>
-          </a:prstGeom>
-          <a:noFill/>
-        </p:spPr>
-        <p:txBody>
-          <a:bodyPr wrap="square" lIns="45720" tIns="27432" rIns="45720" bIns="27432" anchor="ctr">
-            <a:spAutoFit/>
-          </a:bodyPr>
-          <a:lstStyle/>
-          <a:p>
-            <a:pPr algn="r" rtl="1">
-              <a:spcAft>
-                <a:spcPts val="600"/>
-              </a:spcAft>
-            </a:pPr>
             <a:r>
               <a:rPr lang="he-IL" sz="1600" b="1" i="0">
                 <a:solidFill>
-                  <a:srgbClr val="FFFFFF"/>
-                </a:solidFill>
-                <a:latin typeface="Arial"/>
-                <a:cs typeface="Arial"/>
-              </a:rPr>
-              <a:t>הודעות טקסט (שיעור 2)</a:t>
-            </a:r>
-          </a:p>
-        </p:txBody>
-      </p:sp>
-      <p:sp>
-        <p:nvSpPr>
-          <p:cNvPr id="7" name="Rectangle 6"/>
-          <p:cNvSpPr/>
-          <p:nvPr/>
-        </p:nvSpPr>
-        <p:spPr>
-          <a:xfrm>
-            <a:off x="551383" y="1463040"/>
-            <a:ext cx="4050791" cy="786384"/>
-          </a:xfrm>
-          <a:prstGeom prst="rect">
-            <a:avLst/>
-          </a:prstGeom>
-          <a:solidFill>
-            <a:srgbClr val="2B1E3F"/>
-          </a:solidFill>
-          <a:ln>
-            <a:noFill/>
-          </a:ln>
-          <a:effectLst/>
-        </p:spPr>
-        <p:style>
-          <a:lnRef idx="1">
-            <a:schemeClr val="accent1"/>
-          </a:lnRef>
-          <a:fillRef idx="3">
-            <a:schemeClr val="accent1"/>
-          </a:fillRef>
-          <a:effectRef idx="2">
-            <a:schemeClr val="accent1"/>
-          </a:effectRef>
-          <a:fontRef idx="minor">
-            <a:schemeClr val="lt1"/>
-          </a:fontRef>
-        </p:style>
-        <p:txBody>
-          <a:bodyPr rtlCol="0" anchor="ctr"/>
-          <a:lstStyle/>
-          <a:p>
-            <a:endParaRPr/>
-          </a:p>
-        </p:txBody>
-      </p:sp>
-      <p:sp>
-        <p:nvSpPr>
-          <p:cNvPr id="8" name="TextBox 7"/>
-          <p:cNvSpPr txBox="1"/>
-          <p:nvPr/>
-        </p:nvSpPr>
-        <p:spPr>
-          <a:xfrm>
-            <a:off x="734263" y="1463040"/>
-            <a:ext cx="3685031" cy="786384"/>
-          </a:xfrm>
-          <a:prstGeom prst="rect">
-            <a:avLst/>
-          </a:prstGeom>
-          <a:noFill/>
-        </p:spPr>
-        <p:txBody>
-          <a:bodyPr wrap="square" lIns="45720" tIns="27432" rIns="45720" bIns="27432" anchor="ctr">
-            <a:spAutoFit/>
-          </a:bodyPr>
-          <a:lstStyle/>
-          <a:p>
-            <a:pPr algn="r" rtl="1">
-              <a:spcAft>
-                <a:spcPts val="600"/>
-              </a:spcAft>
-            </a:pPr>
-            <a:r>
-              <a:rPr lang="he-IL" sz="1600" b="1" i="0">
-                <a:solidFill>
-                  <a:srgbClr val="FFFFFF"/>
-                </a:solidFill>
-                <a:latin typeface="Arial"/>
-                <a:cs typeface="Arial"/>
-              </a:rPr>
-              <a:t>קצב סיבוב (שיעור 3)</a:t>
-            </a:r>
-          </a:p>
-        </p:txBody>
-      </p:sp>
-      <p:sp>
-        <p:nvSpPr>
-          <p:cNvPr id="9" name="Rectangle 8"/>
-          <p:cNvSpPr/>
-          <p:nvPr/>
-        </p:nvSpPr>
-        <p:spPr>
-          <a:xfrm>
-            <a:off x="8625535" y="2249424"/>
-            <a:ext cx="3017520" cy="786384"/>
-          </a:xfrm>
-          <a:prstGeom prst="rect">
-            <a:avLst/>
-          </a:prstGeom>
-          <a:solidFill>
-            <a:srgbClr val="F3F0F7"/>
-          </a:solidFill>
-          <a:ln>
-            <a:noFill/>
-          </a:ln>
-          <a:effectLst/>
-        </p:spPr>
-        <p:style>
-          <a:lnRef idx="1">
-            <a:schemeClr val="accent1"/>
-          </a:lnRef>
-          <a:fillRef idx="3">
-            <a:schemeClr val="accent1"/>
-          </a:fillRef>
-          <a:effectRef idx="2">
-            <a:schemeClr val="accent1"/>
-          </a:effectRef>
-          <a:fontRef idx="minor">
-            <a:schemeClr val="lt1"/>
-          </a:fontRef>
-        </p:style>
-        <p:txBody>
-          <a:bodyPr rtlCol="0" anchor="ctr"/>
-          <a:lstStyle/>
-          <a:p>
-            <a:endParaRPr/>
-          </a:p>
-        </p:txBody>
-      </p:sp>
-      <p:sp>
-        <p:nvSpPr>
-          <p:cNvPr id="10" name="TextBox 9"/>
-          <p:cNvSpPr txBox="1"/>
-          <p:nvPr/>
-        </p:nvSpPr>
-        <p:spPr>
-          <a:xfrm>
-            <a:off x="8808415" y="2249424"/>
-            <a:ext cx="2651760" cy="786384"/>
-          </a:xfrm>
-          <a:prstGeom prst="rect">
-            <a:avLst/>
-          </a:prstGeom>
-          <a:noFill/>
-        </p:spPr>
-        <p:txBody>
-          <a:bodyPr wrap="square" lIns="45720" tIns="27432" rIns="45720" bIns="27432" anchor="ctr">
-            <a:spAutoFit/>
-          </a:bodyPr>
-          <a:lstStyle/>
-          <a:p>
-            <a:pPr algn="r" rtl="1">
-              <a:spcAft>
-                <a:spcPts val="600"/>
-              </a:spcAft>
-            </a:pPr>
-            <a:r>
-              <a:rPr lang="he-IL" sz="1600" b="1" i="0">
-                <a:solidFill>
-                  <a:srgbClr val="2B1E3F"/>
-                </a:solidFill>
-                <a:latin typeface="Arial"/>
-                <a:cs typeface="Arial"/>
-              </a:rPr>
-              <a:t>נתונים</a:t>
-            </a:r>
-          </a:p>
-        </p:txBody>
-      </p:sp>
-      <p:sp>
-        <p:nvSpPr>
-          <p:cNvPr id="11" name="Rectangle 10"/>
-          <p:cNvSpPr/>
-          <p:nvPr/>
-        </p:nvSpPr>
-        <p:spPr>
-          <a:xfrm>
-            <a:off x="4602175" y="2249424"/>
-            <a:ext cx="4023360" cy="786384"/>
-          </a:xfrm>
-          <a:prstGeom prst="rect">
-            <a:avLst/>
-          </a:prstGeom>
-          <a:solidFill>
-            <a:srgbClr val="F3F0F7"/>
-          </a:solidFill>
-          <a:ln>
-            <a:noFill/>
-          </a:ln>
-          <a:effectLst/>
-        </p:spPr>
-        <p:style>
-          <a:lnRef idx="1">
-            <a:schemeClr val="accent1"/>
-          </a:lnRef>
-          <a:fillRef idx="3">
-            <a:schemeClr val="accent1"/>
-          </a:fillRef>
-          <a:effectRef idx="2">
-            <a:schemeClr val="accent1"/>
-          </a:effectRef>
-          <a:fontRef idx="minor">
-            <a:schemeClr val="lt1"/>
-          </a:fontRef>
-        </p:style>
-        <p:txBody>
-          <a:bodyPr rtlCol="0" anchor="ctr"/>
-          <a:lstStyle/>
-          <a:p>
-            <a:endParaRPr/>
-          </a:p>
-        </p:txBody>
-      </p:sp>
-      <p:sp>
-        <p:nvSpPr>
-          <p:cNvPr id="12" name="TextBox 11"/>
-          <p:cNvSpPr txBox="1"/>
-          <p:nvPr/>
-        </p:nvSpPr>
-        <p:spPr>
-          <a:xfrm>
-            <a:off x="4785055" y="2249424"/>
-            <a:ext cx="3657600" cy="786384"/>
-          </a:xfrm>
-          <a:prstGeom prst="rect">
-            <a:avLst/>
-          </a:prstGeom>
-          <a:noFill/>
-        </p:spPr>
-        <p:txBody>
-          <a:bodyPr wrap="square" lIns="45720" tIns="27432" rIns="45720" bIns="27432" anchor="ctr">
-            <a:spAutoFit/>
-          </a:bodyPr>
-          <a:lstStyle/>
-          <a:p>
-            <a:pPr algn="r" rtl="1">
-              <a:spcAft>
-                <a:spcPts val="600"/>
-              </a:spcAft>
-            </a:pPr>
-            <a:r>
-              <a:rPr lang="he-IL" sz="1600" b="0" i="0">
-                <a:solidFill>
                   <a:srgbClr val="7B5EA7"/>
                 </a:solidFill>
                 <a:latin typeface="Arial"/>
                 <a:cs typeface="Arial"/>
               </a:rPr>
-              <a:t>ספירות יומיות</a:t>
-            </a:r>
-          </a:p>
-        </p:txBody>
-      </p:sp>
-      <p:sp>
-        <p:nvSpPr>
-          <p:cNvPr id="13" name="Rectangle 12"/>
-          <p:cNvSpPr/>
-          <p:nvPr/>
-        </p:nvSpPr>
-        <p:spPr>
-          <a:xfrm>
-            <a:off x="551383" y="2249424"/>
-            <a:ext cx="4050791" cy="786384"/>
-          </a:xfrm>
-          <a:prstGeom prst="rect">
-            <a:avLst/>
-          </a:prstGeom>
-          <a:solidFill>
-            <a:srgbClr val="F3F0F7"/>
-          </a:solidFill>
-          <a:ln>
-            <a:noFill/>
-          </a:ln>
-          <a:effectLst/>
-        </p:spPr>
-        <p:style>
-          <a:lnRef idx="1">
-            <a:schemeClr val="accent1"/>
-          </a:lnRef>
-          <a:fillRef idx="3">
-            <a:schemeClr val="accent1"/>
-          </a:fillRef>
-          <a:effectRef idx="2">
-            <a:schemeClr val="accent1"/>
-          </a:effectRef>
-          <a:fontRef idx="minor">
-            <a:schemeClr val="lt1"/>
-          </a:fontRef>
-        </p:style>
-        <p:txBody>
-          <a:bodyPr rtlCol="0" anchor="ctr"/>
-          <a:lstStyle/>
-          <a:p>
-            <a:endParaRPr/>
-          </a:p>
-        </p:txBody>
-      </p:sp>
-      <p:sp>
-        <p:nvSpPr>
-          <p:cNvPr id="14" name="TextBox 13"/>
-          <p:cNvSpPr txBox="1"/>
-          <p:nvPr/>
-        </p:nvSpPr>
-        <p:spPr>
-          <a:xfrm>
-            <a:off x="734263" y="2249424"/>
-            <a:ext cx="3685031" cy="786384"/>
-          </a:xfrm>
-          <a:prstGeom prst="rect">
-            <a:avLst/>
-          </a:prstGeom>
-          <a:noFill/>
-        </p:spPr>
-        <p:txBody>
-          <a:bodyPr wrap="square" lIns="45720" tIns="27432" rIns="45720" bIns="27432" anchor="ctr">
-            <a:spAutoFit/>
-          </a:bodyPr>
-          <a:lstStyle/>
-          <a:p>
-            <a:pPr algn="r" rtl="1">
-              <a:spcAft>
-                <a:spcPts val="600"/>
-              </a:spcAft>
-            </a:pPr>
-            <a:r>
-              <a:rPr lang="he-IL" sz="1600" b="0" i="0">
-                <a:solidFill>
-                  <a:srgbClr val="E4572E"/>
-                </a:solidFill>
-                <a:latin typeface="Arial"/>
-                <a:cs typeface="Arial"/>
-              </a:rPr>
-              <a:t>מדידות רציפות (rpm)</a:t>
-            </a:r>
-          </a:p>
-        </p:txBody>
-      </p:sp>
-      <p:sp>
-        <p:nvSpPr>
-          <p:cNvPr id="15" name="Rectangle 14"/>
-          <p:cNvSpPr/>
-          <p:nvPr/>
-        </p:nvSpPr>
-        <p:spPr>
-          <a:xfrm>
-            <a:off x="8625535" y="3035808"/>
-            <a:ext cx="3017520" cy="786384"/>
-          </a:xfrm>
-          <a:prstGeom prst="rect">
-            <a:avLst/>
-          </a:prstGeom>
-          <a:solidFill>
-            <a:srgbClr val="FFFFFF"/>
-          </a:solidFill>
-          <a:ln>
-            <a:noFill/>
-          </a:ln>
-          <a:effectLst/>
-        </p:spPr>
-        <p:style>
-          <a:lnRef idx="1">
-            <a:schemeClr val="accent1"/>
-          </a:lnRef>
-          <a:fillRef idx="3">
-            <a:schemeClr val="accent1"/>
-          </a:fillRef>
-          <a:effectRef idx="2">
-            <a:schemeClr val="accent1"/>
-          </a:effectRef>
-          <a:fontRef idx="minor">
-            <a:schemeClr val="lt1"/>
-          </a:fontRef>
-        </p:style>
-        <p:txBody>
-          <a:bodyPr rtlCol="0" anchor="ctr"/>
-          <a:lstStyle/>
-          <a:p>
-            <a:endParaRPr/>
-          </a:p>
-        </p:txBody>
-      </p:sp>
-      <p:sp>
-        <p:nvSpPr>
-          <p:cNvPr id="16" name="TextBox 15"/>
-          <p:cNvSpPr txBox="1"/>
-          <p:nvPr/>
-        </p:nvSpPr>
-        <p:spPr>
-          <a:xfrm>
-            <a:off x="8808415" y="3035808"/>
-            <a:ext cx="2651760" cy="786384"/>
-          </a:xfrm>
-          <a:prstGeom prst="rect">
-            <a:avLst/>
-          </a:prstGeom>
-          <a:noFill/>
-        </p:spPr>
-        <p:txBody>
-          <a:bodyPr wrap="square" lIns="45720" tIns="27432" rIns="45720" bIns="27432" anchor="ctr">
-            <a:spAutoFit/>
-          </a:bodyPr>
-          <a:lstStyle/>
-          <a:p>
-            <a:pPr algn="r" rtl="1">
-              <a:spcAft>
-                <a:spcPts val="600"/>
-              </a:spcAft>
-            </a:pPr>
-            <a:r>
-              <a:rPr lang="he-IL" sz="1600" b="1" i="0">
-                <a:solidFill>
-                  <a:srgbClr val="2B1E3F"/>
-                </a:solidFill>
-                <a:latin typeface="Arial"/>
-                <a:cs typeface="Arial"/>
-              </a:rPr>
-              <a:t>נראות</a:t>
-            </a:r>
-          </a:p>
-        </p:txBody>
-      </p:sp>
-      <p:sp>
-        <p:nvSpPr>
-          <p:cNvPr id="17" name="Rectangle 16"/>
-          <p:cNvSpPr/>
-          <p:nvPr/>
-        </p:nvSpPr>
-        <p:spPr>
-          <a:xfrm>
-            <a:off x="4602175" y="3035808"/>
-            <a:ext cx="4023360" cy="786384"/>
-          </a:xfrm>
-          <a:prstGeom prst="rect">
-            <a:avLst/>
-          </a:prstGeom>
-          <a:solidFill>
-            <a:srgbClr val="FFFFFF"/>
-          </a:solidFill>
-          <a:ln>
-            <a:noFill/>
-          </a:ln>
-          <a:effectLst/>
-        </p:spPr>
-        <p:style>
-          <a:lnRef idx="1">
-            <a:schemeClr val="accent1"/>
-          </a:lnRef>
-          <a:fillRef idx="3">
-            <a:schemeClr val="accent1"/>
-          </a:fillRef>
-          <a:effectRef idx="2">
-            <a:schemeClr val="accent1"/>
-          </a:effectRef>
-          <a:fontRef idx="minor">
-            <a:schemeClr val="lt1"/>
-          </a:fontRef>
-        </p:style>
-        <p:txBody>
-          <a:bodyPr rtlCol="0" anchor="ctr"/>
-          <a:lstStyle/>
-          <a:p>
-            <a:endParaRPr/>
-          </a:p>
-        </p:txBody>
-      </p:sp>
-      <p:sp>
-        <p:nvSpPr>
-          <p:cNvPr id="18" name="TextBox 17"/>
-          <p:cNvSpPr txBox="1"/>
-          <p:nvPr/>
-        </p:nvSpPr>
-        <p:spPr>
-          <a:xfrm>
-            <a:off x="4785055" y="3035808"/>
-            <a:ext cx="3657600" cy="786384"/>
-          </a:xfrm>
-          <a:prstGeom prst="rect">
-            <a:avLst/>
-          </a:prstGeom>
-          <a:noFill/>
-        </p:spPr>
-        <p:txBody>
-          <a:bodyPr wrap="square" lIns="45720" tIns="27432" rIns="45720" bIns="27432" anchor="ctr">
-            <a:spAutoFit/>
-          </a:bodyPr>
-          <a:lstStyle/>
-          <a:p>
-            <a:pPr algn="r" rtl="0">
-              <a:spcAft>
-                <a:spcPts val="600"/>
-              </a:spcAft>
-            </a:pPr>
-            <a:r>
-              <a:rPr lang="en-US" sz="1600" b="0" i="0">
-                <a:solidFill>
-                  <a:srgbClr val="7B5EA7"/>
-                </a:solidFill>
-                <a:latin typeface="Arial"/>
-                <a:cs typeface="Arial"/>
-              </a:rPr>
-              <a:t>Poisson(λ)</a:t>
-            </a:r>
-          </a:p>
-        </p:txBody>
-      </p:sp>
-      <p:sp>
-        <p:nvSpPr>
-          <p:cNvPr id="19" name="Rectangle 18"/>
-          <p:cNvSpPr/>
-          <p:nvPr/>
-        </p:nvSpPr>
-        <p:spPr>
-          <a:xfrm>
-            <a:off x="551383" y="3035808"/>
-            <a:ext cx="4050791" cy="786384"/>
-          </a:xfrm>
-          <a:prstGeom prst="rect">
-            <a:avLst/>
-          </a:prstGeom>
-          <a:solidFill>
-            <a:srgbClr val="FFFFFF"/>
-          </a:solidFill>
-          <a:ln>
-            <a:noFill/>
-          </a:ln>
-          <a:effectLst/>
-        </p:spPr>
-        <p:style>
-          <a:lnRef idx="1">
-            <a:schemeClr val="accent1"/>
-          </a:lnRef>
-          <a:fillRef idx="3">
-            <a:schemeClr val="accent1"/>
-          </a:fillRef>
-          <a:effectRef idx="2">
-            <a:schemeClr val="accent1"/>
-          </a:effectRef>
-          <a:fontRef idx="minor">
-            <a:schemeClr val="lt1"/>
-          </a:fontRef>
-        </p:style>
-        <p:txBody>
-          <a:bodyPr rtlCol="0" anchor="ctr"/>
-          <a:lstStyle/>
-          <a:p>
-            <a:endParaRPr/>
-          </a:p>
-        </p:txBody>
-      </p:sp>
-      <p:sp>
-        <p:nvSpPr>
-          <p:cNvPr id="20" name="TextBox 19"/>
-          <p:cNvSpPr txBox="1"/>
-          <p:nvPr/>
-        </p:nvSpPr>
-        <p:spPr>
-          <a:xfrm>
-            <a:off x="734263" y="3035808"/>
-            <a:ext cx="3685031" cy="786384"/>
-          </a:xfrm>
-          <a:prstGeom prst="rect">
-            <a:avLst/>
-          </a:prstGeom>
-          <a:noFill/>
-        </p:spPr>
-        <p:txBody>
-          <a:bodyPr wrap="square" lIns="45720" tIns="27432" rIns="45720" bIns="27432" anchor="ctr">
-            <a:spAutoFit/>
-          </a:bodyPr>
-          <a:lstStyle/>
-          <a:p>
-            <a:pPr algn="r" rtl="0">
-              <a:spcAft>
-                <a:spcPts val="600"/>
-              </a:spcAft>
-            </a:pPr>
-            <a:r>
-              <a:rPr lang="en-US" sz="1600" b="0" i="0">
-                <a:solidFill>
-                  <a:srgbClr val="E4572E"/>
-                </a:solidFill>
-                <a:latin typeface="Arial"/>
-                <a:cs typeface="Arial"/>
-              </a:rPr>
-              <a:t>Normal(μ, σ)</a:t>
-            </a:r>
-          </a:p>
-        </p:txBody>
-      </p:sp>
-      <p:sp>
-        <p:nvSpPr>
-          <p:cNvPr id="21" name="Rectangle 20"/>
-          <p:cNvSpPr/>
-          <p:nvPr/>
-        </p:nvSpPr>
-        <p:spPr>
-          <a:xfrm>
-            <a:off x="8625535" y="3822191"/>
-            <a:ext cx="3017520" cy="786384"/>
-          </a:xfrm>
-          <a:prstGeom prst="rect">
-            <a:avLst/>
-          </a:prstGeom>
-          <a:solidFill>
-            <a:srgbClr val="F3F0F7"/>
-          </a:solidFill>
-          <a:ln>
-            <a:noFill/>
-          </a:ln>
-          <a:effectLst/>
-        </p:spPr>
-        <p:style>
-          <a:lnRef idx="1">
-            <a:schemeClr val="accent1"/>
-          </a:lnRef>
-          <a:fillRef idx="3">
-            <a:schemeClr val="accent1"/>
-          </a:fillRef>
-          <a:effectRef idx="2">
-            <a:schemeClr val="accent1"/>
-          </a:effectRef>
-          <a:fontRef idx="minor">
-            <a:schemeClr val="lt1"/>
-          </a:fontRef>
-        </p:style>
-        <p:txBody>
-          <a:bodyPr rtlCol="0" anchor="ctr"/>
-          <a:lstStyle/>
-          <a:p>
-            <a:endParaRPr/>
-          </a:p>
-        </p:txBody>
-      </p:sp>
-      <p:sp>
-        <p:nvSpPr>
-          <p:cNvPr id="22" name="TextBox 21"/>
-          <p:cNvSpPr txBox="1"/>
-          <p:nvPr/>
-        </p:nvSpPr>
-        <p:spPr>
-          <a:xfrm>
-            <a:off x="8808415" y="3822191"/>
-            <a:ext cx="2651760" cy="786384"/>
-          </a:xfrm>
-          <a:prstGeom prst="rect">
-            <a:avLst/>
-          </a:prstGeom>
-          <a:noFill/>
-        </p:spPr>
-        <p:txBody>
-          <a:bodyPr wrap="square" lIns="45720" tIns="27432" rIns="45720" bIns="27432" anchor="ctr">
-            <a:spAutoFit/>
-          </a:bodyPr>
-          <a:lstStyle/>
-          <a:p>
-            <a:pPr algn="r" rtl="1">
-              <a:spcAft>
-                <a:spcPts val="600"/>
-              </a:spcAft>
-            </a:pPr>
-            <a:r>
-              <a:rPr lang="he-IL" sz="1600" b="1" i="0">
-                <a:solidFill>
-                  <a:srgbClr val="2B1E3F"/>
-                </a:solidFill>
-                <a:latin typeface="Arial"/>
-                <a:cs typeface="Arial"/>
-              </a:rPr>
-              <a:t>נקודת השינוי </a:t>
-            </a:r>
-            <a:r>
-              <a:rPr lang="en-US" sz="1600" b="1" i="0">
-                <a:solidFill>
-                  <a:srgbClr val="2B1E3F"/>
-                </a:solidFill>
-                <a:latin typeface="Cambria Math"/>
-                <a:cs typeface="Cambria Math"/>
-              </a:rPr>
-              <a:t>τ</a:t>
-            </a:r>
-          </a:p>
-        </p:txBody>
-      </p:sp>
-      <p:sp>
-        <p:nvSpPr>
-          <p:cNvPr id="23" name="Rectangle 22"/>
-          <p:cNvSpPr/>
-          <p:nvPr/>
-        </p:nvSpPr>
-        <p:spPr>
-          <a:xfrm>
-            <a:off x="4602175" y="3822191"/>
-            <a:ext cx="4023360" cy="786384"/>
-          </a:xfrm>
-          <a:prstGeom prst="rect">
-            <a:avLst/>
-          </a:prstGeom>
-          <a:solidFill>
-            <a:srgbClr val="F3F0F7"/>
-          </a:solidFill>
-          <a:ln>
-            <a:noFill/>
-          </a:ln>
-          <a:effectLst/>
-        </p:spPr>
-        <p:style>
-          <a:lnRef idx="1">
-            <a:schemeClr val="accent1"/>
-          </a:lnRef>
-          <a:fillRef idx="3">
-            <a:schemeClr val="accent1"/>
-          </a:fillRef>
-          <a:effectRef idx="2">
-            <a:schemeClr val="accent1"/>
-          </a:effectRef>
-          <a:fontRef idx="minor">
-            <a:schemeClr val="lt1"/>
-          </a:fontRef>
-        </p:style>
-        <p:txBody>
-          <a:bodyPr rtlCol="0" anchor="ctr"/>
-          <a:lstStyle/>
-          <a:p>
-            <a:endParaRPr/>
-          </a:p>
-        </p:txBody>
-      </p:sp>
-      <p:sp>
-        <p:nvSpPr>
-          <p:cNvPr id="24" name="TextBox 23"/>
-          <p:cNvSpPr txBox="1"/>
-          <p:nvPr/>
-        </p:nvSpPr>
-        <p:spPr>
-          <a:xfrm>
-            <a:off x="4785055" y="3822191"/>
-            <a:ext cx="3657600" cy="786384"/>
-          </a:xfrm>
-          <a:prstGeom prst="rect">
-            <a:avLst/>
-          </a:prstGeom>
-          <a:noFill/>
-        </p:spPr>
-        <p:txBody>
-          <a:bodyPr wrap="square" lIns="45720" tIns="27432" rIns="45720" bIns="27432" anchor="ctr">
-            <a:spAutoFit/>
-          </a:bodyPr>
-          <a:lstStyle/>
-          <a:p>
-            <a:pPr algn="r" rtl="1">
-              <a:spcAft>
-                <a:spcPts val="600"/>
-              </a:spcAft>
-            </a:pPr>
-            <a:r>
-              <a:rPr lang="he-IL" sz="1600" b="0" i="0">
-                <a:solidFill>
-                  <a:srgbClr val="7B5EA7"/>
-                </a:solidFill>
-                <a:latin typeface="Arial"/>
-                <a:cs typeface="Arial"/>
-              </a:rPr>
-              <a:t>DiscreteUniform — בדיד</a:t>
-            </a:r>
-          </a:p>
-        </p:txBody>
-      </p:sp>
-      <p:sp>
-        <p:nvSpPr>
-          <p:cNvPr id="25" name="Rectangle 24"/>
-          <p:cNvSpPr/>
-          <p:nvPr/>
-        </p:nvSpPr>
-        <p:spPr>
-          <a:xfrm>
-            <a:off x="551383" y="3822191"/>
-            <a:ext cx="4050791" cy="786384"/>
-          </a:xfrm>
-          <a:prstGeom prst="rect">
-            <a:avLst/>
-          </a:prstGeom>
-          <a:solidFill>
-            <a:srgbClr val="F3F0F7"/>
-          </a:solidFill>
-          <a:ln>
-            <a:noFill/>
-          </a:ln>
-          <a:effectLst/>
-        </p:spPr>
-        <p:style>
-          <a:lnRef idx="1">
-            <a:schemeClr val="accent1"/>
-          </a:lnRef>
-          <a:fillRef idx="3">
-            <a:schemeClr val="accent1"/>
-          </a:fillRef>
-          <a:effectRef idx="2">
-            <a:schemeClr val="accent1"/>
-          </a:effectRef>
-          <a:fontRef idx="minor">
-            <a:schemeClr val="lt1"/>
-          </a:fontRef>
-        </p:style>
-        <p:txBody>
-          <a:bodyPr rtlCol="0" anchor="ctr"/>
-          <a:lstStyle/>
-          <a:p>
-            <a:endParaRPr/>
-          </a:p>
-        </p:txBody>
-      </p:sp>
-      <p:sp>
-        <p:nvSpPr>
-          <p:cNvPr id="26" name="TextBox 25"/>
-          <p:cNvSpPr txBox="1"/>
-          <p:nvPr/>
-        </p:nvSpPr>
-        <p:spPr>
-          <a:xfrm>
-            <a:off x="734263" y="3822191"/>
-            <a:ext cx="3685031" cy="786384"/>
-          </a:xfrm>
-          <a:prstGeom prst="rect">
-            <a:avLst/>
-          </a:prstGeom>
-          <a:noFill/>
-        </p:spPr>
-        <p:txBody>
-          <a:bodyPr wrap="square" lIns="45720" tIns="27432" rIns="45720" bIns="27432" anchor="ctr">
-            <a:spAutoFit/>
-          </a:bodyPr>
-          <a:lstStyle/>
-          <a:p>
-            <a:pPr algn="r" rtl="1">
-              <a:spcAft>
-                <a:spcPts val="600"/>
-              </a:spcAft>
-            </a:pPr>
-            <a:r>
-              <a:rPr lang="he-IL" sz="1600" b="0" i="0">
-                <a:solidFill>
-                  <a:srgbClr val="E4572E"/>
-                </a:solidFill>
-                <a:latin typeface="Arial"/>
-                <a:cs typeface="Arial"/>
-              </a:rPr>
-              <a:t>Uniform — רציף</a:t>
-            </a:r>
-          </a:p>
-        </p:txBody>
-      </p:sp>
-      <p:sp>
-        <p:nvSpPr>
-          <p:cNvPr id="27" name="Rectangle 26"/>
-          <p:cNvSpPr/>
-          <p:nvPr/>
-        </p:nvSpPr>
-        <p:spPr>
-          <a:xfrm>
-            <a:off x="8625535" y="4608576"/>
-            <a:ext cx="3017520" cy="786384"/>
-          </a:xfrm>
-          <a:prstGeom prst="rect">
-            <a:avLst/>
-          </a:prstGeom>
-          <a:solidFill>
-            <a:srgbClr val="FFFFFF"/>
-          </a:solidFill>
-          <a:ln>
-            <a:noFill/>
-          </a:ln>
-          <a:effectLst/>
-        </p:spPr>
-        <p:style>
-          <a:lnRef idx="1">
-            <a:schemeClr val="accent1"/>
-          </a:lnRef>
-          <a:fillRef idx="3">
-            <a:schemeClr val="accent1"/>
-          </a:fillRef>
-          <a:effectRef idx="2">
-            <a:schemeClr val="accent1"/>
-          </a:effectRef>
-          <a:fontRef idx="minor">
-            <a:schemeClr val="lt1"/>
-          </a:fontRef>
-        </p:style>
-        <p:txBody>
-          <a:bodyPr rtlCol="0" anchor="ctr"/>
-          <a:lstStyle/>
-          <a:p>
-            <a:endParaRPr/>
-          </a:p>
-        </p:txBody>
-      </p:sp>
-      <p:sp>
-        <p:nvSpPr>
-          <p:cNvPr id="28" name="TextBox 27"/>
-          <p:cNvSpPr txBox="1"/>
-          <p:nvPr/>
-        </p:nvSpPr>
-        <p:spPr>
-          <a:xfrm>
-            <a:off x="8808415" y="4608576"/>
-            <a:ext cx="2651760" cy="786384"/>
-          </a:xfrm>
-          <a:prstGeom prst="rect">
-            <a:avLst/>
-          </a:prstGeom>
-          <a:noFill/>
-        </p:spPr>
-        <p:txBody>
-          <a:bodyPr wrap="square" lIns="45720" tIns="27432" rIns="45720" bIns="27432" anchor="ctr">
-            <a:spAutoFit/>
-          </a:bodyPr>
-          <a:lstStyle/>
-          <a:p>
-            <a:pPr algn="r" rtl="1">
-              <a:spcAft>
-                <a:spcPts val="600"/>
-              </a:spcAft>
-            </a:pPr>
-            <a:r>
-              <a:rPr lang="he-IL" sz="1600" b="1" i="0">
-                <a:solidFill>
-                  <a:srgbClr val="2B1E3F"/>
-                </a:solidFill>
-                <a:latin typeface="Arial"/>
-                <a:cs typeface="Arial"/>
-              </a:rPr>
-              <a:t>דוגם</a:t>
-            </a:r>
-          </a:p>
-        </p:txBody>
-      </p:sp>
-      <p:sp>
-        <p:nvSpPr>
-          <p:cNvPr id="29" name="Rectangle 28"/>
-          <p:cNvSpPr/>
-          <p:nvPr/>
-        </p:nvSpPr>
-        <p:spPr>
-          <a:xfrm>
-            <a:off x="4602175" y="4608576"/>
-            <a:ext cx="4023360" cy="786384"/>
-          </a:xfrm>
-          <a:prstGeom prst="rect">
-            <a:avLst/>
-          </a:prstGeom>
-          <a:solidFill>
-            <a:srgbClr val="FFFFFF"/>
-          </a:solidFill>
-          <a:ln>
-            <a:noFill/>
-          </a:ln>
-          <a:effectLst/>
-        </p:spPr>
-        <p:style>
-          <a:lnRef idx="1">
-            <a:schemeClr val="accent1"/>
-          </a:lnRef>
-          <a:fillRef idx="3">
-            <a:schemeClr val="accent1"/>
-          </a:fillRef>
-          <a:effectRef idx="2">
-            <a:schemeClr val="accent1"/>
-          </a:effectRef>
-          <a:fontRef idx="minor">
-            <a:schemeClr val="lt1"/>
-          </a:fontRef>
-        </p:style>
-        <p:txBody>
-          <a:bodyPr rtlCol="0" anchor="ctr"/>
-          <a:lstStyle/>
-          <a:p>
-            <a:endParaRPr/>
-          </a:p>
-        </p:txBody>
-      </p:sp>
-      <p:sp>
-        <p:nvSpPr>
-          <p:cNvPr id="30" name="TextBox 29"/>
-          <p:cNvSpPr txBox="1"/>
-          <p:nvPr/>
-        </p:nvSpPr>
-        <p:spPr>
-          <a:xfrm>
-            <a:off x="4785055" y="4608576"/>
-            <a:ext cx="3657600" cy="786384"/>
-          </a:xfrm>
-          <a:prstGeom prst="rect">
-            <a:avLst/>
-          </a:prstGeom>
-          <a:noFill/>
-        </p:spPr>
-        <p:txBody>
-          <a:bodyPr wrap="square" lIns="45720" tIns="27432" rIns="45720" bIns="27432" anchor="ctr">
-            <a:spAutoFit/>
-          </a:bodyPr>
-          <a:lstStyle/>
-          <a:p>
-            <a:pPr algn="r" rtl="0">
-              <a:spcAft>
-                <a:spcPts val="600"/>
-              </a:spcAft>
-            </a:pPr>
-            <a:r>
-              <a:rPr lang="en-US" sz="1600" b="0" i="0">
-                <a:solidFill>
-                  <a:srgbClr val="7B5EA7"/>
-                </a:solidFill>
-                <a:latin typeface="Arial"/>
-                <a:cs typeface="Arial"/>
-              </a:rPr>
-              <a:t>Metropolis</a:t>
-            </a:r>
-          </a:p>
-        </p:txBody>
-      </p:sp>
-      <p:sp>
-        <p:nvSpPr>
-          <p:cNvPr id="31" name="Rectangle 30"/>
-          <p:cNvSpPr/>
-          <p:nvPr/>
-        </p:nvSpPr>
-        <p:spPr>
-          <a:xfrm>
-            <a:off x="551383" y="4608576"/>
-            <a:ext cx="4050791" cy="786384"/>
-          </a:xfrm>
-          <a:prstGeom prst="rect">
-            <a:avLst/>
-          </a:prstGeom>
-          <a:solidFill>
-            <a:srgbClr val="FFFFFF"/>
-          </a:solidFill>
-          <a:ln>
-            <a:noFill/>
-          </a:ln>
-          <a:effectLst/>
-        </p:spPr>
-        <p:style>
-          <a:lnRef idx="1">
-            <a:schemeClr val="accent1"/>
-          </a:lnRef>
-          <a:fillRef idx="3">
-            <a:schemeClr val="accent1"/>
-          </a:fillRef>
-          <a:effectRef idx="2">
-            <a:schemeClr val="accent1"/>
-          </a:effectRef>
-          <a:fontRef idx="minor">
-            <a:schemeClr val="lt1"/>
-          </a:fontRef>
-        </p:style>
-        <p:txBody>
-          <a:bodyPr rtlCol="0" anchor="ctr"/>
-          <a:lstStyle/>
-          <a:p>
-            <a:endParaRPr/>
-          </a:p>
-        </p:txBody>
-      </p:sp>
-      <p:sp>
-        <p:nvSpPr>
-          <p:cNvPr id="32" name="TextBox 31"/>
-          <p:cNvSpPr txBox="1"/>
-          <p:nvPr/>
-        </p:nvSpPr>
-        <p:spPr>
-          <a:xfrm>
-            <a:off x="734263" y="4608576"/>
-            <a:ext cx="3685031" cy="786384"/>
-          </a:xfrm>
-          <a:prstGeom prst="rect">
-            <a:avLst/>
-          </a:prstGeom>
-          <a:noFill/>
-        </p:spPr>
-        <p:txBody>
-          <a:bodyPr wrap="square" lIns="45720" tIns="27432" rIns="45720" bIns="27432" anchor="ctr">
-            <a:spAutoFit/>
-          </a:bodyPr>
-          <a:lstStyle/>
-          <a:p>
-            <a:pPr algn="r" rtl="0">
-              <a:spcAft>
-                <a:spcPts val="600"/>
-              </a:spcAft>
-            </a:pPr>
-            <a:r>
-              <a:rPr lang="en-US" sz="1600" b="0" i="0">
-                <a:solidFill>
-                  <a:srgbClr val="E4572E"/>
-                </a:solidFill>
-                <a:latin typeface="Arial"/>
-                <a:cs typeface="Arial"/>
-              </a:rPr>
-              <a:t>NUTS (ברירת המחדל)</a:t>
-            </a:r>
-          </a:p>
-        </p:txBody>
-      </p:sp>
-      <p:sp>
-        <p:nvSpPr>
-          <p:cNvPr id="33" name="Rectangle 32"/>
-          <p:cNvSpPr/>
-          <p:nvPr/>
-        </p:nvSpPr>
-        <p:spPr>
-          <a:xfrm>
-            <a:off x="8625535" y="5394960"/>
-            <a:ext cx="3017520" cy="786384"/>
-          </a:xfrm>
-          <a:prstGeom prst="rect">
-            <a:avLst/>
-          </a:prstGeom>
-          <a:solidFill>
-            <a:srgbClr val="F3F0F7"/>
-          </a:solidFill>
-          <a:ln>
-            <a:noFill/>
-          </a:ln>
-          <a:effectLst/>
-        </p:spPr>
-        <p:style>
-          <a:lnRef idx="1">
-            <a:schemeClr val="accent1"/>
-          </a:lnRef>
-          <a:fillRef idx="3">
-            <a:schemeClr val="accent1"/>
-          </a:fillRef>
-          <a:effectRef idx="2">
-            <a:schemeClr val="accent1"/>
-          </a:effectRef>
-          <a:fontRef idx="minor">
-            <a:schemeClr val="lt1"/>
-          </a:fontRef>
-        </p:style>
-        <p:txBody>
-          <a:bodyPr rtlCol="0" anchor="ctr"/>
-          <a:lstStyle/>
-          <a:p>
-            <a:endParaRPr/>
-          </a:p>
-        </p:txBody>
-      </p:sp>
-      <p:sp>
-        <p:nvSpPr>
-          <p:cNvPr id="34" name="TextBox 33"/>
-          <p:cNvSpPr txBox="1"/>
-          <p:nvPr/>
-        </p:nvSpPr>
-        <p:spPr>
-          <a:xfrm>
-            <a:off x="8808415" y="5394960"/>
-            <a:ext cx="2651760" cy="786384"/>
-          </a:xfrm>
-          <a:prstGeom prst="rect">
-            <a:avLst/>
-          </a:prstGeom>
-          <a:noFill/>
-        </p:spPr>
-        <p:txBody>
-          <a:bodyPr wrap="square" lIns="45720" tIns="27432" rIns="45720" bIns="27432" anchor="ctr">
-            <a:spAutoFit/>
-          </a:bodyPr>
-          <a:lstStyle/>
-          <a:p>
-            <a:pPr algn="r" rtl="1">
-              <a:spcAft>
-                <a:spcPts val="600"/>
-              </a:spcAft>
-            </a:pPr>
-            <a:r>
-              <a:rPr lang="he-IL" sz="1600" b="1" i="0">
-                <a:solidFill>
-                  <a:srgbClr val="2B1E3F"/>
-                </a:solidFill>
-                <a:latin typeface="Arial"/>
-                <a:cs typeface="Arial"/>
-              </a:rPr>
-              <a:t>כיוון השינוי</a:t>
-            </a:r>
-          </a:p>
-        </p:txBody>
-      </p:sp>
-      <p:sp>
-        <p:nvSpPr>
-          <p:cNvPr id="35" name="Rectangle 34"/>
-          <p:cNvSpPr/>
-          <p:nvPr/>
-        </p:nvSpPr>
-        <p:spPr>
-          <a:xfrm>
-            <a:off x="4602175" y="5394960"/>
-            <a:ext cx="4023360" cy="786384"/>
-          </a:xfrm>
-          <a:prstGeom prst="rect">
-            <a:avLst/>
-          </a:prstGeom>
-          <a:solidFill>
-            <a:srgbClr val="F3F0F7"/>
-          </a:solidFill>
-          <a:ln>
-            <a:noFill/>
-          </a:ln>
-          <a:effectLst/>
-        </p:spPr>
-        <p:style>
-          <a:lnRef idx="1">
-            <a:schemeClr val="accent1"/>
-          </a:lnRef>
-          <a:fillRef idx="3">
-            <a:schemeClr val="accent1"/>
-          </a:fillRef>
-          <a:effectRef idx="2">
-            <a:schemeClr val="accent1"/>
-          </a:effectRef>
-          <a:fontRef idx="minor">
-            <a:schemeClr val="lt1"/>
-          </a:fontRef>
-        </p:style>
-        <p:txBody>
-          <a:bodyPr rtlCol="0" anchor="ctr"/>
-          <a:lstStyle/>
-          <a:p>
-            <a:endParaRPr/>
-          </a:p>
-        </p:txBody>
-      </p:sp>
-      <p:sp>
-        <p:nvSpPr>
-          <p:cNvPr id="36" name="TextBox 35"/>
-          <p:cNvSpPr txBox="1"/>
-          <p:nvPr/>
-        </p:nvSpPr>
-        <p:spPr>
-          <a:xfrm>
-            <a:off x="4785055" y="5394960"/>
-            <a:ext cx="3657600" cy="786384"/>
-          </a:xfrm>
-          <a:prstGeom prst="rect">
-            <a:avLst/>
-          </a:prstGeom>
-          <a:noFill/>
-        </p:spPr>
-        <p:txBody>
-          <a:bodyPr wrap="square" lIns="45720" tIns="27432" rIns="45720" bIns="27432" anchor="ctr">
-            <a:spAutoFit/>
-          </a:bodyPr>
-          <a:lstStyle/>
-          <a:p>
-            <a:pPr algn="r" rtl="1">
-              <a:spcAft>
-                <a:spcPts val="600"/>
-              </a:spcAft>
-            </a:pPr>
-            <a:r>
-              <a:rPr lang="he-IL" sz="1600" b="0" i="0">
-                <a:solidFill>
-                  <a:srgbClr val="7B5EA7"/>
-                </a:solidFill>
-                <a:latin typeface="Arial"/>
-                <a:cs typeface="Arial"/>
-              </a:rPr>
-              <a:t>עלייה</a:t>
-            </a:r>
-          </a:p>
-        </p:txBody>
-      </p:sp>
-      <p:sp>
-        <p:nvSpPr>
-          <p:cNvPr id="37" name="Rectangle 36"/>
-          <p:cNvSpPr/>
-          <p:nvPr/>
-        </p:nvSpPr>
-        <p:spPr>
-          <a:xfrm>
-            <a:off x="551383" y="5394960"/>
-            <a:ext cx="4050791" cy="786384"/>
-          </a:xfrm>
-          <a:prstGeom prst="rect">
-            <a:avLst/>
-          </a:prstGeom>
-          <a:solidFill>
-            <a:srgbClr val="F3F0F7"/>
-          </a:solidFill>
-          <a:ln>
-            <a:noFill/>
-          </a:ln>
-          <a:effectLst/>
-        </p:spPr>
-        <p:style>
-          <a:lnRef idx="1">
-            <a:schemeClr val="accent1"/>
-          </a:lnRef>
-          <a:fillRef idx="3">
-            <a:schemeClr val="accent1"/>
-          </a:fillRef>
-          <a:effectRef idx="2">
-            <a:schemeClr val="accent1"/>
-          </a:effectRef>
-          <a:fontRef idx="minor">
-            <a:schemeClr val="lt1"/>
-          </a:fontRef>
-        </p:style>
-        <p:txBody>
-          <a:bodyPr rtlCol="0" anchor="ctr"/>
-          <a:lstStyle/>
-          <a:p>
-            <a:endParaRPr/>
-          </a:p>
-        </p:txBody>
-      </p:sp>
-      <p:sp>
-        <p:nvSpPr>
-          <p:cNvPr id="38" name="TextBox 37"/>
-          <p:cNvSpPr txBox="1"/>
-          <p:nvPr/>
-        </p:nvSpPr>
-        <p:spPr>
-          <a:xfrm>
-            <a:off x="734263" y="5394960"/>
-            <a:ext cx="3685031" cy="786384"/>
-          </a:xfrm>
-          <a:prstGeom prst="rect">
-            <a:avLst/>
-          </a:prstGeom>
-          <a:noFill/>
-        </p:spPr>
-        <p:txBody>
-          <a:bodyPr wrap="square" lIns="45720" tIns="27432" rIns="45720" bIns="27432" anchor="ctr">
-            <a:spAutoFit/>
-          </a:bodyPr>
-          <a:lstStyle/>
-          <a:p>
-            <a:pPr algn="r" rtl="1">
-              <a:spcAft>
-                <a:spcPts val="600"/>
-              </a:spcAft>
-            </a:pPr>
-            <a:r>
-              <a:rPr lang="he-IL" sz="1600" b="0" i="0">
-                <a:solidFill>
-                  <a:srgbClr val="E4572E"/>
-                </a:solidFill>
-                <a:latin typeface="Arial"/>
-                <a:cs typeface="Arial"/>
-              </a:rPr>
-              <a:t>ירידה</a:t>
+              <a:t>הרעש היומי גדול — ובדיוק בשביל זה צריך מודל הסתברותי</a:t>
             </a:r>
           </a:p>
         </p:txBody>
@@ -13428,6 +12698,1592 @@
     <p:bg>
       <p:bgPr>
         <a:solidFill>
+          <a:srgbClr val="FFFFFF"/>
+        </a:solidFill>
+        <a:effectLst/>
+      </p:bgPr>
+    </p:bg>
+    <p:spTree>
+      <p:nvGrpSpPr>
+        <p:cNvPr id="1" name=""/>
+        <p:cNvGrpSpPr/>
+        <p:nvPr/>
+      </p:nvGrpSpPr>
+      <p:grpSpPr>
+        <a:xfrm>
+          <a:off x="0" y="0"/>
+          <a:ext cx="0" cy="0"/>
+          <a:chOff x="0" y="0"/>
+          <a:chExt cx="0" cy="0"/>
+        </a:xfrm>
+      </p:grpSpPr>
+      <p:sp>
+        <p:nvSpPr>
+          <p:cNvPr id="2" name="Title"/>
+          <p:cNvSpPr txBox="1"/>
+          <p:nvPr/>
+        </p:nvSpPr>
+        <p:spPr>
+          <a:xfrm>
+            <a:off x="548640" y="365760"/>
+            <a:ext cx="11094415" cy="822960"/>
+          </a:xfrm>
+          <a:prstGeom prst="rect">
+            <a:avLst/>
+          </a:prstGeom>
+          <a:noFill/>
+        </p:spPr>
+        <p:txBody>
+          <a:bodyPr wrap="square" lIns="45720" tIns="27432" rIns="45720" bIns="27432" anchor="ctr">
+            <a:spAutoFit/>
+          </a:bodyPr>
+          <a:lstStyle/>
+          <a:p>
+            <a:pPr algn="r" rtl="1">
+              <a:spcAft>
+                <a:spcPts val="600"/>
+              </a:spcAft>
+            </a:pPr>
+            <a:r>
+              <a:rPr lang="he-IL" sz="3400" b="1" i="0">
+                <a:solidFill>
+                  <a:srgbClr val="2B1E3F"/>
+                </a:solidFill>
+                <a:latin typeface="Arial"/>
+                <a:cs typeface="Arial"/>
+              </a:rPr>
+              <a:t>מה השתנה לעומת השיעור הקודם?</a:t>
+            </a:r>
+          </a:p>
+        </p:txBody>
+      </p:sp>
+      <p:sp>
+        <p:nvSpPr>
+          <p:cNvPr id="3" name="Rectangle 2"/>
+          <p:cNvSpPr/>
+          <p:nvPr/>
+        </p:nvSpPr>
+        <p:spPr>
+          <a:xfrm>
+            <a:off x="8625535" y="1463040"/>
+            <a:ext cx="3017520" cy="786384"/>
+          </a:xfrm>
+          <a:prstGeom prst="rect">
+            <a:avLst/>
+          </a:prstGeom>
+          <a:solidFill>
+            <a:srgbClr val="2B1E3F"/>
+          </a:solidFill>
+          <a:ln>
+            <a:noFill/>
+          </a:ln>
+          <a:effectLst/>
+        </p:spPr>
+        <p:style>
+          <a:lnRef idx="1">
+            <a:schemeClr val="accent1"/>
+          </a:lnRef>
+          <a:fillRef idx="3">
+            <a:schemeClr val="accent1"/>
+          </a:fillRef>
+          <a:effectRef idx="2">
+            <a:schemeClr val="accent1"/>
+          </a:effectRef>
+          <a:fontRef idx="minor">
+            <a:schemeClr val="lt1"/>
+          </a:fontRef>
+        </p:style>
+        <p:txBody>
+          <a:bodyPr rtlCol="0" anchor="ctr"/>
+          <a:lstStyle/>
+          <a:p>
+            <a:endParaRPr/>
+          </a:p>
+        </p:txBody>
+      </p:sp>
+      <p:sp>
+        <p:nvSpPr>
+          <p:cNvPr id="4" name="TextBox 3"/>
+          <p:cNvSpPr txBox="1"/>
+          <p:nvPr/>
+        </p:nvSpPr>
+        <p:spPr>
+          <a:xfrm>
+            <a:off x="8808415" y="1463040"/>
+            <a:ext cx="2651760" cy="786384"/>
+          </a:xfrm>
+          <a:prstGeom prst="rect">
+            <a:avLst/>
+          </a:prstGeom>
+          <a:noFill/>
+        </p:spPr>
+        <p:txBody>
+          <a:bodyPr wrap="square" lIns="45720" tIns="27432" rIns="45720" bIns="27432" anchor="ctr">
+            <a:spAutoFit/>
+          </a:bodyPr>
+          <a:lstStyle/>
+          <a:p>
+            <a:pPr algn="r" rtl="1">
+              <a:spcAft>
+                <a:spcPts val="600"/>
+              </a:spcAft>
+            </a:pPr>
+            <a:endParaRPr/>
+          </a:p>
+        </p:txBody>
+      </p:sp>
+      <p:sp>
+        <p:nvSpPr>
+          <p:cNvPr id="5" name="Rectangle 4"/>
+          <p:cNvSpPr/>
+          <p:nvPr/>
+        </p:nvSpPr>
+        <p:spPr>
+          <a:xfrm>
+            <a:off x="4602175" y="1463040"/>
+            <a:ext cx="4023360" cy="786384"/>
+          </a:xfrm>
+          <a:prstGeom prst="rect">
+            <a:avLst/>
+          </a:prstGeom>
+          <a:solidFill>
+            <a:srgbClr val="2B1E3F"/>
+          </a:solidFill>
+          <a:ln>
+            <a:noFill/>
+          </a:ln>
+          <a:effectLst/>
+        </p:spPr>
+        <p:style>
+          <a:lnRef idx="1">
+            <a:schemeClr val="accent1"/>
+          </a:lnRef>
+          <a:fillRef idx="3">
+            <a:schemeClr val="accent1"/>
+          </a:fillRef>
+          <a:effectRef idx="2">
+            <a:schemeClr val="accent1"/>
+          </a:effectRef>
+          <a:fontRef idx="minor">
+            <a:schemeClr val="lt1"/>
+          </a:fontRef>
+        </p:style>
+        <p:txBody>
+          <a:bodyPr rtlCol="0" anchor="ctr"/>
+          <a:lstStyle/>
+          <a:p>
+            <a:endParaRPr/>
+          </a:p>
+        </p:txBody>
+      </p:sp>
+      <p:sp>
+        <p:nvSpPr>
+          <p:cNvPr id="6" name="TextBox 5"/>
+          <p:cNvSpPr txBox="1"/>
+          <p:nvPr/>
+        </p:nvSpPr>
+        <p:spPr>
+          <a:xfrm>
+            <a:off x="4785055" y="1463040"/>
+            <a:ext cx="3657600" cy="786384"/>
+          </a:xfrm>
+          <a:prstGeom prst="rect">
+            <a:avLst/>
+          </a:prstGeom>
+          <a:noFill/>
+        </p:spPr>
+        <p:txBody>
+          <a:bodyPr wrap="square" lIns="45720" tIns="27432" rIns="45720" bIns="27432" anchor="ctr">
+            <a:spAutoFit/>
+          </a:bodyPr>
+          <a:lstStyle/>
+          <a:p>
+            <a:pPr algn="r" rtl="1">
+              <a:spcAft>
+                <a:spcPts val="600"/>
+              </a:spcAft>
+            </a:pPr>
+            <a:r>
+              <a:rPr lang="he-IL" sz="1600" b="1" i="0">
+                <a:solidFill>
+                  <a:srgbClr val="FFFFFF"/>
+                </a:solidFill>
+                <a:latin typeface="Arial"/>
+                <a:cs typeface="Arial"/>
+              </a:rPr>
+              <a:t>הודעות טקסט (שיעור 2)</a:t>
+            </a:r>
+          </a:p>
+        </p:txBody>
+      </p:sp>
+      <p:sp>
+        <p:nvSpPr>
+          <p:cNvPr id="7" name="Rectangle 6"/>
+          <p:cNvSpPr/>
+          <p:nvPr/>
+        </p:nvSpPr>
+        <p:spPr>
+          <a:xfrm>
+            <a:off x="551383" y="1463040"/>
+            <a:ext cx="4050791" cy="786384"/>
+          </a:xfrm>
+          <a:prstGeom prst="rect">
+            <a:avLst/>
+          </a:prstGeom>
+          <a:solidFill>
+            <a:srgbClr val="2B1E3F"/>
+          </a:solidFill>
+          <a:ln>
+            <a:noFill/>
+          </a:ln>
+          <a:effectLst/>
+        </p:spPr>
+        <p:style>
+          <a:lnRef idx="1">
+            <a:schemeClr val="accent1"/>
+          </a:lnRef>
+          <a:fillRef idx="3">
+            <a:schemeClr val="accent1"/>
+          </a:fillRef>
+          <a:effectRef idx="2">
+            <a:schemeClr val="accent1"/>
+          </a:effectRef>
+          <a:fontRef idx="minor">
+            <a:schemeClr val="lt1"/>
+          </a:fontRef>
+        </p:style>
+        <p:txBody>
+          <a:bodyPr rtlCol="0" anchor="ctr"/>
+          <a:lstStyle/>
+          <a:p>
+            <a:endParaRPr/>
+          </a:p>
+        </p:txBody>
+      </p:sp>
+      <p:sp>
+        <p:nvSpPr>
+          <p:cNvPr id="8" name="TextBox 7"/>
+          <p:cNvSpPr txBox="1"/>
+          <p:nvPr/>
+        </p:nvSpPr>
+        <p:spPr>
+          <a:xfrm>
+            <a:off x="734263" y="1463040"/>
+            <a:ext cx="3685031" cy="786384"/>
+          </a:xfrm>
+          <a:prstGeom prst="rect">
+            <a:avLst/>
+          </a:prstGeom>
+          <a:noFill/>
+        </p:spPr>
+        <p:txBody>
+          <a:bodyPr wrap="square" lIns="45720" tIns="27432" rIns="45720" bIns="27432" anchor="ctr">
+            <a:spAutoFit/>
+          </a:bodyPr>
+          <a:lstStyle/>
+          <a:p>
+            <a:pPr algn="r" rtl="1">
+              <a:spcAft>
+                <a:spcPts val="600"/>
+              </a:spcAft>
+            </a:pPr>
+            <a:r>
+              <a:rPr lang="he-IL" sz="1600" b="1" i="0">
+                <a:solidFill>
+                  <a:srgbClr val="FFFFFF"/>
+                </a:solidFill>
+                <a:latin typeface="Arial"/>
+                <a:cs typeface="Arial"/>
+              </a:rPr>
+              <a:t>קצב סיבוב (שיעור 3)</a:t>
+            </a:r>
+          </a:p>
+        </p:txBody>
+      </p:sp>
+      <p:sp>
+        <p:nvSpPr>
+          <p:cNvPr id="9" name="Rectangle 8"/>
+          <p:cNvSpPr/>
+          <p:nvPr/>
+        </p:nvSpPr>
+        <p:spPr>
+          <a:xfrm>
+            <a:off x="8625535" y="2249424"/>
+            <a:ext cx="3017520" cy="786384"/>
+          </a:xfrm>
+          <a:prstGeom prst="rect">
+            <a:avLst/>
+          </a:prstGeom>
+          <a:solidFill>
+            <a:srgbClr val="F3F0F7"/>
+          </a:solidFill>
+          <a:ln>
+            <a:noFill/>
+          </a:ln>
+          <a:effectLst/>
+        </p:spPr>
+        <p:style>
+          <a:lnRef idx="1">
+            <a:schemeClr val="accent1"/>
+          </a:lnRef>
+          <a:fillRef idx="3">
+            <a:schemeClr val="accent1"/>
+          </a:fillRef>
+          <a:effectRef idx="2">
+            <a:schemeClr val="accent1"/>
+          </a:effectRef>
+          <a:fontRef idx="minor">
+            <a:schemeClr val="lt1"/>
+          </a:fontRef>
+        </p:style>
+        <p:txBody>
+          <a:bodyPr rtlCol="0" anchor="ctr"/>
+          <a:lstStyle/>
+          <a:p>
+            <a:endParaRPr/>
+          </a:p>
+        </p:txBody>
+      </p:sp>
+      <p:sp>
+        <p:nvSpPr>
+          <p:cNvPr id="10" name="TextBox 9"/>
+          <p:cNvSpPr txBox="1"/>
+          <p:nvPr/>
+        </p:nvSpPr>
+        <p:spPr>
+          <a:xfrm>
+            <a:off x="8808415" y="2249424"/>
+            <a:ext cx="2651760" cy="786384"/>
+          </a:xfrm>
+          <a:prstGeom prst="rect">
+            <a:avLst/>
+          </a:prstGeom>
+          <a:noFill/>
+        </p:spPr>
+        <p:txBody>
+          <a:bodyPr wrap="square" lIns="45720" tIns="27432" rIns="45720" bIns="27432" anchor="ctr">
+            <a:spAutoFit/>
+          </a:bodyPr>
+          <a:lstStyle/>
+          <a:p>
+            <a:pPr algn="r" rtl="1">
+              <a:spcAft>
+                <a:spcPts val="600"/>
+              </a:spcAft>
+            </a:pPr>
+            <a:r>
+              <a:rPr lang="he-IL" sz="1600" b="1" i="0">
+                <a:solidFill>
+                  <a:srgbClr val="2B1E3F"/>
+                </a:solidFill>
+                <a:latin typeface="Arial"/>
+                <a:cs typeface="Arial"/>
+              </a:rPr>
+              <a:t>נתונים</a:t>
+            </a:r>
+          </a:p>
+        </p:txBody>
+      </p:sp>
+      <p:sp>
+        <p:nvSpPr>
+          <p:cNvPr id="11" name="Rectangle 10"/>
+          <p:cNvSpPr/>
+          <p:nvPr/>
+        </p:nvSpPr>
+        <p:spPr>
+          <a:xfrm>
+            <a:off x="4602175" y="2249424"/>
+            <a:ext cx="4023360" cy="786384"/>
+          </a:xfrm>
+          <a:prstGeom prst="rect">
+            <a:avLst/>
+          </a:prstGeom>
+          <a:solidFill>
+            <a:srgbClr val="F3F0F7"/>
+          </a:solidFill>
+          <a:ln>
+            <a:noFill/>
+          </a:ln>
+          <a:effectLst/>
+        </p:spPr>
+        <p:style>
+          <a:lnRef idx="1">
+            <a:schemeClr val="accent1"/>
+          </a:lnRef>
+          <a:fillRef idx="3">
+            <a:schemeClr val="accent1"/>
+          </a:fillRef>
+          <a:effectRef idx="2">
+            <a:schemeClr val="accent1"/>
+          </a:effectRef>
+          <a:fontRef idx="minor">
+            <a:schemeClr val="lt1"/>
+          </a:fontRef>
+        </p:style>
+        <p:txBody>
+          <a:bodyPr rtlCol="0" anchor="ctr"/>
+          <a:lstStyle/>
+          <a:p>
+            <a:endParaRPr/>
+          </a:p>
+        </p:txBody>
+      </p:sp>
+      <p:sp>
+        <p:nvSpPr>
+          <p:cNvPr id="12" name="TextBox 11"/>
+          <p:cNvSpPr txBox="1"/>
+          <p:nvPr/>
+        </p:nvSpPr>
+        <p:spPr>
+          <a:xfrm>
+            <a:off x="4785055" y="2249424"/>
+            <a:ext cx="3657600" cy="786384"/>
+          </a:xfrm>
+          <a:prstGeom prst="rect">
+            <a:avLst/>
+          </a:prstGeom>
+          <a:noFill/>
+        </p:spPr>
+        <p:txBody>
+          <a:bodyPr wrap="square" lIns="45720" tIns="27432" rIns="45720" bIns="27432" anchor="ctr">
+            <a:spAutoFit/>
+          </a:bodyPr>
+          <a:lstStyle/>
+          <a:p>
+            <a:pPr algn="r" rtl="1">
+              <a:spcAft>
+                <a:spcPts val="600"/>
+              </a:spcAft>
+            </a:pPr>
+            <a:r>
+              <a:rPr lang="he-IL" sz="1600" b="0" i="0">
+                <a:solidFill>
+                  <a:srgbClr val="7B5EA7"/>
+                </a:solidFill>
+                <a:latin typeface="Arial"/>
+                <a:cs typeface="Arial"/>
+              </a:rPr>
+              <a:t>ספירות יומיות</a:t>
+            </a:r>
+          </a:p>
+        </p:txBody>
+      </p:sp>
+      <p:sp>
+        <p:nvSpPr>
+          <p:cNvPr id="13" name="Rectangle 12"/>
+          <p:cNvSpPr/>
+          <p:nvPr/>
+        </p:nvSpPr>
+        <p:spPr>
+          <a:xfrm>
+            <a:off x="551383" y="2249424"/>
+            <a:ext cx="4050791" cy="786384"/>
+          </a:xfrm>
+          <a:prstGeom prst="rect">
+            <a:avLst/>
+          </a:prstGeom>
+          <a:solidFill>
+            <a:srgbClr val="F3F0F7"/>
+          </a:solidFill>
+          <a:ln>
+            <a:noFill/>
+          </a:ln>
+          <a:effectLst/>
+        </p:spPr>
+        <p:style>
+          <a:lnRef idx="1">
+            <a:schemeClr val="accent1"/>
+          </a:lnRef>
+          <a:fillRef idx="3">
+            <a:schemeClr val="accent1"/>
+          </a:fillRef>
+          <a:effectRef idx="2">
+            <a:schemeClr val="accent1"/>
+          </a:effectRef>
+          <a:fontRef idx="minor">
+            <a:schemeClr val="lt1"/>
+          </a:fontRef>
+        </p:style>
+        <p:txBody>
+          <a:bodyPr rtlCol="0" anchor="ctr"/>
+          <a:lstStyle/>
+          <a:p>
+            <a:endParaRPr/>
+          </a:p>
+        </p:txBody>
+      </p:sp>
+      <p:sp>
+        <p:nvSpPr>
+          <p:cNvPr id="14" name="TextBox 13"/>
+          <p:cNvSpPr txBox="1"/>
+          <p:nvPr/>
+        </p:nvSpPr>
+        <p:spPr>
+          <a:xfrm>
+            <a:off x="734263" y="2249424"/>
+            <a:ext cx="3685031" cy="786384"/>
+          </a:xfrm>
+          <a:prstGeom prst="rect">
+            <a:avLst/>
+          </a:prstGeom>
+          <a:noFill/>
+        </p:spPr>
+        <p:txBody>
+          <a:bodyPr wrap="square" lIns="45720" tIns="27432" rIns="45720" bIns="27432" anchor="ctr">
+            <a:spAutoFit/>
+          </a:bodyPr>
+          <a:lstStyle/>
+          <a:p>
+            <a:pPr algn="r" rtl="1">
+              <a:spcAft>
+                <a:spcPts val="600"/>
+              </a:spcAft>
+            </a:pPr>
+            <a:r>
+              <a:rPr lang="he-IL" sz="1600" b="0" i="0">
+                <a:solidFill>
+                  <a:srgbClr val="E4572E"/>
+                </a:solidFill>
+                <a:latin typeface="Arial"/>
+                <a:cs typeface="Arial"/>
+              </a:rPr>
+              <a:t>מדידות רציפות (rpm)</a:t>
+            </a:r>
+          </a:p>
+        </p:txBody>
+      </p:sp>
+      <p:sp>
+        <p:nvSpPr>
+          <p:cNvPr id="15" name="Rectangle 14"/>
+          <p:cNvSpPr/>
+          <p:nvPr/>
+        </p:nvSpPr>
+        <p:spPr>
+          <a:xfrm>
+            <a:off x="8625535" y="3035808"/>
+            <a:ext cx="3017520" cy="786384"/>
+          </a:xfrm>
+          <a:prstGeom prst="rect">
+            <a:avLst/>
+          </a:prstGeom>
+          <a:solidFill>
+            <a:srgbClr val="FFFFFF"/>
+          </a:solidFill>
+          <a:ln>
+            <a:noFill/>
+          </a:ln>
+          <a:effectLst/>
+        </p:spPr>
+        <p:style>
+          <a:lnRef idx="1">
+            <a:schemeClr val="accent1"/>
+          </a:lnRef>
+          <a:fillRef idx="3">
+            <a:schemeClr val="accent1"/>
+          </a:fillRef>
+          <a:effectRef idx="2">
+            <a:schemeClr val="accent1"/>
+          </a:effectRef>
+          <a:fontRef idx="minor">
+            <a:schemeClr val="lt1"/>
+          </a:fontRef>
+        </p:style>
+        <p:txBody>
+          <a:bodyPr rtlCol="0" anchor="ctr"/>
+          <a:lstStyle/>
+          <a:p>
+            <a:endParaRPr/>
+          </a:p>
+        </p:txBody>
+      </p:sp>
+      <p:sp>
+        <p:nvSpPr>
+          <p:cNvPr id="16" name="TextBox 15"/>
+          <p:cNvSpPr txBox="1"/>
+          <p:nvPr/>
+        </p:nvSpPr>
+        <p:spPr>
+          <a:xfrm>
+            <a:off x="8808415" y="3035808"/>
+            <a:ext cx="2651760" cy="786384"/>
+          </a:xfrm>
+          <a:prstGeom prst="rect">
+            <a:avLst/>
+          </a:prstGeom>
+          <a:noFill/>
+        </p:spPr>
+        <p:txBody>
+          <a:bodyPr wrap="square" lIns="45720" tIns="27432" rIns="45720" bIns="27432" anchor="ctr">
+            <a:spAutoFit/>
+          </a:bodyPr>
+          <a:lstStyle/>
+          <a:p>
+            <a:pPr algn="r" rtl="1">
+              <a:spcAft>
+                <a:spcPts val="600"/>
+              </a:spcAft>
+            </a:pPr>
+            <a:r>
+              <a:rPr lang="he-IL" sz="1600" b="1" i="0">
+                <a:solidFill>
+                  <a:srgbClr val="2B1E3F"/>
+                </a:solidFill>
+                <a:latin typeface="Arial"/>
+                <a:cs typeface="Arial"/>
+              </a:rPr>
+              <a:t>נראות</a:t>
+            </a:r>
+          </a:p>
+        </p:txBody>
+      </p:sp>
+      <p:sp>
+        <p:nvSpPr>
+          <p:cNvPr id="17" name="Rectangle 16"/>
+          <p:cNvSpPr/>
+          <p:nvPr/>
+        </p:nvSpPr>
+        <p:spPr>
+          <a:xfrm>
+            <a:off x="4602175" y="3035808"/>
+            <a:ext cx="4023360" cy="786384"/>
+          </a:xfrm>
+          <a:prstGeom prst="rect">
+            <a:avLst/>
+          </a:prstGeom>
+          <a:solidFill>
+            <a:srgbClr val="FFFFFF"/>
+          </a:solidFill>
+          <a:ln>
+            <a:noFill/>
+          </a:ln>
+          <a:effectLst/>
+        </p:spPr>
+        <p:style>
+          <a:lnRef idx="1">
+            <a:schemeClr val="accent1"/>
+          </a:lnRef>
+          <a:fillRef idx="3">
+            <a:schemeClr val="accent1"/>
+          </a:fillRef>
+          <a:effectRef idx="2">
+            <a:schemeClr val="accent1"/>
+          </a:effectRef>
+          <a:fontRef idx="minor">
+            <a:schemeClr val="lt1"/>
+          </a:fontRef>
+        </p:style>
+        <p:txBody>
+          <a:bodyPr rtlCol="0" anchor="ctr"/>
+          <a:lstStyle/>
+          <a:p>
+            <a:endParaRPr/>
+          </a:p>
+        </p:txBody>
+      </p:sp>
+      <p:sp>
+        <p:nvSpPr>
+          <p:cNvPr id="18" name="TextBox 17"/>
+          <p:cNvSpPr txBox="1"/>
+          <p:nvPr/>
+        </p:nvSpPr>
+        <p:spPr>
+          <a:xfrm>
+            <a:off x="4785055" y="3035808"/>
+            <a:ext cx="3657600" cy="786384"/>
+          </a:xfrm>
+          <a:prstGeom prst="rect">
+            <a:avLst/>
+          </a:prstGeom>
+          <a:noFill/>
+        </p:spPr>
+        <p:txBody>
+          <a:bodyPr wrap="square" lIns="45720" tIns="27432" rIns="45720" bIns="27432" anchor="ctr">
+            <a:spAutoFit/>
+          </a:bodyPr>
+          <a:lstStyle/>
+          <a:p>
+            <a:pPr algn="r" rtl="0">
+              <a:spcAft>
+                <a:spcPts val="600"/>
+              </a:spcAft>
+            </a:pPr>
+            <a:r>
+              <a:rPr lang="en-US" sz="1600" b="0" i="0">
+                <a:solidFill>
+                  <a:srgbClr val="7B5EA7"/>
+                </a:solidFill>
+                <a:latin typeface="Arial"/>
+                <a:cs typeface="Arial"/>
+              </a:rPr>
+              <a:t>Poisson(λ)</a:t>
+            </a:r>
+          </a:p>
+        </p:txBody>
+      </p:sp>
+      <p:sp>
+        <p:nvSpPr>
+          <p:cNvPr id="19" name="Rectangle 18"/>
+          <p:cNvSpPr/>
+          <p:nvPr/>
+        </p:nvSpPr>
+        <p:spPr>
+          <a:xfrm>
+            <a:off x="551383" y="3035808"/>
+            <a:ext cx="4050791" cy="786384"/>
+          </a:xfrm>
+          <a:prstGeom prst="rect">
+            <a:avLst/>
+          </a:prstGeom>
+          <a:solidFill>
+            <a:srgbClr val="FFFFFF"/>
+          </a:solidFill>
+          <a:ln>
+            <a:noFill/>
+          </a:ln>
+          <a:effectLst/>
+        </p:spPr>
+        <p:style>
+          <a:lnRef idx="1">
+            <a:schemeClr val="accent1"/>
+          </a:lnRef>
+          <a:fillRef idx="3">
+            <a:schemeClr val="accent1"/>
+          </a:fillRef>
+          <a:effectRef idx="2">
+            <a:schemeClr val="accent1"/>
+          </a:effectRef>
+          <a:fontRef idx="minor">
+            <a:schemeClr val="lt1"/>
+          </a:fontRef>
+        </p:style>
+        <p:txBody>
+          <a:bodyPr rtlCol="0" anchor="ctr"/>
+          <a:lstStyle/>
+          <a:p>
+            <a:endParaRPr/>
+          </a:p>
+        </p:txBody>
+      </p:sp>
+      <p:sp>
+        <p:nvSpPr>
+          <p:cNvPr id="20" name="TextBox 19"/>
+          <p:cNvSpPr txBox="1"/>
+          <p:nvPr/>
+        </p:nvSpPr>
+        <p:spPr>
+          <a:xfrm>
+            <a:off x="734263" y="3035808"/>
+            <a:ext cx="3685031" cy="786384"/>
+          </a:xfrm>
+          <a:prstGeom prst="rect">
+            <a:avLst/>
+          </a:prstGeom>
+          <a:noFill/>
+        </p:spPr>
+        <p:txBody>
+          <a:bodyPr wrap="square" lIns="45720" tIns="27432" rIns="45720" bIns="27432" anchor="ctr">
+            <a:spAutoFit/>
+          </a:bodyPr>
+          <a:lstStyle/>
+          <a:p>
+            <a:pPr algn="r" rtl="0">
+              <a:spcAft>
+                <a:spcPts val="600"/>
+              </a:spcAft>
+            </a:pPr>
+            <a:r>
+              <a:rPr lang="en-US" sz="1600" b="0" i="0">
+                <a:solidFill>
+                  <a:srgbClr val="E4572E"/>
+                </a:solidFill>
+                <a:latin typeface="Arial"/>
+                <a:cs typeface="Arial"/>
+              </a:rPr>
+              <a:t>Normal(μ, σ)</a:t>
+            </a:r>
+          </a:p>
+        </p:txBody>
+      </p:sp>
+      <p:sp>
+        <p:nvSpPr>
+          <p:cNvPr id="21" name="Rectangle 20"/>
+          <p:cNvSpPr/>
+          <p:nvPr/>
+        </p:nvSpPr>
+        <p:spPr>
+          <a:xfrm>
+            <a:off x="8625535" y="3822191"/>
+            <a:ext cx="3017520" cy="786384"/>
+          </a:xfrm>
+          <a:prstGeom prst="rect">
+            <a:avLst/>
+          </a:prstGeom>
+          <a:solidFill>
+            <a:srgbClr val="F3F0F7"/>
+          </a:solidFill>
+          <a:ln>
+            <a:noFill/>
+          </a:ln>
+          <a:effectLst/>
+        </p:spPr>
+        <p:style>
+          <a:lnRef idx="1">
+            <a:schemeClr val="accent1"/>
+          </a:lnRef>
+          <a:fillRef idx="3">
+            <a:schemeClr val="accent1"/>
+          </a:fillRef>
+          <a:effectRef idx="2">
+            <a:schemeClr val="accent1"/>
+          </a:effectRef>
+          <a:fontRef idx="minor">
+            <a:schemeClr val="lt1"/>
+          </a:fontRef>
+        </p:style>
+        <p:txBody>
+          <a:bodyPr rtlCol="0" anchor="ctr"/>
+          <a:lstStyle/>
+          <a:p>
+            <a:endParaRPr/>
+          </a:p>
+        </p:txBody>
+      </p:sp>
+      <p:sp>
+        <p:nvSpPr>
+          <p:cNvPr id="22" name="TextBox 21"/>
+          <p:cNvSpPr txBox="1"/>
+          <p:nvPr/>
+        </p:nvSpPr>
+        <p:spPr>
+          <a:xfrm>
+            <a:off x="8808415" y="3822191"/>
+            <a:ext cx="2651760" cy="786384"/>
+          </a:xfrm>
+          <a:prstGeom prst="rect">
+            <a:avLst/>
+          </a:prstGeom>
+          <a:noFill/>
+        </p:spPr>
+        <p:txBody>
+          <a:bodyPr wrap="square" lIns="45720" tIns="27432" rIns="45720" bIns="27432" anchor="ctr">
+            <a:spAutoFit/>
+          </a:bodyPr>
+          <a:lstStyle/>
+          <a:p>
+            <a:pPr algn="r" rtl="1">
+              <a:spcAft>
+                <a:spcPts val="600"/>
+              </a:spcAft>
+            </a:pPr>
+            <a:r>
+              <a:rPr lang="he-IL" sz="1600" b="1" i="0">
+                <a:solidFill>
+                  <a:srgbClr val="2B1E3F"/>
+                </a:solidFill>
+                <a:latin typeface="Arial"/>
+                <a:cs typeface="Arial"/>
+              </a:rPr>
+              <a:t>נקודת השינוי </a:t>
+            </a:r>
+            <a:r>
+              <a:rPr lang="en-US" sz="1600" b="1" i="0">
+                <a:solidFill>
+                  <a:srgbClr val="2B1E3F"/>
+                </a:solidFill>
+                <a:latin typeface="Cambria Math"/>
+                <a:cs typeface="Cambria Math"/>
+              </a:rPr>
+              <a:t>τ</a:t>
+            </a:r>
+          </a:p>
+        </p:txBody>
+      </p:sp>
+      <p:sp>
+        <p:nvSpPr>
+          <p:cNvPr id="23" name="Rectangle 22"/>
+          <p:cNvSpPr/>
+          <p:nvPr/>
+        </p:nvSpPr>
+        <p:spPr>
+          <a:xfrm>
+            <a:off x="4602175" y="3822191"/>
+            <a:ext cx="4023360" cy="786384"/>
+          </a:xfrm>
+          <a:prstGeom prst="rect">
+            <a:avLst/>
+          </a:prstGeom>
+          <a:solidFill>
+            <a:srgbClr val="F3F0F7"/>
+          </a:solidFill>
+          <a:ln>
+            <a:noFill/>
+          </a:ln>
+          <a:effectLst/>
+        </p:spPr>
+        <p:style>
+          <a:lnRef idx="1">
+            <a:schemeClr val="accent1"/>
+          </a:lnRef>
+          <a:fillRef idx="3">
+            <a:schemeClr val="accent1"/>
+          </a:fillRef>
+          <a:effectRef idx="2">
+            <a:schemeClr val="accent1"/>
+          </a:effectRef>
+          <a:fontRef idx="minor">
+            <a:schemeClr val="lt1"/>
+          </a:fontRef>
+        </p:style>
+        <p:txBody>
+          <a:bodyPr rtlCol="0" anchor="ctr"/>
+          <a:lstStyle/>
+          <a:p>
+            <a:endParaRPr/>
+          </a:p>
+        </p:txBody>
+      </p:sp>
+      <p:sp>
+        <p:nvSpPr>
+          <p:cNvPr id="24" name="TextBox 23"/>
+          <p:cNvSpPr txBox="1"/>
+          <p:nvPr/>
+        </p:nvSpPr>
+        <p:spPr>
+          <a:xfrm>
+            <a:off x="4785055" y="3822191"/>
+            <a:ext cx="3657600" cy="786384"/>
+          </a:xfrm>
+          <a:prstGeom prst="rect">
+            <a:avLst/>
+          </a:prstGeom>
+          <a:noFill/>
+        </p:spPr>
+        <p:txBody>
+          <a:bodyPr wrap="square" lIns="45720" tIns="27432" rIns="45720" bIns="27432" anchor="ctr">
+            <a:spAutoFit/>
+          </a:bodyPr>
+          <a:lstStyle/>
+          <a:p>
+            <a:pPr algn="r" rtl="1">
+              <a:spcAft>
+                <a:spcPts val="600"/>
+              </a:spcAft>
+            </a:pPr>
+            <a:r>
+              <a:rPr lang="he-IL" sz="1600" b="0" i="0">
+                <a:solidFill>
+                  <a:srgbClr val="7B5EA7"/>
+                </a:solidFill>
+                <a:latin typeface="Arial"/>
+                <a:cs typeface="Arial"/>
+              </a:rPr>
+              <a:t>DiscreteUniform — בדיד</a:t>
+            </a:r>
+          </a:p>
+        </p:txBody>
+      </p:sp>
+      <p:sp>
+        <p:nvSpPr>
+          <p:cNvPr id="25" name="Rectangle 24"/>
+          <p:cNvSpPr/>
+          <p:nvPr/>
+        </p:nvSpPr>
+        <p:spPr>
+          <a:xfrm>
+            <a:off x="551383" y="3822191"/>
+            <a:ext cx="4050791" cy="786384"/>
+          </a:xfrm>
+          <a:prstGeom prst="rect">
+            <a:avLst/>
+          </a:prstGeom>
+          <a:solidFill>
+            <a:srgbClr val="F3F0F7"/>
+          </a:solidFill>
+          <a:ln>
+            <a:noFill/>
+          </a:ln>
+          <a:effectLst/>
+        </p:spPr>
+        <p:style>
+          <a:lnRef idx="1">
+            <a:schemeClr val="accent1"/>
+          </a:lnRef>
+          <a:fillRef idx="3">
+            <a:schemeClr val="accent1"/>
+          </a:fillRef>
+          <a:effectRef idx="2">
+            <a:schemeClr val="accent1"/>
+          </a:effectRef>
+          <a:fontRef idx="minor">
+            <a:schemeClr val="lt1"/>
+          </a:fontRef>
+        </p:style>
+        <p:txBody>
+          <a:bodyPr rtlCol="0" anchor="ctr"/>
+          <a:lstStyle/>
+          <a:p>
+            <a:endParaRPr/>
+          </a:p>
+        </p:txBody>
+      </p:sp>
+      <p:sp>
+        <p:nvSpPr>
+          <p:cNvPr id="26" name="TextBox 25"/>
+          <p:cNvSpPr txBox="1"/>
+          <p:nvPr/>
+        </p:nvSpPr>
+        <p:spPr>
+          <a:xfrm>
+            <a:off x="734263" y="3822191"/>
+            <a:ext cx="3685031" cy="786384"/>
+          </a:xfrm>
+          <a:prstGeom prst="rect">
+            <a:avLst/>
+          </a:prstGeom>
+          <a:noFill/>
+        </p:spPr>
+        <p:txBody>
+          <a:bodyPr wrap="square" lIns="45720" tIns="27432" rIns="45720" bIns="27432" anchor="ctr">
+            <a:spAutoFit/>
+          </a:bodyPr>
+          <a:lstStyle/>
+          <a:p>
+            <a:pPr algn="r" rtl="1">
+              <a:spcAft>
+                <a:spcPts val="600"/>
+              </a:spcAft>
+            </a:pPr>
+            <a:r>
+              <a:rPr lang="he-IL" sz="1600" b="0" i="0">
+                <a:solidFill>
+                  <a:srgbClr val="E4572E"/>
+                </a:solidFill>
+                <a:latin typeface="Arial"/>
+                <a:cs typeface="Arial"/>
+              </a:rPr>
+              <a:t>Uniform — רציף</a:t>
+            </a:r>
+          </a:p>
+        </p:txBody>
+      </p:sp>
+      <p:sp>
+        <p:nvSpPr>
+          <p:cNvPr id="27" name="Rectangle 26"/>
+          <p:cNvSpPr/>
+          <p:nvPr/>
+        </p:nvSpPr>
+        <p:spPr>
+          <a:xfrm>
+            <a:off x="8625535" y="4608576"/>
+            <a:ext cx="3017520" cy="786384"/>
+          </a:xfrm>
+          <a:prstGeom prst="rect">
+            <a:avLst/>
+          </a:prstGeom>
+          <a:solidFill>
+            <a:srgbClr val="FFFFFF"/>
+          </a:solidFill>
+          <a:ln>
+            <a:noFill/>
+          </a:ln>
+          <a:effectLst/>
+        </p:spPr>
+        <p:style>
+          <a:lnRef idx="1">
+            <a:schemeClr val="accent1"/>
+          </a:lnRef>
+          <a:fillRef idx="3">
+            <a:schemeClr val="accent1"/>
+          </a:fillRef>
+          <a:effectRef idx="2">
+            <a:schemeClr val="accent1"/>
+          </a:effectRef>
+          <a:fontRef idx="minor">
+            <a:schemeClr val="lt1"/>
+          </a:fontRef>
+        </p:style>
+        <p:txBody>
+          <a:bodyPr rtlCol="0" anchor="ctr"/>
+          <a:lstStyle/>
+          <a:p>
+            <a:endParaRPr/>
+          </a:p>
+        </p:txBody>
+      </p:sp>
+      <p:sp>
+        <p:nvSpPr>
+          <p:cNvPr id="28" name="TextBox 27"/>
+          <p:cNvSpPr txBox="1"/>
+          <p:nvPr/>
+        </p:nvSpPr>
+        <p:spPr>
+          <a:xfrm>
+            <a:off x="8808415" y="4608576"/>
+            <a:ext cx="2651760" cy="786384"/>
+          </a:xfrm>
+          <a:prstGeom prst="rect">
+            <a:avLst/>
+          </a:prstGeom>
+          <a:noFill/>
+        </p:spPr>
+        <p:txBody>
+          <a:bodyPr wrap="square" lIns="45720" tIns="27432" rIns="45720" bIns="27432" anchor="ctr">
+            <a:spAutoFit/>
+          </a:bodyPr>
+          <a:lstStyle/>
+          <a:p>
+            <a:pPr algn="r" rtl="1">
+              <a:spcAft>
+                <a:spcPts val="600"/>
+              </a:spcAft>
+            </a:pPr>
+            <a:r>
+              <a:rPr lang="he-IL" sz="1600" b="1" i="0">
+                <a:solidFill>
+                  <a:srgbClr val="2B1E3F"/>
+                </a:solidFill>
+                <a:latin typeface="Arial"/>
+                <a:cs typeface="Arial"/>
+              </a:rPr>
+              <a:t>דוגם</a:t>
+            </a:r>
+          </a:p>
+        </p:txBody>
+      </p:sp>
+      <p:sp>
+        <p:nvSpPr>
+          <p:cNvPr id="29" name="Rectangle 28"/>
+          <p:cNvSpPr/>
+          <p:nvPr/>
+        </p:nvSpPr>
+        <p:spPr>
+          <a:xfrm>
+            <a:off x="4602175" y="4608576"/>
+            <a:ext cx="4023360" cy="786384"/>
+          </a:xfrm>
+          <a:prstGeom prst="rect">
+            <a:avLst/>
+          </a:prstGeom>
+          <a:solidFill>
+            <a:srgbClr val="FFFFFF"/>
+          </a:solidFill>
+          <a:ln>
+            <a:noFill/>
+          </a:ln>
+          <a:effectLst/>
+        </p:spPr>
+        <p:style>
+          <a:lnRef idx="1">
+            <a:schemeClr val="accent1"/>
+          </a:lnRef>
+          <a:fillRef idx="3">
+            <a:schemeClr val="accent1"/>
+          </a:fillRef>
+          <a:effectRef idx="2">
+            <a:schemeClr val="accent1"/>
+          </a:effectRef>
+          <a:fontRef idx="minor">
+            <a:schemeClr val="lt1"/>
+          </a:fontRef>
+        </p:style>
+        <p:txBody>
+          <a:bodyPr rtlCol="0" anchor="ctr"/>
+          <a:lstStyle/>
+          <a:p>
+            <a:endParaRPr/>
+          </a:p>
+        </p:txBody>
+      </p:sp>
+      <p:sp>
+        <p:nvSpPr>
+          <p:cNvPr id="30" name="TextBox 29"/>
+          <p:cNvSpPr txBox="1"/>
+          <p:nvPr/>
+        </p:nvSpPr>
+        <p:spPr>
+          <a:xfrm>
+            <a:off x="4785055" y="4608576"/>
+            <a:ext cx="3657600" cy="786384"/>
+          </a:xfrm>
+          <a:prstGeom prst="rect">
+            <a:avLst/>
+          </a:prstGeom>
+          <a:noFill/>
+        </p:spPr>
+        <p:txBody>
+          <a:bodyPr wrap="square" lIns="45720" tIns="27432" rIns="45720" bIns="27432" anchor="ctr">
+            <a:spAutoFit/>
+          </a:bodyPr>
+          <a:lstStyle/>
+          <a:p>
+            <a:pPr algn="r" rtl="0">
+              <a:spcAft>
+                <a:spcPts val="600"/>
+              </a:spcAft>
+            </a:pPr>
+            <a:r>
+              <a:rPr lang="en-US" sz="1600" b="0" i="0">
+                <a:solidFill>
+                  <a:srgbClr val="7B5EA7"/>
+                </a:solidFill>
+                <a:latin typeface="Arial"/>
+                <a:cs typeface="Arial"/>
+              </a:rPr>
+              <a:t>Metropolis</a:t>
+            </a:r>
+          </a:p>
+        </p:txBody>
+      </p:sp>
+      <p:sp>
+        <p:nvSpPr>
+          <p:cNvPr id="31" name="Rectangle 30"/>
+          <p:cNvSpPr/>
+          <p:nvPr/>
+        </p:nvSpPr>
+        <p:spPr>
+          <a:xfrm>
+            <a:off x="551383" y="4608576"/>
+            <a:ext cx="4050791" cy="786384"/>
+          </a:xfrm>
+          <a:prstGeom prst="rect">
+            <a:avLst/>
+          </a:prstGeom>
+          <a:solidFill>
+            <a:srgbClr val="FFFFFF"/>
+          </a:solidFill>
+          <a:ln>
+            <a:noFill/>
+          </a:ln>
+          <a:effectLst/>
+        </p:spPr>
+        <p:style>
+          <a:lnRef idx="1">
+            <a:schemeClr val="accent1"/>
+          </a:lnRef>
+          <a:fillRef idx="3">
+            <a:schemeClr val="accent1"/>
+          </a:fillRef>
+          <a:effectRef idx="2">
+            <a:schemeClr val="accent1"/>
+          </a:effectRef>
+          <a:fontRef idx="minor">
+            <a:schemeClr val="lt1"/>
+          </a:fontRef>
+        </p:style>
+        <p:txBody>
+          <a:bodyPr rtlCol="0" anchor="ctr"/>
+          <a:lstStyle/>
+          <a:p>
+            <a:endParaRPr/>
+          </a:p>
+        </p:txBody>
+      </p:sp>
+      <p:sp>
+        <p:nvSpPr>
+          <p:cNvPr id="32" name="TextBox 31"/>
+          <p:cNvSpPr txBox="1"/>
+          <p:nvPr/>
+        </p:nvSpPr>
+        <p:spPr>
+          <a:xfrm>
+            <a:off x="734263" y="4608576"/>
+            <a:ext cx="3685031" cy="786384"/>
+          </a:xfrm>
+          <a:prstGeom prst="rect">
+            <a:avLst/>
+          </a:prstGeom>
+          <a:noFill/>
+        </p:spPr>
+        <p:txBody>
+          <a:bodyPr wrap="square" lIns="45720" tIns="27432" rIns="45720" bIns="27432" anchor="ctr">
+            <a:spAutoFit/>
+          </a:bodyPr>
+          <a:lstStyle/>
+          <a:p>
+            <a:pPr algn="r" rtl="0">
+              <a:spcAft>
+                <a:spcPts val="600"/>
+              </a:spcAft>
+            </a:pPr>
+            <a:r>
+              <a:rPr lang="en-US" sz="1600" b="0" i="0">
+                <a:solidFill>
+                  <a:srgbClr val="E4572E"/>
+                </a:solidFill>
+                <a:latin typeface="Arial"/>
+                <a:cs typeface="Arial"/>
+              </a:rPr>
+              <a:t>NUTS (ברירת המחדל)</a:t>
+            </a:r>
+          </a:p>
+        </p:txBody>
+      </p:sp>
+      <p:sp>
+        <p:nvSpPr>
+          <p:cNvPr id="33" name="Rectangle 32"/>
+          <p:cNvSpPr/>
+          <p:nvPr/>
+        </p:nvSpPr>
+        <p:spPr>
+          <a:xfrm>
+            <a:off x="8625535" y="5394960"/>
+            <a:ext cx="3017520" cy="786384"/>
+          </a:xfrm>
+          <a:prstGeom prst="rect">
+            <a:avLst/>
+          </a:prstGeom>
+          <a:solidFill>
+            <a:srgbClr val="F3F0F7"/>
+          </a:solidFill>
+          <a:ln>
+            <a:noFill/>
+          </a:ln>
+          <a:effectLst/>
+        </p:spPr>
+        <p:style>
+          <a:lnRef idx="1">
+            <a:schemeClr val="accent1"/>
+          </a:lnRef>
+          <a:fillRef idx="3">
+            <a:schemeClr val="accent1"/>
+          </a:fillRef>
+          <a:effectRef idx="2">
+            <a:schemeClr val="accent1"/>
+          </a:effectRef>
+          <a:fontRef idx="minor">
+            <a:schemeClr val="lt1"/>
+          </a:fontRef>
+        </p:style>
+        <p:txBody>
+          <a:bodyPr rtlCol="0" anchor="ctr"/>
+          <a:lstStyle/>
+          <a:p>
+            <a:endParaRPr/>
+          </a:p>
+        </p:txBody>
+      </p:sp>
+      <p:sp>
+        <p:nvSpPr>
+          <p:cNvPr id="34" name="TextBox 33"/>
+          <p:cNvSpPr txBox="1"/>
+          <p:nvPr/>
+        </p:nvSpPr>
+        <p:spPr>
+          <a:xfrm>
+            <a:off x="8808415" y="5394960"/>
+            <a:ext cx="2651760" cy="786384"/>
+          </a:xfrm>
+          <a:prstGeom prst="rect">
+            <a:avLst/>
+          </a:prstGeom>
+          <a:noFill/>
+        </p:spPr>
+        <p:txBody>
+          <a:bodyPr wrap="square" lIns="45720" tIns="27432" rIns="45720" bIns="27432" anchor="ctr">
+            <a:spAutoFit/>
+          </a:bodyPr>
+          <a:lstStyle/>
+          <a:p>
+            <a:pPr algn="r" rtl="1">
+              <a:spcAft>
+                <a:spcPts val="600"/>
+              </a:spcAft>
+            </a:pPr>
+            <a:r>
+              <a:rPr lang="he-IL" sz="1600" b="1" i="0">
+                <a:solidFill>
+                  <a:srgbClr val="2B1E3F"/>
+                </a:solidFill>
+                <a:latin typeface="Arial"/>
+                <a:cs typeface="Arial"/>
+              </a:rPr>
+              <a:t>כיוון השינוי</a:t>
+            </a:r>
+          </a:p>
+        </p:txBody>
+      </p:sp>
+      <p:sp>
+        <p:nvSpPr>
+          <p:cNvPr id="35" name="Rectangle 34"/>
+          <p:cNvSpPr/>
+          <p:nvPr/>
+        </p:nvSpPr>
+        <p:spPr>
+          <a:xfrm>
+            <a:off x="4602175" y="5394960"/>
+            <a:ext cx="4023360" cy="786384"/>
+          </a:xfrm>
+          <a:prstGeom prst="rect">
+            <a:avLst/>
+          </a:prstGeom>
+          <a:solidFill>
+            <a:srgbClr val="F3F0F7"/>
+          </a:solidFill>
+          <a:ln>
+            <a:noFill/>
+          </a:ln>
+          <a:effectLst/>
+        </p:spPr>
+        <p:style>
+          <a:lnRef idx="1">
+            <a:schemeClr val="accent1"/>
+          </a:lnRef>
+          <a:fillRef idx="3">
+            <a:schemeClr val="accent1"/>
+          </a:fillRef>
+          <a:effectRef idx="2">
+            <a:schemeClr val="accent1"/>
+          </a:effectRef>
+          <a:fontRef idx="minor">
+            <a:schemeClr val="lt1"/>
+          </a:fontRef>
+        </p:style>
+        <p:txBody>
+          <a:bodyPr rtlCol="0" anchor="ctr"/>
+          <a:lstStyle/>
+          <a:p>
+            <a:endParaRPr/>
+          </a:p>
+        </p:txBody>
+      </p:sp>
+      <p:sp>
+        <p:nvSpPr>
+          <p:cNvPr id="36" name="TextBox 35"/>
+          <p:cNvSpPr txBox="1"/>
+          <p:nvPr/>
+        </p:nvSpPr>
+        <p:spPr>
+          <a:xfrm>
+            <a:off x="4785055" y="5394960"/>
+            <a:ext cx="3657600" cy="786384"/>
+          </a:xfrm>
+          <a:prstGeom prst="rect">
+            <a:avLst/>
+          </a:prstGeom>
+          <a:noFill/>
+        </p:spPr>
+        <p:txBody>
+          <a:bodyPr wrap="square" lIns="45720" tIns="27432" rIns="45720" bIns="27432" anchor="ctr">
+            <a:spAutoFit/>
+          </a:bodyPr>
+          <a:lstStyle/>
+          <a:p>
+            <a:pPr algn="r" rtl="1">
+              <a:spcAft>
+                <a:spcPts val="600"/>
+              </a:spcAft>
+            </a:pPr>
+            <a:r>
+              <a:rPr lang="he-IL" sz="1600" b="0" i="0">
+                <a:solidFill>
+                  <a:srgbClr val="7B5EA7"/>
+                </a:solidFill>
+                <a:latin typeface="Arial"/>
+                <a:cs typeface="Arial"/>
+              </a:rPr>
+              <a:t>עלייה</a:t>
+            </a:r>
+          </a:p>
+        </p:txBody>
+      </p:sp>
+      <p:sp>
+        <p:nvSpPr>
+          <p:cNvPr id="37" name="Rectangle 36"/>
+          <p:cNvSpPr/>
+          <p:nvPr/>
+        </p:nvSpPr>
+        <p:spPr>
+          <a:xfrm>
+            <a:off x="551383" y="5394960"/>
+            <a:ext cx="4050791" cy="786384"/>
+          </a:xfrm>
+          <a:prstGeom prst="rect">
+            <a:avLst/>
+          </a:prstGeom>
+          <a:solidFill>
+            <a:srgbClr val="F3F0F7"/>
+          </a:solidFill>
+          <a:ln>
+            <a:noFill/>
+          </a:ln>
+          <a:effectLst/>
+        </p:spPr>
+        <p:style>
+          <a:lnRef idx="1">
+            <a:schemeClr val="accent1"/>
+          </a:lnRef>
+          <a:fillRef idx="3">
+            <a:schemeClr val="accent1"/>
+          </a:fillRef>
+          <a:effectRef idx="2">
+            <a:schemeClr val="accent1"/>
+          </a:effectRef>
+          <a:fontRef idx="minor">
+            <a:schemeClr val="lt1"/>
+          </a:fontRef>
+        </p:style>
+        <p:txBody>
+          <a:bodyPr rtlCol="0" anchor="ctr"/>
+          <a:lstStyle/>
+          <a:p>
+            <a:endParaRPr/>
+          </a:p>
+        </p:txBody>
+      </p:sp>
+      <p:sp>
+        <p:nvSpPr>
+          <p:cNvPr id="38" name="TextBox 37"/>
+          <p:cNvSpPr txBox="1"/>
+          <p:nvPr/>
+        </p:nvSpPr>
+        <p:spPr>
+          <a:xfrm>
+            <a:off x="734263" y="5394960"/>
+            <a:ext cx="3685031" cy="786384"/>
+          </a:xfrm>
+          <a:prstGeom prst="rect">
+            <a:avLst/>
+          </a:prstGeom>
+          <a:noFill/>
+        </p:spPr>
+        <p:txBody>
+          <a:bodyPr wrap="square" lIns="45720" tIns="27432" rIns="45720" bIns="27432" anchor="ctr">
+            <a:spAutoFit/>
+          </a:bodyPr>
+          <a:lstStyle/>
+          <a:p>
+            <a:pPr algn="r" rtl="1">
+              <a:spcAft>
+                <a:spcPts val="600"/>
+              </a:spcAft>
+            </a:pPr>
+            <a:r>
+              <a:rPr lang="he-IL" sz="1600" b="0" i="0">
+                <a:solidFill>
+                  <a:srgbClr val="E4572E"/>
+                </a:solidFill>
+                <a:latin typeface="Arial"/>
+                <a:cs typeface="Arial"/>
+              </a:rPr>
+              <a:t>ירידה</a:t>
+            </a:r>
+          </a:p>
+        </p:txBody>
+      </p:sp>
+    </p:spTree>
+  </p:cSld>
+  <p:clrMapOvr>
+    <a:masterClrMapping/>
+  </p:clrMapOvr>
+</p:sld>
+</file>
+
+<file path=ppt/slides/slide21.xml><?xml version="1.0" encoding="utf-8"?>
+<p:sld xmlns:a="http://schemas.openxmlformats.org/drawingml/2006/main" xmlns:r="http://schemas.openxmlformats.org/officeDocument/2006/relationships" xmlns:p="http://schemas.openxmlformats.org/presentationml/2006/main">
+  <p:cSld>
+    <p:bg>
+      <p:bgPr>
+        <a:solidFill>
           <a:srgbClr val="2B1E3F"/>
         </a:solidFill>
         <a:effectLst/>
@@ -15826,14 +16682,34 @@
               </a:spcAft>
             </a:pPr>
             <a:r>
-              <a:rPr lang="en-US" sz="1400" b="0" i="0">
+              <a:rPr lang="en-US" sz="1400" b="0" i="0" dirty="0">
                 <a:solidFill>
                   <a:srgbClr val="EDE8F5"/>
                 </a:solidFill>
                 <a:latin typeface="Courier New"/>
                 <a:cs typeface="Courier New"/>
               </a:rPr>
-              <a:t>&gt;&gt;&gt; day_ind[:5]</a:t>
+              <a:t>&gt;&gt;&gt; </a:t>
+            </a:r>
+            <a:r>
+              <a:rPr lang="en-US" sz="1400" b="0" i="0" dirty="0" err="1">
+                <a:solidFill>
+                  <a:srgbClr val="EDE8F5"/>
+                </a:solidFill>
+                <a:latin typeface="Courier New"/>
+                <a:cs typeface="Courier New"/>
+              </a:rPr>
+              <a:t>day_ind</a:t>
+            </a:r>
+            <a:r>
+              <a:rPr lang="en-US" sz="1400" b="0" i="0" dirty="0">
+                <a:solidFill>
+                  <a:srgbClr val="EDE8F5"/>
+                </a:solidFill>
+                <a:latin typeface="Courier New"/>
+                <a:cs typeface="Courier New"/>
+              </a:rPr>
+              <a:t>[:5]</a:t>
             </a:r>
           </a:p>
           <a:p>
@@ -15843,7 +16719,7 @@
               </a:spcAft>
             </a:pPr>
             <a:r>
-              <a:rPr lang="en-US" sz="1400" b="0" i="0">
+              <a:rPr lang="en-US" sz="1400" b="0" i="0" dirty="0">
                 <a:solidFill>
                   <a:srgbClr val="EDE8F5"/>
                 </a:solidFill>
@@ -15860,7 +16736,7 @@
               </a:spcAft>
             </a:pPr>
             <a:r>
-              <a:rPr lang="en-US" sz="1400" b="0" i="0">
+              <a:rPr lang="en-US" sz="1400" b="0" i="0" dirty="0">
                 <a:solidFill>
                   <a:srgbClr val="EDE8F5"/>
                 </a:solidFill>
@@ -15877,14 +16753,24 @@
               </a:spcAft>
             </a:pPr>
             <a:r>
-              <a:rPr lang="en-US" sz="1400" b="0" i="0">
+              <a:rPr lang="en-US" sz="1400" b="0" i="0" dirty="0" err="1">
                 <a:solidFill>
                   <a:srgbClr val="EDE8F5"/>
                 </a:solidFill>
                 <a:latin typeface="Courier New"/>
                 <a:cs typeface="Courier New"/>
               </a:rPr>
-              <a:t>DatetimeIndex(['2021-04-01', '2021-04-02',</a:t>
+              <a:t>DatetimeIndex</a:t>
+            </a:r>
+            <a:r>
+              <a:rPr lang="en-US" sz="1400" b="0" i="0" dirty="0">
+                <a:solidFill>
+                  <a:srgbClr val="EDE8F5"/>
+                </a:solidFill>
+                <a:latin typeface="Courier New"/>
+                <a:cs typeface="Courier New"/>
+              </a:rPr>
+              <a:t>(['2021-04-01', '2021-04-02',</a:t>
             </a:r>
           </a:p>
           <a:p>
@@ -15894,7 +16780,7 @@
               </a:spcAft>
             </a:pPr>
             <a:r>
-              <a:rPr lang="en-US" sz="1400" b="0" i="0">
+              <a:rPr lang="en-US" sz="1400" b="0" i="0" dirty="0">
                 <a:solidFill>
                   <a:srgbClr val="EDE8F5"/>
                 </a:solidFill>
@@ -17921,7 +18807,7 @@
         </p:nvSpPr>
         <p:spPr>
           <a:xfrm>
-            <a:off x="8122615" y="4800600"/>
+            <a:off x="470865" y="4800600"/>
             <a:ext cx="3520440" cy="1463040"/>
           </a:xfrm>
           <a:prstGeom prst="roundRect">
@@ -17967,7 +18853,7 @@
         </p:nvSpPr>
         <p:spPr>
           <a:xfrm>
-            <a:off x="10865815" y="4983480"/>
+            <a:off x="3214065" y="4983480"/>
             <a:ext cx="548640" cy="548640"/>
           </a:xfrm>
           <a:prstGeom prst="ellipse">
@@ -18021,7 +18907,7 @@
         </p:nvSpPr>
         <p:spPr>
           <a:xfrm>
-            <a:off x="8305495" y="4983480"/>
+            <a:off x="653745" y="4983480"/>
             <a:ext cx="2514600" cy="548640"/>
           </a:xfrm>
           <a:prstGeom prst="rect">
@@ -18061,7 +18947,7 @@
         </p:nvSpPr>
         <p:spPr>
           <a:xfrm>
-            <a:off x="8305495" y="5532120"/>
+            <a:off x="653745" y="5532120"/>
             <a:ext cx="3154680" cy="685800"/>
           </a:xfrm>
           <a:prstGeom prst="rect">
@@ -18301,7 +19187,7 @@
         </p:nvSpPr>
         <p:spPr>
           <a:xfrm>
-            <a:off x="551383" y="4800600"/>
+            <a:off x="8119872" y="4800600"/>
             <a:ext cx="3520440" cy="1463040"/>
           </a:xfrm>
           <a:prstGeom prst="roundRect">
@@ -18347,7 +19233,7 @@
         </p:nvSpPr>
         <p:spPr>
           <a:xfrm>
-            <a:off x="3294583" y="4983480"/>
+            <a:off x="10863072" y="4983480"/>
             <a:ext cx="548640" cy="548640"/>
           </a:xfrm>
           <a:prstGeom prst="ellipse">
@@ -18401,7 +19287,7 @@
         </p:nvSpPr>
         <p:spPr>
           <a:xfrm>
-            <a:off x="734263" y="4983480"/>
+            <a:off x="8302752" y="4983480"/>
             <a:ext cx="2514600" cy="548640"/>
           </a:xfrm>
           <a:prstGeom prst="rect">
@@ -18421,7 +19307,7 @@
               </a:spcAft>
             </a:pPr>
             <a:r>
-              <a:rPr lang="he-IL" sz="1600" b="1" i="0">
+              <a:rPr lang="he-IL" sz="1600" b="1" i="0" dirty="0">
                 <a:solidFill>
                   <a:srgbClr val="2B1E3F"/>
                 </a:solidFill>
@@ -18441,7 +19327,7 @@
         </p:nvSpPr>
         <p:spPr>
           <a:xfrm>
-            <a:off x="734263" y="5532120"/>
+            <a:off x="8302752" y="5532120"/>
             <a:ext cx="3154680" cy="685800"/>
           </a:xfrm>
           <a:prstGeom prst="rect">
@@ -18461,7 +19347,7 @@
               </a:spcAft>
             </a:pPr>
             <a:r>
-              <a:rPr lang="he-IL" sz="1300" b="0" i="0">
+              <a:rPr lang="he-IL" sz="1300" b="0" i="0" dirty="0">
                 <a:solidFill>
                   <a:srgbClr val="6B6478"/>
                 </a:solidFill>
